--- a/presentations/03-gui-event-driven.en.pptx
+++ b/presentations/03-gui-event-driven.en.pptx
@@ -3844,7 +3844,7 @@
                 <a:ea typeface="Consolas" pitchFamily="34" charset="-122"/>
                 <a:cs typeface="Consolas" pitchFamily="34" charset="-120"/>
               </a:rPr>
-              <a:t>LECTURE 01</a:t>
+              <a:t>LECTURE 03</a:t>
             </a:r>
             <a:endParaRPr lang="en-US" sz="900" dirty="0"/>
           </a:p>
@@ -4364,7 +4364,7 @@
                 <a:ea typeface="Consolas" pitchFamily="34" charset="-122"/>
                 <a:cs typeface="Consolas" pitchFamily="34" charset="-120"/>
               </a:rPr>
-              <a:t>LECTURE 01</a:t>
+              <a:t>LECTURE 03</a:t>
             </a:r>
             <a:endParaRPr lang="en-US" sz="900" dirty="0"/>
           </a:p>
@@ -4912,7 +4912,7 @@
                 <a:ea typeface="Consolas" pitchFamily="34" charset="-122"/>
                 <a:cs typeface="Consolas" pitchFamily="34" charset="-120"/>
               </a:rPr>
-              <a:t>LECTURE 01</a:t>
+              <a:t>LECTURE 03</a:t>
             </a:r>
             <a:endParaRPr lang="en-US" sz="900" dirty="0"/>
           </a:p>
@@ -5387,7 +5387,7 @@
                 <a:ea typeface="Consolas" pitchFamily="34" charset="-122"/>
                 <a:cs typeface="Consolas" pitchFamily="34" charset="-120"/>
               </a:rPr>
-              <a:t>LECTURE 01</a:t>
+              <a:t>LECTURE 03</a:t>
             </a:r>
             <a:endParaRPr lang="en-US" sz="900" dirty="0"/>
           </a:p>
@@ -5884,7 +5884,7 @@
                 <a:ea typeface="Consolas" pitchFamily="34" charset="-122"/>
                 <a:cs typeface="Consolas" pitchFamily="34" charset="-120"/>
               </a:rPr>
-              <a:t>LECTURE 01</a:t>
+              <a:t>LECTURE 03</a:t>
             </a:r>
             <a:endParaRPr lang="en-US" sz="900" dirty="0"/>
           </a:p>
@@ -6258,7 +6258,7 @@
                 <a:ea typeface="Consolas" pitchFamily="34" charset="-122"/>
                 <a:cs typeface="Consolas" pitchFamily="34" charset="-120"/>
               </a:rPr>
-              <a:t>LECTURE 01</a:t>
+              <a:t>LECTURE 03</a:t>
             </a:r>
             <a:endParaRPr lang="en-US" sz="900" dirty="0"/>
           </a:p>
@@ -6772,7 +6772,7 @@
                 <a:ea typeface="Consolas" pitchFamily="34" charset="-122"/>
                 <a:cs typeface="Consolas" pitchFamily="34" charset="-120"/>
               </a:rPr>
-              <a:t>LECTURE 01</a:t>
+              <a:t>LECTURE 03</a:t>
             </a:r>
             <a:endParaRPr lang="en-US" sz="900" dirty="0"/>
           </a:p>
@@ -7386,7 +7386,7 @@
                 <a:ea typeface="Consolas" pitchFamily="34" charset="-122"/>
                 <a:cs typeface="Consolas" pitchFamily="34" charset="-120"/>
               </a:rPr>
-              <a:t>LECTURE 01</a:t>
+              <a:t>LECTURE 03</a:t>
             </a:r>
             <a:endParaRPr lang="en-US" sz="900" dirty="0"/>
           </a:p>
@@ -7860,7 +7860,7 @@
                 <a:ea typeface="Consolas" pitchFamily="34" charset="-122"/>
                 <a:cs typeface="Consolas" pitchFamily="34" charset="-120"/>
               </a:rPr>
-              <a:t>LECTURE 01</a:t>
+              <a:t>LECTURE 03</a:t>
             </a:r>
             <a:endParaRPr lang="en-US" sz="900" dirty="0"/>
           </a:p>
@@ -8223,7 +8223,7 @@
                 <a:ea typeface="Consolas" pitchFamily="34" charset="-122"/>
                 <a:cs typeface="Consolas" pitchFamily="34" charset="-120"/>
               </a:rPr>
-              <a:t>LECTURE 01</a:t>
+              <a:t>LECTURE 03</a:t>
             </a:r>
             <a:endParaRPr lang="en-US" sz="900" dirty="0"/>
           </a:p>
@@ -8597,7 +8597,7 @@
                 <a:ea typeface="Consolas" pitchFamily="34" charset="-122"/>
                 <a:cs typeface="Consolas" pitchFamily="34" charset="-120"/>
               </a:rPr>
-              <a:t>LECTURE 01</a:t>
+              <a:t>LECTURE 03</a:t>
             </a:r>
             <a:endParaRPr lang="en-US" sz="900" dirty="0"/>
           </a:p>
@@ -8960,7 +8960,7 @@
                 <a:ea typeface="Consolas" pitchFamily="34" charset="-122"/>
                 <a:cs typeface="Consolas" pitchFamily="34" charset="-120"/>
               </a:rPr>
-              <a:t>LECTURE 01</a:t>
+              <a:t>LECTURE 03</a:t>
             </a:r>
             <a:endParaRPr lang="en-US" sz="900" dirty="0"/>
           </a:p>
@@ -9457,7 +9457,7 @@
                 <a:ea typeface="Consolas" pitchFamily="34" charset="-122"/>
                 <a:cs typeface="Consolas" pitchFamily="34" charset="-120"/>
               </a:rPr>
-              <a:t>LECTURE 01</a:t>
+              <a:t>LECTURE 03</a:t>
             </a:r>
             <a:endParaRPr lang="en-US" sz="900" dirty="0"/>
           </a:p>
@@ -9988,7 +9988,7 @@
                 <a:ea typeface="Consolas" pitchFamily="34" charset="-122"/>
                 <a:cs typeface="Consolas" pitchFamily="34" charset="-120"/>
               </a:rPr>
-              <a:t>LECTURE 01</a:t>
+              <a:t>LECTURE 03</a:t>
             </a:r>
             <a:endParaRPr lang="en-US" sz="900" dirty="0"/>
           </a:p>
@@ -10362,7 +10362,7 @@
                 <a:ea typeface="Consolas" pitchFamily="34" charset="-122"/>
                 <a:cs typeface="Consolas" pitchFamily="34" charset="-120"/>
               </a:rPr>
-              <a:t>LECTURE 01</a:t>
+              <a:t>LECTURE 03</a:t>
             </a:r>
             <a:endParaRPr lang="en-US" sz="900" dirty="0"/>
           </a:p>
@@ -10933,7 +10933,7 @@
                 <a:ea typeface="Consolas" pitchFamily="34" charset="-122"/>
                 <a:cs typeface="Consolas" pitchFamily="34" charset="-120"/>
               </a:rPr>
-              <a:t>LECTURE 01</a:t>
+              <a:t>LECTURE 03</a:t>
             </a:r>
             <a:endParaRPr lang="en-US" sz="900" dirty="0"/>
           </a:p>
@@ -11488,7 +11488,7 @@
                 <a:ea typeface="Consolas" pitchFamily="34" charset="-122"/>
                 <a:cs typeface="Consolas" pitchFamily="34" charset="-120"/>
               </a:rPr>
-              <a:t>LECTURE 01</a:t>
+              <a:t>LECTURE 03</a:t>
             </a:r>
             <a:endParaRPr lang="en-US" sz="900" dirty="0"/>
           </a:p>
@@ -12036,7 +12036,7 @@
                 <a:ea typeface="Consolas" pitchFamily="34" charset="-122"/>
                 <a:cs typeface="Consolas" pitchFamily="34" charset="-120"/>
               </a:rPr>
-              <a:t>LECTURE 01</a:t>
+              <a:t>LECTURE 03</a:t>
             </a:r>
             <a:endParaRPr lang="en-US" sz="900" dirty="0"/>
           </a:p>
@@ -12410,7 +12410,7 @@
                 <a:ea typeface="Consolas" pitchFamily="34" charset="-122"/>
                 <a:cs typeface="Consolas" pitchFamily="34" charset="-120"/>
               </a:rPr>
-              <a:t>LECTURE 01</a:t>
+              <a:t>LECTURE 03</a:t>
             </a:r>
             <a:endParaRPr lang="en-US" sz="900" dirty="0"/>
           </a:p>
@@ -12930,7 +12930,7 @@
                 <a:ea typeface="Consolas" pitchFamily="34" charset="-122"/>
                 <a:cs typeface="Consolas" pitchFamily="34" charset="-120"/>
               </a:rPr>
-              <a:t>LECTURE 01</a:t>
+              <a:t>LECTURE 03</a:t>
             </a:r>
             <a:endParaRPr lang="en-US" sz="900" dirty="0"/>
           </a:p>
@@ -13427,7 +13427,7 @@
                 <a:ea typeface="Consolas" pitchFamily="34" charset="-122"/>
                 <a:cs typeface="Consolas" pitchFamily="34" charset="-120"/>
               </a:rPr>
-              <a:t>LECTURE 01</a:t>
+              <a:t>LECTURE 03</a:t>
             </a:r>
             <a:endParaRPr lang="en-US" sz="900" dirty="0"/>
           </a:p>
@@ -13790,7 +13790,7 @@
                 <a:ea typeface="Consolas" pitchFamily="34" charset="-122"/>
                 <a:cs typeface="Consolas" pitchFamily="34" charset="-120"/>
               </a:rPr>
-              <a:t>LECTURE 01</a:t>
+              <a:t>LECTURE 03</a:t>
             </a:r>
             <a:endParaRPr lang="en-US" sz="900" dirty="0"/>
           </a:p>
@@ -14632,7 +14632,7 @@
                 <a:ea typeface="Consolas" pitchFamily="34" charset="-122"/>
                 <a:cs typeface="Consolas" pitchFamily="34" charset="-120"/>
               </a:rPr>
-              <a:t>LECTURE 01</a:t>
+              <a:t>LECTURE 03</a:t>
             </a:r>
             <a:endParaRPr lang="en-US" sz="900" dirty="0"/>
           </a:p>
@@ -15089,7 +15089,7 @@
                 <a:ea typeface="Consolas" pitchFamily="34" charset="-122"/>
                 <a:cs typeface="Consolas" pitchFamily="34" charset="-120"/>
               </a:rPr>
-              <a:t>LECTURE 01</a:t>
+              <a:t>LECTURE 03</a:t>
             </a:r>
             <a:endParaRPr lang="en-US" sz="900" dirty="0"/>
           </a:p>
@@ -15463,7 +15463,7 @@
                 <a:ea typeface="Consolas" pitchFamily="34" charset="-122"/>
                 <a:cs typeface="Consolas" pitchFamily="34" charset="-120"/>
               </a:rPr>
-              <a:t>LECTURE 01</a:t>
+              <a:t>LECTURE 03</a:t>
             </a:r>
             <a:endParaRPr lang="en-US" sz="900" dirty="0"/>
           </a:p>
@@ -16077,7 +16077,7 @@
                 <a:ea typeface="Consolas" pitchFamily="34" charset="-122"/>
                 <a:cs typeface="Consolas" pitchFamily="34" charset="-120"/>
               </a:rPr>
-              <a:t>LECTURE 01</a:t>
+              <a:t>LECTURE 03</a:t>
             </a:r>
             <a:endParaRPr lang="en-US" sz="900" dirty="0"/>
           </a:p>
@@ -16440,7 +16440,7 @@
                 <a:ea typeface="Consolas" pitchFamily="34" charset="-122"/>
                 <a:cs typeface="Consolas" pitchFamily="34" charset="-120"/>
               </a:rPr>
-              <a:t>LECTURE 01</a:t>
+              <a:t>LECTURE 03</a:t>
             </a:r>
             <a:endParaRPr lang="en-US" sz="900" dirty="0"/>
           </a:p>
@@ -16937,7 +16937,7 @@
                 <a:ea typeface="Consolas" pitchFamily="34" charset="-122"/>
                 <a:cs typeface="Consolas" pitchFamily="34" charset="-120"/>
               </a:rPr>
-              <a:t>LECTURE 01</a:t>
+              <a:t>LECTURE 03</a:t>
             </a:r>
             <a:endParaRPr lang="en-US" sz="900" dirty="0"/>
           </a:p>

--- a/presentations/03-gui-event-driven.en.pptx
+++ b/presentations/03-gui-event-driven.en.pptx
@@ -2931,7 +2931,7 @@
         <p:spPr>
           <a:xfrm>
             <a:off x="0" y="0"/>
-            <a:ext cx="237744" cy="6858000"/>
+            <a:ext cx="201168" cy="6858000"/>
           </a:xfrm>
           <a:prstGeom prst="rect">
             <a:avLst/>
@@ -2974,7 +2974,7 @@
               <a:buNone/>
             </a:pPr>
             <a:r>
-              <a:rPr lang="en-US" sz="1000" b="1" spc="110" kern="0" dirty="0">
+              <a:rPr lang="en-US" sz="950" b="1" spc="80" kern="0" dirty="0">
                 <a:solidFill>
                   <a:srgbClr val="1877B9"/>
                 </a:solidFill>
@@ -2984,7 +2984,7 @@
               </a:rPr>
               <a:t>PROGRAMMING IN PYTHON</a:t>
             </a:r>
-            <a:endParaRPr lang="en-US" sz="1000" dirty="0"/>
+            <a:endParaRPr lang="en-US" sz="950" dirty="0"/>
           </a:p>
         </p:txBody>
       </p:sp>
@@ -2996,8 +2996,49 @@
         </p:nvSpPr>
         <p:spPr>
           <a:xfrm>
-            <a:off x="749808" y="2148840"/>
-            <a:ext cx="9784080" cy="914400"/>
+            <a:off x="9829800" y="685800"/>
+            <a:ext cx="1691640" cy="219456"/>
+          </a:xfrm>
+          <a:prstGeom prst="rect">
+            <a:avLst/>
+          </a:prstGeom>
+          <a:noFill/>
+          <a:ln/>
+        </p:spPr>
+        <p:txBody>
+          <a:bodyPr wrap="square" lIns="0" tIns="0" rIns="0" bIns="0" rtlCol="0" anchor="ctr">
+            <a:normAutofit/>
+          </a:bodyPr>
+          <a:lstStyle/>
+          <a:p>
+            <a:pPr algn="r" indent="0" marL="0">
+              <a:buNone/>
+            </a:pPr>
+            <a:r>
+              <a:rPr lang="en-US" sz="920" b="1" dirty="0">
+                <a:solidFill>
+                  <a:srgbClr val="5E6B78"/>
+                </a:solidFill>
+                <a:latin typeface="Consolas" pitchFamily="34" charset="0"/>
+                <a:ea typeface="Consolas" pitchFamily="34" charset="-122"/>
+                <a:cs typeface="Consolas" pitchFamily="34" charset="-120"/>
+              </a:rPr>
+              <a:t>LECTURE 03</a:t>
+            </a:r>
+            <a:endParaRPr lang="en-US" sz="920" dirty="0"/>
+          </a:p>
+        </p:txBody>
+      </p:sp>
+      <p:sp>
+        <p:nvSpPr>
+          <p:cNvPr id="5" name="Text 3"/>
+          <p:cNvSpPr/>
+          <p:nvPr/>
+        </p:nvSpPr>
+        <p:spPr>
+          <a:xfrm>
+            <a:off x="749808" y="2066544"/>
+            <a:ext cx="9921240" cy="969264"/>
           </a:xfrm>
           <a:prstGeom prst="rect">
             <a:avLst/>
@@ -3018,68 +3059,68 @@
               <a:rPr lang="en-US" sz="4200" b="1" dirty="0">
                 <a:solidFill>
                   <a:srgbClr val="16324F"/>
+                </a:solidFill>
+                <a:latin typeface="Aptos Display" pitchFamily="34" charset="0"/>
+                <a:ea typeface="Aptos Display" pitchFamily="34" charset="-122"/>
+                <a:cs typeface="Aptos Display" pitchFamily="34" charset="-120"/>
+              </a:rPr>
+              <a:t>GUI and Event-Driven Programming</a:t>
+            </a:r>
+            <a:endParaRPr lang="en-US" sz="4200" dirty="0"/>
+          </a:p>
+        </p:txBody>
+      </p:sp>
+      <p:sp>
+        <p:nvSpPr>
+          <p:cNvPr id="6" name="Text 4"/>
+          <p:cNvSpPr/>
+          <p:nvPr/>
+        </p:nvSpPr>
+        <p:spPr>
+          <a:xfrm>
+            <a:off x="786384" y="3273552"/>
+            <a:ext cx="8503920" cy="420624"/>
+          </a:xfrm>
+          <a:prstGeom prst="rect">
+            <a:avLst/>
+          </a:prstGeom>
+          <a:noFill/>
+          <a:ln/>
+        </p:spPr>
+        <p:txBody>
+          <a:bodyPr wrap="square" lIns="0" tIns="0" rIns="0" bIns="0" rtlCol="0" anchor="t">
+            <a:normAutofit/>
+          </a:bodyPr>
+          <a:lstStyle/>
+          <a:p>
+            <a:pPr algn="l" indent="0" marL="0">
+              <a:buNone/>
+            </a:pPr>
+            <a:r>
+              <a:rPr lang="en-US" sz="1950" dirty="0">
+                <a:solidFill>
+                  <a:srgbClr val="5E6B78"/>
                 </a:solidFill>
                 <a:latin typeface="Aptos" pitchFamily="34" charset="0"/>
                 <a:ea typeface="Aptos" pitchFamily="34" charset="-122"/>
                 <a:cs typeface="Aptos" pitchFamily="34" charset="-120"/>
               </a:rPr>
-              <a:t>GUI and Event-Driven Programming</a:t>
-            </a:r>
-            <a:endParaRPr lang="en-US" sz="4200" dirty="0"/>
-          </a:p>
-        </p:txBody>
-      </p:sp>
-      <p:sp>
-        <p:nvSpPr>
-          <p:cNvPr id="5" name="Text 3"/>
-          <p:cNvSpPr/>
-          <p:nvPr/>
-        </p:nvSpPr>
-        <p:spPr>
-          <a:xfrm>
-            <a:off x="786384" y="3310128"/>
-            <a:ext cx="8321040" cy="384048"/>
-          </a:xfrm>
-          <a:prstGeom prst="rect">
-            <a:avLst/>
-          </a:prstGeom>
-          <a:noFill/>
-          <a:ln/>
-        </p:spPr>
-        <p:txBody>
-          <a:bodyPr wrap="square" lIns="0" tIns="0" rIns="0" bIns="0" rtlCol="0" anchor="t">
-            <a:normAutofit/>
-          </a:bodyPr>
-          <a:lstStyle/>
-          <a:p>
-            <a:pPr algn="l" indent="0" marL="0">
-              <a:buNone/>
-            </a:pPr>
-            <a:r>
-              <a:rPr lang="en-US" sz="2000" dirty="0">
-                <a:solidFill>
-                  <a:srgbClr val="5E6B78"/>
-                </a:solidFill>
-                <a:latin typeface="Aptos" pitchFamily="34" charset="0"/>
-                <a:ea typeface="Aptos" pitchFamily="34" charset="-122"/>
-                <a:cs typeface="Aptos" pitchFamily="34" charset="-120"/>
-              </a:rPr>
               <a:t>When the user determines program order</a:t>
             </a:r>
-            <a:endParaRPr lang="en-US" sz="2000" dirty="0"/>
-          </a:p>
-        </p:txBody>
-      </p:sp>
-      <p:sp>
-        <p:nvSpPr>
-          <p:cNvPr id="6" name="Shape 4"/>
-          <p:cNvSpPr/>
-          <p:nvPr/>
-        </p:nvSpPr>
-        <p:spPr>
-          <a:xfrm>
-            <a:off x="749808" y="5193792"/>
-            <a:ext cx="2560320" cy="118872"/>
+            <a:endParaRPr lang="en-US" sz="1950" dirty="0"/>
+          </a:p>
+        </p:txBody>
+      </p:sp>
+      <p:sp>
+        <p:nvSpPr>
+          <p:cNvPr id="7" name="Shape 5"/>
+          <p:cNvSpPr/>
+          <p:nvPr/>
+        </p:nvSpPr>
+        <p:spPr>
+          <a:xfrm>
+            <a:off x="749808" y="5212080"/>
+            <a:ext cx="2240280" cy="91440"/>
           </a:xfrm>
           <a:prstGeom prst="rect">
             <a:avLst/>
@@ -3097,7 +3138,7 @@
       </p:sp>
       <p:sp>
         <p:nvSpPr>
-          <p:cNvPr id="7" name="Text 5"/>
+          <p:cNvPr id="8" name="Text 6"/>
           <p:cNvSpPr/>
           <p:nvPr/>
         </p:nvSpPr>
@@ -3122,7 +3163,7 @@
               <a:buNone/>
             </a:pPr>
             <a:r>
-              <a:rPr lang="en-US" sz="1000" b="1" dirty="0">
+              <a:rPr lang="en-US" sz="950" b="1" dirty="0">
                 <a:solidFill>
                   <a:srgbClr val="5E6B78"/>
                 </a:solidFill>
@@ -3132,20 +3173,20 @@
               </a:rPr>
               <a:t>TUKE FEI</a:t>
             </a:r>
-            <a:endParaRPr lang="en-US" sz="1000" dirty="0"/>
-          </a:p>
-        </p:txBody>
-      </p:sp>
-      <p:sp>
-        <p:nvSpPr>
-          <p:cNvPr id="8" name="Text 6"/>
-          <p:cNvSpPr/>
-          <p:nvPr/>
-        </p:nvSpPr>
-        <p:spPr>
-          <a:xfrm>
-            <a:off x="10927080" y="6254496"/>
-            <a:ext cx="566928" cy="182880"/>
+            <a:endParaRPr lang="en-US" sz="950" dirty="0"/>
+          </a:p>
+        </p:txBody>
+      </p:sp>
+      <p:sp>
+        <p:nvSpPr>
+          <p:cNvPr id="9" name="Text 7"/>
+          <p:cNvSpPr/>
+          <p:nvPr/>
+        </p:nvSpPr>
+        <p:spPr>
+          <a:xfrm>
+            <a:off x="10680192" y="6254496"/>
+            <a:ext cx="822960" cy="182880"/>
           </a:xfrm>
           <a:prstGeom prst="rect">
             <a:avLst/>
@@ -3163,7 +3204,7 @@
               <a:buNone/>
             </a:pPr>
             <a:r>
-              <a:rPr lang="en-US" sz="900" dirty="0">
+              <a:rPr lang="en-US" sz="800" dirty="0">
                 <a:solidFill>
                   <a:srgbClr val="5E6B78"/>
                 </a:solidFill>
@@ -3171,9 +3212,9 @@
                 <a:ea typeface="Consolas" pitchFamily="34" charset="-122"/>
                 <a:cs typeface="Consolas" pitchFamily="34" charset="-120"/>
               </a:rPr>
-              <a:t>01</a:t>
-            </a:r>
-            <a:endParaRPr lang="en-US" sz="900" dirty="0"/>
+              <a:t>01 / 24</a:t>
+            </a:r>
+            <a:endParaRPr lang="en-US" sz="800" dirty="0"/>
           </a:p>
         </p:txBody>
       </p:sp>
@@ -3218,7 +3259,7 @@
         <p:spPr>
           <a:xfrm>
             <a:off x="0" y="0"/>
-            <a:ext cx="12191695" cy="155448"/>
+            <a:ext cx="12191695" cy="109728"/>
           </a:xfrm>
           <a:prstGeom prst="rect">
             <a:avLst/>
@@ -3242,7 +3283,7 @@
         </p:nvSpPr>
         <p:spPr>
           <a:xfrm>
-            <a:off x="566928" y="320040"/>
+            <a:off x="566928" y="310896"/>
             <a:ext cx="4663440" cy="182880"/>
           </a:xfrm>
           <a:prstGeom prst="rect">
@@ -3261,7 +3302,7 @@
               <a:buNone/>
             </a:pPr>
             <a:r>
-              <a:rPr lang="en-US" sz="900" b="1" spc="80" kern="0" dirty="0">
+              <a:rPr lang="en-US" sz="880" b="1" spc="50" kern="0" dirty="0">
                 <a:solidFill>
                   <a:srgbClr val="1877B9"/>
                 </a:solidFill>
@@ -3271,7 +3312,7 @@
               </a:rPr>
               <a:t>PROGRAMMING IN PYTHON</a:t>
             </a:r>
-            <a:endParaRPr lang="en-US" sz="900" dirty="0"/>
+            <a:endParaRPr lang="en-US" sz="880" dirty="0"/>
           </a:p>
         </p:txBody>
       </p:sp>
@@ -3283,7 +3324,7 @@
         </p:nvSpPr>
         <p:spPr>
           <a:xfrm>
-            <a:off x="9829800" y="320040"/>
+            <a:off x="9829800" y="310896"/>
             <a:ext cx="1783080" cy="182880"/>
           </a:xfrm>
           <a:prstGeom prst="rect">
@@ -3302,7 +3343,7 @@
               <a:buNone/>
             </a:pPr>
             <a:r>
-              <a:rPr lang="en-US" sz="900" b="1" dirty="0">
+              <a:rPr lang="en-US" sz="880" b="1" dirty="0">
                 <a:solidFill>
                   <a:srgbClr val="5E6B78"/>
                 </a:solidFill>
@@ -3312,7 +3353,7 @@
               </a:rPr>
               <a:t>LECTURE 03</a:t>
             </a:r>
-            <a:endParaRPr lang="en-US" sz="900" dirty="0"/>
+            <a:endParaRPr lang="en-US" sz="880" dirty="0"/>
           </a:p>
         </p:txBody>
       </p:sp>
@@ -3370,8 +3411,8 @@
         </p:nvSpPr>
         <p:spPr>
           <a:xfrm>
-            <a:off x="11109960" y="6501384"/>
-            <a:ext cx="457200" cy="146304"/>
+            <a:off x="10771632" y="6501384"/>
+            <a:ext cx="804672" cy="146304"/>
           </a:xfrm>
           <a:prstGeom prst="rect">
             <a:avLst/>
@@ -3389,7 +3430,7 @@
               <a:buNone/>
             </a:pPr>
             <a:r>
-              <a:rPr lang="en-US" sz="800" dirty="0">
+              <a:rPr lang="en-US" sz="780" dirty="0">
                 <a:solidFill>
                   <a:srgbClr val="5E6B78"/>
                 </a:solidFill>
@@ -3397,9 +3438,9 @@
                 <a:ea typeface="Consolas" pitchFamily="34" charset="-122"/>
                 <a:cs typeface="Consolas" pitchFamily="34" charset="-120"/>
               </a:rPr>
-              <a:t>10</a:t>
-            </a:r>
-            <a:endParaRPr lang="en-US" sz="800" dirty="0"/>
+              <a:t>10 / 24</a:t>
+            </a:r>
+            <a:endParaRPr lang="en-US" sz="780" dirty="0"/>
           </a:p>
         </p:txBody>
       </p:sp>
@@ -3411,8 +3452,8 @@
         </p:nvSpPr>
         <p:spPr>
           <a:xfrm>
-            <a:off x="658368" y="932688"/>
-            <a:ext cx="10789920" cy="713232"/>
+            <a:off x="658368" y="914400"/>
+            <a:ext cx="10881360" cy="713232"/>
           </a:xfrm>
           <a:prstGeom prst="rect">
             <a:avLst/>
@@ -3430,49 +3471,67 @@
               <a:buNone/>
             </a:pPr>
             <a:r>
-              <a:rPr lang="en-US" sz="2900" b="1" dirty="0">
+              <a:rPr lang="en-US" sz="2850" b="1" dirty="0">
                 <a:solidFill>
                   <a:srgbClr val="16324F"/>
+                </a:solidFill>
+                <a:latin typeface="Aptos Display" pitchFamily="34" charset="0"/>
+                <a:ea typeface="Aptos Display" pitchFamily="34" charset="-122"/>
+                <a:cs typeface="Aptos Display" pitchFamily="34" charset="-120"/>
+              </a:rPr>
+              <a:t>Enter is also an event</a:t>
+            </a:r>
+            <a:endParaRPr lang="en-US" sz="2850" dirty="0"/>
+          </a:p>
+        </p:txBody>
+      </p:sp>
+      <p:sp>
+        <p:nvSpPr>
+          <p:cNvPr id="9" name="Text 7"/>
+          <p:cNvSpPr/>
+          <p:nvPr/>
+        </p:nvSpPr>
+        <p:spPr>
+          <a:xfrm>
+            <a:off x="749808" y="1920240"/>
+            <a:ext cx="4160520" cy="3886200"/>
+          </a:xfrm>
+          <a:prstGeom prst="rect">
+            <a:avLst/>
+          </a:prstGeom>
+          <a:noFill/>
+          <a:ln/>
+        </p:spPr>
+        <p:txBody>
+          <a:bodyPr wrap="square" lIns="508" tIns="508" rIns="508" bIns="508" rtlCol="0" anchor="t">
+            <a:normAutofit/>
+          </a:bodyPr>
+          <a:lstStyle/>
+          <a:p>
+            <a:pPr marL="228600" indent="-228600">
+              <a:buSzPct val="100000"/>
+              <a:buChar char="•"/>
+            </a:pPr>
+            <a:r>
+              <a:rPr lang="en-US" sz="1650" dirty="0">
+                <a:solidFill>
+                  <a:srgbClr val="18212B"/>
                 </a:solidFill>
                 <a:latin typeface="Aptos" pitchFamily="34" charset="0"/>
                 <a:ea typeface="Aptos" pitchFamily="34" charset="-122"/>
                 <a:cs typeface="Aptos" pitchFamily="34" charset="-120"/>
               </a:rPr>
-              <a:t>Enter is also an event</a:t>
-            </a:r>
-            <a:endParaRPr lang="en-US" sz="2900" dirty="0"/>
-          </a:p>
-        </p:txBody>
-      </p:sp>
-      <p:sp>
-        <p:nvSpPr>
-          <p:cNvPr id="9" name="Text 7"/>
-          <p:cNvSpPr/>
-          <p:nvPr/>
-        </p:nvSpPr>
-        <p:spPr>
-          <a:xfrm>
-            <a:off x="749808" y="1920240"/>
-            <a:ext cx="4160520" cy="3886200"/>
-          </a:xfrm>
-          <a:prstGeom prst="rect">
-            <a:avLst/>
-          </a:prstGeom>
-          <a:noFill/>
-          <a:ln/>
-        </p:spPr>
-        <p:txBody>
-          <a:bodyPr wrap="square" lIns="508" tIns="508" rIns="508" bIns="508" rtlCol="0" anchor="t">
-            <a:normAutofit/>
-          </a:bodyPr>
-          <a:lstStyle/>
+              <a:t>a command callback has no argument</a:t>
+            </a:r>
+            <a:endParaRPr lang="en-US" sz="1650" dirty="0"/>
+          </a:p>
           <a:p>
             <a:pPr marL="228600" indent="-228600">
               <a:buSzPct val="100000"/>
               <a:buChar char="•"/>
             </a:pPr>
             <a:r>
-              <a:rPr lang="en-US" sz="1700" dirty="0">
+              <a:rPr lang="en-US" sz="1650" dirty="0">
                 <a:solidFill>
                   <a:srgbClr val="18212B"/>
                 </a:solidFill>
@@ -3480,9 +3539,9 @@
                 <a:ea typeface="Aptos" pitchFamily="34" charset="-122"/>
                 <a:cs typeface="Aptos" pitchFamily="34" charset="-120"/>
               </a:rPr>
-              <a:t>a command callback has no argument</a:t>
-            </a:r>
-            <a:endParaRPr lang="en-US" sz="1700" dirty="0"/>
+              <a:t>a bind handler receives an event object</a:t>
+            </a:r>
+            <a:endParaRPr lang="en-US" sz="1650" dirty="0"/>
           </a:p>
           <a:p>
             <a:pPr marL="228600" indent="-228600">
@@ -3490,7 +3549,7 @@
               <a:buChar char="•"/>
             </a:pPr>
             <a:r>
-              <a:rPr lang="en-US" sz="1700" dirty="0">
+              <a:rPr lang="en-US" sz="1650" dirty="0">
                 <a:solidFill>
                   <a:srgbClr val="18212B"/>
                 </a:solidFill>
@@ -3498,27 +3557,9 @@
                 <a:ea typeface="Aptos" pitchFamily="34" charset="-122"/>
                 <a:cs typeface="Aptos" pitchFamily="34" charset="-120"/>
               </a:rPr>
-              <a:t>a bind handler receives an event object</a:t>
-            </a:r>
-            <a:endParaRPr lang="en-US" sz="1700" dirty="0"/>
-          </a:p>
-          <a:p>
-            <a:pPr marL="228600" indent="-228600">
-              <a:buSzPct val="100000"/>
-              <a:buChar char="•"/>
-            </a:pPr>
-            <a:r>
-              <a:rPr lang="en-US" sz="1700" dirty="0">
-                <a:solidFill>
-                  <a:srgbClr val="18212B"/>
-                </a:solidFill>
-                <a:latin typeface="Aptos" pitchFamily="34" charset="0"/>
-                <a:ea typeface="Aptos" pitchFamily="34" charset="-122"/>
-                <a:cs typeface="Aptos" pitchFamily="34" charset="-120"/>
-              </a:rPr>
               <a:t>a shared function prevents logic duplication</a:t>
             </a:r>
-            <a:endParaRPr lang="en-US" sz="1700" dirty="0"/>
+            <a:endParaRPr lang="en-US" sz="1650" dirty="0"/>
           </a:p>
         </p:txBody>
       </p:sp>
@@ -3530,8 +3571,8 @@
         </p:nvSpPr>
         <p:spPr>
           <a:xfrm>
-            <a:off x="5394960" y="1792224"/>
-            <a:ext cx="5943600" cy="4160520"/>
+            <a:off x="5413248" y="1792224"/>
+            <a:ext cx="5925312" cy="4160520"/>
           </a:xfrm>
           <a:prstGeom prst="rect">
             <a:avLst/>
@@ -3541,7 +3582,7 @@
           </a:solidFill>
           <a:ln w="12700">
             <a:solidFill>
-              <a:srgbClr val="17212B"/>
+              <a:srgbClr val="243242"/>
             </a:solidFill>
             <a:prstDash val="solid"/>
           </a:ln>
@@ -3549,14 +3590,39 @@
       </p:sp>
       <p:sp>
         <p:nvSpPr>
-          <p:cNvPr id="11" name="Text 9"/>
-          <p:cNvSpPr/>
-          <p:nvPr/>
-        </p:nvSpPr>
-        <p:spPr>
-          <a:xfrm>
-            <a:off x="5641848" y="1993392"/>
-            <a:ext cx="5394960" cy="182880"/>
+          <p:cNvPr id="11" name="Shape 9"/>
+          <p:cNvSpPr/>
+          <p:nvPr/>
+        </p:nvSpPr>
+        <p:spPr>
+          <a:xfrm>
+            <a:off x="5413248" y="1792224"/>
+            <a:ext cx="5925312" cy="329184"/>
+          </a:xfrm>
+          <a:prstGeom prst="rect">
+            <a:avLst/>
+          </a:prstGeom>
+          <a:solidFill>
+            <a:srgbClr val="223044"/>
+          </a:solidFill>
+          <a:ln w="12700">
+            <a:solidFill>
+              <a:srgbClr val="223044"/>
+            </a:solidFill>
+            <a:prstDash val="solid"/>
+          </a:ln>
+        </p:spPr>
+      </p:sp>
+      <p:sp>
+        <p:nvSpPr>
+          <p:cNvPr id="12" name="Text 10"/>
+          <p:cNvSpPr/>
+          <p:nvPr/>
+        </p:nvSpPr>
+        <p:spPr>
+          <a:xfrm>
+            <a:off x="5641848" y="1901952"/>
+            <a:ext cx="5394960" cy="146304"/>
           </a:xfrm>
           <a:prstGeom prst="rect">
             <a:avLst/>
@@ -3574,7 +3640,7 @@
               <a:buNone/>
             </a:pPr>
             <a:r>
-              <a:rPr lang="en-US" sz="850" b="1" spc="70" kern="0" dirty="0">
+              <a:rPr lang="en-US" sz="810" b="1" spc="35" kern="0" dirty="0">
                 <a:solidFill>
                   <a:srgbClr val="8FD3FF"/>
                 </a:solidFill>
@@ -3584,20 +3650,20 @@
               </a:rPr>
               <a:t>python</a:t>
             </a:r>
-            <a:endParaRPr lang="en-US" sz="850" dirty="0"/>
-          </a:p>
-        </p:txBody>
-      </p:sp>
-      <p:sp>
-        <p:nvSpPr>
-          <p:cNvPr id="12" name="Text 10"/>
-          <p:cNvSpPr/>
-          <p:nvPr/>
-        </p:nvSpPr>
-        <p:spPr>
-          <a:xfrm>
-            <a:off x="5641848" y="2395728"/>
-            <a:ext cx="5330952" cy="3127248"/>
+            <a:endParaRPr lang="en-US" sz="810" dirty="0"/>
+          </a:p>
+        </p:txBody>
+      </p:sp>
+      <p:sp>
+        <p:nvSpPr>
+          <p:cNvPr id="13" name="Text 11"/>
+          <p:cNvSpPr/>
+          <p:nvPr/>
+        </p:nvSpPr>
+        <p:spPr>
+          <a:xfrm>
+            <a:off x="5641848" y="2331720"/>
+            <a:ext cx="5340096" cy="3182112"/>
           </a:xfrm>
           <a:prstGeom prst="rect">
             <a:avLst/>
@@ -3615,7 +3681,7 @@
               <a:buNone/>
             </a:pPr>
             <a:r>
-              <a:rPr lang="en-US" sz="1560" dirty="0">
+              <a:rPr lang="en-US" sz="1520" dirty="0">
                 <a:solidFill>
                   <a:srgbClr val="F4F7FA"/>
                 </a:solidFill>
@@ -3625,14 +3691,14 @@
               </a:rPr>
               <a:t>def on_return(event: tk.Event) -&gt; None:</a:t>
             </a:r>
-            <a:endParaRPr lang="en-US" sz="1560" dirty="0"/>
-          </a:p>
-          <a:p>
-            <a:pPr algn="l" indent="0" marL="0">
-              <a:buNone/>
-            </a:pPr>
-            <a:r>
-              <a:rPr lang="en-US" sz="1560" dirty="0">
+            <a:endParaRPr lang="en-US" sz="1520" dirty="0"/>
+          </a:p>
+          <a:p>
+            <a:pPr algn="l" indent="0" marL="0">
+              <a:buNone/>
+            </a:pPr>
+            <a:r>
+              <a:rPr lang="en-US" sz="1520" dirty="0">
                 <a:solidFill>
                   <a:srgbClr val="F4F7FA"/>
                 </a:solidFill>
@@ -3642,20 +3708,20 @@
               </a:rPr>
               <a:t>    analyze()</a:t>
             </a:r>
-            <a:endParaRPr lang="en-US" sz="1560" dirty="0"/>
-          </a:p>
-          <a:p>
-            <a:pPr algn="l" indent="0" marL="0">
-              <a:buNone/>
-            </a:pPr>
-            <a:endParaRPr lang="en-US" sz="1560" dirty="0"/>
-          </a:p>
-          <a:p>
-            <a:pPr algn="l" indent="0" marL="0">
-              <a:buNone/>
-            </a:pPr>
-            <a:r>
-              <a:rPr lang="en-US" sz="1560" dirty="0">
+            <a:endParaRPr lang="en-US" sz="1520" dirty="0"/>
+          </a:p>
+          <a:p>
+            <a:pPr algn="l" indent="0" marL="0">
+              <a:buNone/>
+            </a:pPr>
+            <a:endParaRPr lang="en-US" sz="1520" dirty="0"/>
+          </a:p>
+          <a:p>
+            <a:pPr algn="l" indent="0" marL="0">
+              <a:buNone/>
+            </a:pPr>
+            <a:r>
+              <a:rPr lang="en-US" sz="1520" dirty="0">
                 <a:solidFill>
                   <a:srgbClr val="F4F7FA"/>
                 </a:solidFill>
@@ -3665,20 +3731,20 @@
               </a:rPr>
               <a:t>entry.bind("&lt;Return&gt;", on_return)</a:t>
             </a:r>
-            <a:endParaRPr lang="en-US" sz="1560" dirty="0"/>
-          </a:p>
-          <a:p>
-            <a:pPr algn="l" indent="0" marL="0">
-              <a:buNone/>
-            </a:pPr>
-            <a:endParaRPr lang="en-US" sz="1560" dirty="0"/>
-          </a:p>
-          <a:p>
-            <a:pPr algn="l" indent="0" marL="0">
-              <a:buNone/>
-            </a:pPr>
-            <a:r>
-              <a:rPr lang="en-US" sz="1560" dirty="0">
+            <a:endParaRPr lang="en-US" sz="1520" dirty="0"/>
+          </a:p>
+          <a:p>
+            <a:pPr algn="l" indent="0" marL="0">
+              <a:buNone/>
+            </a:pPr>
+            <a:endParaRPr lang="en-US" sz="1520" dirty="0"/>
+          </a:p>
+          <a:p>
+            <a:pPr algn="l" indent="0" marL="0">
+              <a:buNone/>
+            </a:pPr>
+            <a:r>
+              <a:rPr lang="en-US" sz="1520" dirty="0">
                 <a:solidFill>
                   <a:srgbClr val="F4F7FA"/>
                 </a:solidFill>
@@ -3688,14 +3754,14 @@
               </a:rPr>
               <a:t># tlačidlo stále používa</a:t>
             </a:r>
-            <a:endParaRPr lang="en-US" sz="1560" dirty="0"/>
-          </a:p>
-          <a:p>
-            <a:pPr algn="l" indent="0" marL="0">
-              <a:buNone/>
-            </a:pPr>
-            <a:r>
-              <a:rPr lang="en-US" sz="1560" dirty="0">
+            <a:endParaRPr lang="en-US" sz="1520" dirty="0"/>
+          </a:p>
+          <a:p>
+            <a:pPr algn="l" indent="0" marL="0">
+              <a:buNone/>
+            </a:pPr>
+            <a:r>
+              <a:rPr lang="en-US" sz="1520" dirty="0">
                 <a:solidFill>
                   <a:srgbClr val="F4F7FA"/>
                 </a:solidFill>
@@ -3705,7 +3771,7 @@
               </a:rPr>
               <a:t># command=analyze</a:t>
             </a:r>
-            <a:endParaRPr lang="en-US" sz="1560" dirty="0"/>
+            <a:endParaRPr lang="en-US" sz="1520" dirty="0"/>
           </a:p>
         </p:txBody>
       </p:sp>
@@ -3750,7 +3816,7 @@
         <p:spPr>
           <a:xfrm>
             <a:off x="0" y="0"/>
-            <a:ext cx="12191695" cy="155448"/>
+            <a:ext cx="12191695" cy="109728"/>
           </a:xfrm>
           <a:prstGeom prst="rect">
             <a:avLst/>
@@ -3774,7 +3840,7 @@
         </p:nvSpPr>
         <p:spPr>
           <a:xfrm>
-            <a:off x="566928" y="320040"/>
+            <a:off x="566928" y="310896"/>
             <a:ext cx="4663440" cy="182880"/>
           </a:xfrm>
           <a:prstGeom prst="rect">
@@ -3793,7 +3859,7 @@
               <a:buNone/>
             </a:pPr>
             <a:r>
-              <a:rPr lang="en-US" sz="900" b="1" spc="80" kern="0" dirty="0">
+              <a:rPr lang="en-US" sz="880" b="1" spc="50" kern="0" dirty="0">
                 <a:solidFill>
                   <a:srgbClr val="1877B9"/>
                 </a:solidFill>
@@ -3803,7 +3869,7 @@
               </a:rPr>
               <a:t>PROGRAMMING IN PYTHON</a:t>
             </a:r>
-            <a:endParaRPr lang="en-US" sz="900" dirty="0"/>
+            <a:endParaRPr lang="en-US" sz="880" dirty="0"/>
           </a:p>
         </p:txBody>
       </p:sp>
@@ -3815,7 +3881,7 @@
         </p:nvSpPr>
         <p:spPr>
           <a:xfrm>
-            <a:off x="9829800" y="320040"/>
+            <a:off x="9829800" y="310896"/>
             <a:ext cx="1783080" cy="182880"/>
           </a:xfrm>
           <a:prstGeom prst="rect">
@@ -3834,7 +3900,7 @@
               <a:buNone/>
             </a:pPr>
             <a:r>
-              <a:rPr lang="en-US" sz="900" b="1" dirty="0">
+              <a:rPr lang="en-US" sz="880" b="1" dirty="0">
                 <a:solidFill>
                   <a:srgbClr val="5E6B78"/>
                 </a:solidFill>
@@ -3844,7 +3910,7 @@
               </a:rPr>
               <a:t>LECTURE 03</a:t>
             </a:r>
-            <a:endParaRPr lang="en-US" sz="900" dirty="0"/>
+            <a:endParaRPr lang="en-US" sz="880" dirty="0"/>
           </a:p>
         </p:txBody>
       </p:sp>
@@ -3902,8 +3968,8 @@
         </p:nvSpPr>
         <p:spPr>
           <a:xfrm>
-            <a:off x="11109960" y="6501384"/>
-            <a:ext cx="457200" cy="146304"/>
+            <a:off x="10771632" y="6501384"/>
+            <a:ext cx="804672" cy="146304"/>
           </a:xfrm>
           <a:prstGeom prst="rect">
             <a:avLst/>
@@ -3921,7 +3987,7 @@
               <a:buNone/>
             </a:pPr>
             <a:r>
-              <a:rPr lang="en-US" sz="800" dirty="0">
+              <a:rPr lang="en-US" sz="780" dirty="0">
                 <a:solidFill>
                   <a:srgbClr val="5E6B78"/>
                 </a:solidFill>
@@ -3929,9 +3995,9 @@
                 <a:ea typeface="Consolas" pitchFamily="34" charset="-122"/>
                 <a:cs typeface="Consolas" pitchFamily="34" charset="-120"/>
               </a:rPr>
-              <a:t>11</a:t>
-            </a:r>
-            <a:endParaRPr lang="en-US" sz="800" dirty="0"/>
+              <a:t>11 / 24</a:t>
+            </a:r>
+            <a:endParaRPr lang="en-US" sz="780" dirty="0"/>
           </a:p>
         </p:txBody>
       </p:sp>
@@ -3943,8 +4009,8 @@
         </p:nvSpPr>
         <p:spPr>
           <a:xfrm>
-            <a:off x="749808" y="1554480"/>
-            <a:ext cx="10424160" cy="1508760"/>
+            <a:off x="749808" y="1481328"/>
+            <a:ext cx="10287000" cy="1554480"/>
           </a:xfrm>
           <a:prstGeom prst="rect">
             <a:avLst/>
@@ -3962,17 +4028,17 @@
               <a:buNone/>
             </a:pPr>
             <a:r>
-              <a:rPr lang="en-US" sz="3400" b="1" dirty="0">
+              <a:rPr lang="en-US" sz="3300" b="1" dirty="0">
                 <a:solidFill>
                   <a:srgbClr val="16324F"/>
                 </a:solidFill>
-                <a:latin typeface="Aptos" pitchFamily="34" charset="0"/>
-                <a:ea typeface="Aptos" pitchFamily="34" charset="-122"/>
-                <a:cs typeface="Aptos" pitchFamily="34" charset="-120"/>
+                <a:latin typeface="Aptos Display" pitchFamily="34" charset="0"/>
+                <a:ea typeface="Aptos Display" pitchFamily="34" charset="-122"/>
+                <a:cs typeface="Aptos Display" pitchFamily="34" charset="-120"/>
               </a:rPr>
               <a:t>A GUI callback should not contain all application logic.</a:t>
             </a:r>
-            <a:endParaRPr lang="en-US" sz="3400" dirty="0"/>
+            <a:endParaRPr lang="en-US" sz="3300" dirty="0"/>
           </a:p>
         </p:txBody>
       </p:sp>
@@ -3984,8 +4050,8 @@
         </p:nvSpPr>
         <p:spPr>
           <a:xfrm>
-            <a:off x="768096" y="3456432"/>
-            <a:ext cx="1417320" cy="109728"/>
+            <a:off x="768096" y="3438144"/>
+            <a:ext cx="1280160" cy="91440"/>
           </a:xfrm>
           <a:prstGeom prst="rect">
             <a:avLst/>
@@ -4009,8 +4075,8 @@
         </p:nvSpPr>
         <p:spPr>
           <a:xfrm>
-            <a:off x="768096" y="3913632"/>
-            <a:ext cx="8869680" cy="731520"/>
+            <a:off x="768096" y="3858768"/>
+            <a:ext cx="9006840" cy="804672"/>
           </a:xfrm>
           <a:prstGeom prst="rect">
             <a:avLst/>
@@ -4028,7 +4094,7 @@
               <a:buNone/>
             </a:pPr>
             <a:r>
-              <a:rPr lang="en-US" sz="2200" dirty="0">
+              <a:rPr lang="en-US" sz="2100" dirty="0">
                 <a:solidFill>
                   <a:srgbClr val="5E6B78"/>
                 </a:solidFill>
@@ -4038,7 +4104,7 @@
               </a:rPr>
               <a:t>If logic can run without a window, it can also be tested and reused.</a:t>
             </a:r>
-            <a:endParaRPr lang="en-US" sz="2200" dirty="0"/>
+            <a:endParaRPr lang="en-US" sz="2100" dirty="0"/>
           </a:p>
         </p:txBody>
       </p:sp>
@@ -4083,7 +4149,7 @@
         <p:spPr>
           <a:xfrm>
             <a:off x="0" y="0"/>
-            <a:ext cx="12191695" cy="155448"/>
+            <a:ext cx="12191695" cy="109728"/>
           </a:xfrm>
           <a:prstGeom prst="rect">
             <a:avLst/>
@@ -4107,7 +4173,7 @@
         </p:nvSpPr>
         <p:spPr>
           <a:xfrm>
-            <a:off x="566928" y="320040"/>
+            <a:off x="566928" y="310896"/>
             <a:ext cx="4663440" cy="182880"/>
           </a:xfrm>
           <a:prstGeom prst="rect">
@@ -4126,7 +4192,7 @@
               <a:buNone/>
             </a:pPr>
             <a:r>
-              <a:rPr lang="en-US" sz="900" b="1" spc="80" kern="0" dirty="0">
+              <a:rPr lang="en-US" sz="880" b="1" spc="50" kern="0" dirty="0">
                 <a:solidFill>
                   <a:srgbClr val="1877B9"/>
                 </a:solidFill>
@@ -4136,7 +4202,7 @@
               </a:rPr>
               <a:t>PROGRAMMING IN PYTHON</a:t>
             </a:r>
-            <a:endParaRPr lang="en-US" sz="900" dirty="0"/>
+            <a:endParaRPr lang="en-US" sz="880" dirty="0"/>
           </a:p>
         </p:txBody>
       </p:sp>
@@ -4148,7 +4214,7 @@
         </p:nvSpPr>
         <p:spPr>
           <a:xfrm>
-            <a:off x="9829800" y="320040"/>
+            <a:off x="9829800" y="310896"/>
             <a:ext cx="1783080" cy="182880"/>
           </a:xfrm>
           <a:prstGeom prst="rect">
@@ -4167,7 +4233,7 @@
               <a:buNone/>
             </a:pPr>
             <a:r>
-              <a:rPr lang="en-US" sz="900" b="1" dirty="0">
+              <a:rPr lang="en-US" sz="880" b="1" dirty="0">
                 <a:solidFill>
                   <a:srgbClr val="5E6B78"/>
                 </a:solidFill>
@@ -4177,7 +4243,7 @@
               </a:rPr>
               <a:t>LECTURE 03</a:t>
             </a:r>
-            <a:endParaRPr lang="en-US" sz="900" dirty="0"/>
+            <a:endParaRPr lang="en-US" sz="880" dirty="0"/>
           </a:p>
         </p:txBody>
       </p:sp>
@@ -4235,8 +4301,8 @@
         </p:nvSpPr>
         <p:spPr>
           <a:xfrm>
-            <a:off x="11109960" y="6501384"/>
-            <a:ext cx="457200" cy="146304"/>
+            <a:off x="10771632" y="6501384"/>
+            <a:ext cx="804672" cy="146304"/>
           </a:xfrm>
           <a:prstGeom prst="rect">
             <a:avLst/>
@@ -4254,7 +4320,7 @@
               <a:buNone/>
             </a:pPr>
             <a:r>
-              <a:rPr lang="en-US" sz="800" dirty="0">
+              <a:rPr lang="en-US" sz="780" dirty="0">
                 <a:solidFill>
                   <a:srgbClr val="5E6B78"/>
                 </a:solidFill>
@@ -4262,9 +4328,9 @@
                 <a:ea typeface="Consolas" pitchFamily="34" charset="-122"/>
                 <a:cs typeface="Consolas" pitchFamily="34" charset="-120"/>
               </a:rPr>
-              <a:t>12</a:t>
-            </a:r>
-            <a:endParaRPr lang="en-US" sz="800" dirty="0"/>
+              <a:t>12 / 24</a:t>
+            </a:r>
+            <a:endParaRPr lang="en-US" sz="780" dirty="0"/>
           </a:p>
         </p:txBody>
       </p:sp>
@@ -4276,8 +4342,8 @@
         </p:nvSpPr>
         <p:spPr>
           <a:xfrm>
-            <a:off x="658368" y="932688"/>
-            <a:ext cx="10789920" cy="713232"/>
+            <a:off x="658368" y="914400"/>
+            <a:ext cx="10881360" cy="713232"/>
           </a:xfrm>
           <a:prstGeom prst="rect">
             <a:avLst/>
@@ -4295,17 +4361,17 @@
               <a:buNone/>
             </a:pPr>
             <a:r>
-              <a:rPr lang="en-US" sz="2900" b="1" dirty="0">
+              <a:rPr lang="en-US" sz="2850" b="1" dirty="0">
                 <a:solidFill>
                   <a:srgbClr val="16324F"/>
                 </a:solidFill>
-                <a:latin typeface="Aptos" pitchFamily="34" charset="0"/>
-                <a:ea typeface="Aptos" pitchFamily="34" charset="-122"/>
-                <a:cs typeface="Aptos" pitchFamily="34" charset="-120"/>
+                <a:latin typeface="Aptos Display" pitchFamily="34" charset="0"/>
+                <a:ea typeface="Aptos Display" pitchFamily="34" charset="-122"/>
+                <a:cs typeface="Aptos Display" pitchFamily="34" charset="-120"/>
               </a:rPr>
               <a:t>Pure text analysis</a:t>
             </a:r>
-            <a:endParaRPr lang="en-US" sz="2900" dirty="0"/>
+            <a:endParaRPr lang="en-US" sz="2850" dirty="0"/>
           </a:p>
         </p:txBody>
       </p:sp>
@@ -4318,19 +4384,17 @@
         <p:spPr>
           <a:xfrm>
             <a:off x="658368" y="1828800"/>
-            <a:ext cx="6812280" cy="4069080"/>
-          </a:xfrm>
-          <a:prstGeom prst="roundRect">
-            <a:avLst>
-              <a:gd name="adj" fmla="val 1348"/>
-            </a:avLst>
+            <a:ext cx="6903720" cy="4069080"/>
+          </a:xfrm>
+          <a:prstGeom prst="rect">
+            <a:avLst/>
           </a:prstGeom>
           <a:solidFill>
             <a:srgbClr val="17212B"/>
           </a:solidFill>
           <a:ln w="12700">
             <a:solidFill>
-              <a:srgbClr val="17212B"/>
+              <a:srgbClr val="243242"/>
             </a:solidFill>
             <a:prstDash val="solid"/>
           </a:ln>
@@ -4338,14 +4402,39 @@
       </p:sp>
       <p:sp>
         <p:nvSpPr>
-          <p:cNvPr id="10" name="Text 8"/>
-          <p:cNvSpPr/>
-          <p:nvPr/>
-        </p:nvSpPr>
-        <p:spPr>
-          <a:xfrm>
-            <a:off x="868680" y="2029968"/>
-            <a:ext cx="6309360" cy="182880"/>
+          <p:cNvPr id="10" name="Shape 8"/>
+          <p:cNvSpPr/>
+          <p:nvPr/>
+        </p:nvSpPr>
+        <p:spPr>
+          <a:xfrm>
+            <a:off x="658368" y="1828800"/>
+            <a:ext cx="6903720" cy="347472"/>
+          </a:xfrm>
+          <a:prstGeom prst="rect">
+            <a:avLst/>
+          </a:prstGeom>
+          <a:solidFill>
+            <a:srgbClr val="223044"/>
+          </a:solidFill>
+          <a:ln w="12700">
+            <a:solidFill>
+              <a:srgbClr val="223044"/>
+            </a:solidFill>
+            <a:prstDash val="solid"/>
+          </a:ln>
+        </p:spPr>
+      </p:sp>
+      <p:sp>
+        <p:nvSpPr>
+          <p:cNvPr id="11" name="Text 9"/>
+          <p:cNvSpPr/>
+          <p:nvPr/>
+        </p:nvSpPr>
+        <p:spPr>
+          <a:xfrm>
+            <a:off x="868680" y="1947672"/>
+            <a:ext cx="6309360" cy="146304"/>
           </a:xfrm>
           <a:prstGeom prst="rect">
             <a:avLst/>
@@ -4363,7 +4452,7 @@
               <a:buNone/>
             </a:pPr>
             <a:r>
-              <a:rPr lang="en-US" sz="850" b="1" spc="70" kern="0" dirty="0">
+              <a:rPr lang="en-US" sz="820" b="1" spc="35" kern="0" dirty="0">
                 <a:solidFill>
                   <a:srgbClr val="8FD3FF"/>
                 </a:solidFill>
@@ -4373,20 +4462,20 @@
               </a:rPr>
               <a:t>python</a:t>
             </a:r>
-            <a:endParaRPr lang="en-US" sz="850" dirty="0"/>
-          </a:p>
-        </p:txBody>
-      </p:sp>
-      <p:sp>
-        <p:nvSpPr>
-          <p:cNvPr id="11" name="Text 9"/>
-          <p:cNvSpPr/>
-          <p:nvPr/>
-        </p:nvSpPr>
-        <p:spPr>
-          <a:xfrm>
-            <a:off x="877824" y="2395728"/>
-            <a:ext cx="6327648" cy="3246120"/>
+            <a:endParaRPr lang="en-US" sz="820" dirty="0"/>
+          </a:p>
+        </p:txBody>
+      </p:sp>
+      <p:sp>
+        <p:nvSpPr>
+          <p:cNvPr id="12" name="Text 10"/>
+          <p:cNvSpPr/>
+          <p:nvPr/>
+        </p:nvSpPr>
+        <p:spPr>
+          <a:xfrm>
+            <a:off x="877824" y="2359152"/>
+            <a:ext cx="6382512" cy="3246120"/>
           </a:xfrm>
           <a:prstGeom prst="rect">
             <a:avLst/>
@@ -4404,7 +4493,7 @@
               <a:buNone/>
             </a:pPr>
             <a:r>
-              <a:rPr lang="en-US" sz="1650" dirty="0">
+              <a:rPr lang="en-US" sz="1380" dirty="0">
                 <a:solidFill>
                   <a:srgbClr val="F4F7FA"/>
                 </a:solidFill>
@@ -4414,20 +4503,20 @@
               </a:rPr>
               <a:t>from dataclasses import dataclass</a:t>
             </a:r>
-            <a:endParaRPr lang="en-US" sz="1650" dirty="0"/>
-          </a:p>
-          <a:p>
-            <a:pPr algn="l" indent="0" marL="0">
-              <a:buNone/>
-            </a:pPr>
-            <a:endParaRPr lang="en-US" sz="1650" dirty="0"/>
-          </a:p>
-          <a:p>
-            <a:pPr algn="l" indent="0" marL="0">
-              <a:buNone/>
-            </a:pPr>
-            <a:r>
-              <a:rPr lang="en-US" sz="1650" dirty="0">
+            <a:endParaRPr lang="en-US" sz="1380" dirty="0"/>
+          </a:p>
+          <a:p>
+            <a:pPr algn="l" indent="0" marL="0">
+              <a:buNone/>
+            </a:pPr>
+            <a:endParaRPr lang="en-US" sz="1380" dirty="0"/>
+          </a:p>
+          <a:p>
+            <a:pPr algn="l" indent="0" marL="0">
+              <a:buNone/>
+            </a:pPr>
+            <a:r>
+              <a:rPr lang="en-US" sz="1380" dirty="0">
                 <a:solidFill>
                   <a:srgbClr val="F4F7FA"/>
                 </a:solidFill>
@@ -4437,14 +4526,14 @@
               </a:rPr>
               <a:t>@dataclass</a:t>
             </a:r>
-            <a:endParaRPr lang="en-US" sz="1650" dirty="0"/>
-          </a:p>
-          <a:p>
-            <a:pPr algn="l" indent="0" marL="0">
-              <a:buNone/>
-            </a:pPr>
-            <a:r>
-              <a:rPr lang="en-US" sz="1650" dirty="0">
+            <a:endParaRPr lang="en-US" sz="1380" dirty="0"/>
+          </a:p>
+          <a:p>
+            <a:pPr algn="l" indent="0" marL="0">
+              <a:buNone/>
+            </a:pPr>
+            <a:r>
+              <a:rPr lang="en-US" sz="1380" dirty="0">
                 <a:solidFill>
                   <a:srgbClr val="F4F7FA"/>
                 </a:solidFill>
@@ -4454,14 +4543,14 @@
               </a:rPr>
               <a:t>class TextStats:</a:t>
             </a:r>
-            <a:endParaRPr lang="en-US" sz="1650" dirty="0"/>
-          </a:p>
-          <a:p>
-            <a:pPr algn="l" indent="0" marL="0">
-              <a:buNone/>
-            </a:pPr>
-            <a:r>
-              <a:rPr lang="en-US" sz="1650" dirty="0">
+            <a:endParaRPr lang="en-US" sz="1380" dirty="0"/>
+          </a:p>
+          <a:p>
+            <a:pPr algn="l" indent="0" marL="0">
+              <a:buNone/>
+            </a:pPr>
+            <a:r>
+              <a:rPr lang="en-US" sz="1380" dirty="0">
                 <a:solidFill>
                   <a:srgbClr val="F4F7FA"/>
                 </a:solidFill>
@@ -4471,14 +4560,14 @@
               </a:rPr>
               <a:t>    characters: int</a:t>
             </a:r>
-            <a:endParaRPr lang="en-US" sz="1650" dirty="0"/>
-          </a:p>
-          <a:p>
-            <a:pPr algn="l" indent="0" marL="0">
-              <a:buNone/>
-            </a:pPr>
-            <a:r>
-              <a:rPr lang="en-US" sz="1650" dirty="0">
+            <a:endParaRPr lang="en-US" sz="1380" dirty="0"/>
+          </a:p>
+          <a:p>
+            <a:pPr algn="l" indent="0" marL="0">
+              <a:buNone/>
+            </a:pPr>
+            <a:r>
+              <a:rPr lang="en-US" sz="1380" dirty="0">
                 <a:solidFill>
                   <a:srgbClr val="F4F7FA"/>
                 </a:solidFill>
@@ -4488,14 +4577,14 @@
               </a:rPr>
               <a:t>    words: int</a:t>
             </a:r>
-            <a:endParaRPr lang="en-US" sz="1650" dirty="0"/>
-          </a:p>
-          <a:p>
-            <a:pPr algn="l" indent="0" marL="0">
-              <a:buNone/>
-            </a:pPr>
-            <a:r>
-              <a:rPr lang="en-US" sz="1650" dirty="0">
+            <a:endParaRPr lang="en-US" sz="1380" dirty="0"/>
+          </a:p>
+          <a:p>
+            <a:pPr algn="l" indent="0" marL="0">
+              <a:buNone/>
+            </a:pPr>
+            <a:r>
+              <a:rPr lang="en-US" sz="1380" dirty="0">
                 <a:solidFill>
                   <a:srgbClr val="F4F7FA"/>
                 </a:solidFill>
@@ -4505,20 +4594,20 @@
               </a:rPr>
               <a:t>    lines: int</a:t>
             </a:r>
-            <a:endParaRPr lang="en-US" sz="1650" dirty="0"/>
-          </a:p>
-          <a:p>
-            <a:pPr algn="l" indent="0" marL="0">
-              <a:buNone/>
-            </a:pPr>
-            <a:endParaRPr lang="en-US" sz="1650" dirty="0"/>
-          </a:p>
-          <a:p>
-            <a:pPr algn="l" indent="0" marL="0">
-              <a:buNone/>
-            </a:pPr>
-            <a:r>
-              <a:rPr lang="en-US" sz="1650" dirty="0">
+            <a:endParaRPr lang="en-US" sz="1380" dirty="0"/>
+          </a:p>
+          <a:p>
+            <a:pPr algn="l" indent="0" marL="0">
+              <a:buNone/>
+            </a:pPr>
+            <a:endParaRPr lang="en-US" sz="1380" dirty="0"/>
+          </a:p>
+          <a:p>
+            <a:pPr algn="l" indent="0" marL="0">
+              <a:buNone/>
+            </a:pPr>
+            <a:r>
+              <a:rPr lang="en-US" sz="1380" dirty="0">
                 <a:solidFill>
                   <a:srgbClr val="F4F7FA"/>
                 </a:solidFill>
@@ -4528,14 +4617,14 @@
               </a:rPr>
               <a:t>def analyze_text(text: str) -&gt; TextStats:</a:t>
             </a:r>
-            <a:endParaRPr lang="en-US" sz="1650" dirty="0"/>
-          </a:p>
-          <a:p>
-            <a:pPr algn="l" indent="0" marL="0">
-              <a:buNone/>
-            </a:pPr>
-            <a:r>
-              <a:rPr lang="en-US" sz="1650" dirty="0">
+            <a:endParaRPr lang="en-US" sz="1380" dirty="0"/>
+          </a:p>
+          <a:p>
+            <a:pPr algn="l" indent="0" marL="0">
+              <a:buNone/>
+            </a:pPr>
+            <a:r>
+              <a:rPr lang="en-US" sz="1380" dirty="0">
                 <a:solidFill>
                   <a:srgbClr val="F4F7FA"/>
                 </a:solidFill>
@@ -4545,20 +4634,20 @@
               </a:rPr>
               <a:t>    return TextStats(len(text), len(text.split()), text.count("\n") + 1 if text else 0)</a:t>
             </a:r>
-            <a:endParaRPr lang="en-US" sz="1650" dirty="0"/>
-          </a:p>
-        </p:txBody>
-      </p:sp>
-      <p:sp>
-        <p:nvSpPr>
-          <p:cNvPr id="12" name="Shape 10"/>
-          <p:cNvSpPr/>
-          <p:nvPr/>
-        </p:nvSpPr>
-        <p:spPr>
-          <a:xfrm>
-            <a:off x="7909560" y="1901952"/>
-            <a:ext cx="0" cy="3566160"/>
+            <a:endParaRPr lang="en-US" sz="1380" dirty="0"/>
+          </a:p>
+        </p:txBody>
+      </p:sp>
+      <p:sp>
+        <p:nvSpPr>
+          <p:cNvPr id="13" name="Shape 11"/>
+          <p:cNvSpPr/>
+          <p:nvPr/>
+        </p:nvSpPr>
+        <p:spPr>
+          <a:xfrm>
+            <a:off x="7936992" y="1883664"/>
+            <a:ext cx="0" cy="3639312"/>
           </a:xfrm>
           <a:prstGeom prst="line">
             <a:avLst/>
@@ -4574,14 +4663,14 @@
       </p:sp>
       <p:sp>
         <p:nvSpPr>
-          <p:cNvPr id="13" name="Text 11"/>
-          <p:cNvSpPr/>
-          <p:nvPr/>
-        </p:nvSpPr>
-        <p:spPr>
-          <a:xfrm>
-            <a:off x="8229600" y="2130552"/>
-            <a:ext cx="2743200" cy="2468880"/>
+          <p:cNvPr id="14" name="Text 12"/>
+          <p:cNvSpPr/>
+          <p:nvPr/>
+        </p:nvSpPr>
+        <p:spPr>
+          <a:xfrm>
+            <a:off x="8229600" y="2084832"/>
+            <a:ext cx="2816352" cy="2514600"/>
           </a:xfrm>
           <a:prstGeom prst="rect">
             <a:avLst/>
@@ -4599,7 +4688,7 @@
               <a:buNone/>
             </a:pPr>
             <a:r>
-              <a:rPr lang="en-US" sz="1800" dirty="0">
+              <a:rPr lang="en-US" sz="1720" dirty="0">
                 <a:solidFill>
                   <a:srgbClr val="5E6B78"/>
                 </a:solidFill>
@@ -4609,7 +4698,7 @@
               </a:rPr>
               <a:t>This function knows no Entry, Label or messagebox. The GUI only calls it and displays the result.</a:t>
             </a:r>
-            <a:endParaRPr lang="en-US" sz="1800" dirty="0"/>
+            <a:endParaRPr lang="en-US" sz="1720" dirty="0"/>
           </a:p>
         </p:txBody>
       </p:sp>
@@ -4654,7 +4743,7 @@
         <p:spPr>
           <a:xfrm>
             <a:off x="0" y="0"/>
-            <a:ext cx="12191695" cy="155448"/>
+            <a:ext cx="12191695" cy="109728"/>
           </a:xfrm>
           <a:prstGeom prst="rect">
             <a:avLst/>
@@ -4678,7 +4767,7 @@
         </p:nvSpPr>
         <p:spPr>
           <a:xfrm>
-            <a:off x="566928" y="320040"/>
+            <a:off x="566928" y="310896"/>
             <a:ext cx="4663440" cy="182880"/>
           </a:xfrm>
           <a:prstGeom prst="rect">
@@ -4697,7 +4786,7 @@
               <a:buNone/>
             </a:pPr>
             <a:r>
-              <a:rPr lang="en-US" sz="900" b="1" spc="80" kern="0" dirty="0">
+              <a:rPr lang="en-US" sz="880" b="1" spc="50" kern="0" dirty="0">
                 <a:solidFill>
                   <a:srgbClr val="1877B9"/>
                 </a:solidFill>
@@ -4707,7 +4796,7 @@
               </a:rPr>
               <a:t>PROGRAMMING IN PYTHON</a:t>
             </a:r>
-            <a:endParaRPr lang="en-US" sz="900" dirty="0"/>
+            <a:endParaRPr lang="en-US" sz="880" dirty="0"/>
           </a:p>
         </p:txBody>
       </p:sp>
@@ -4719,7 +4808,7 @@
         </p:nvSpPr>
         <p:spPr>
           <a:xfrm>
-            <a:off x="9829800" y="320040"/>
+            <a:off x="9829800" y="310896"/>
             <a:ext cx="1783080" cy="182880"/>
           </a:xfrm>
           <a:prstGeom prst="rect">
@@ -4738,7 +4827,7 @@
               <a:buNone/>
             </a:pPr>
             <a:r>
-              <a:rPr lang="en-US" sz="900" b="1" dirty="0">
+              <a:rPr lang="en-US" sz="880" b="1" dirty="0">
                 <a:solidFill>
                   <a:srgbClr val="5E6B78"/>
                 </a:solidFill>
@@ -4748,7 +4837,7 @@
               </a:rPr>
               <a:t>LECTURE 03</a:t>
             </a:r>
-            <a:endParaRPr lang="en-US" sz="900" dirty="0"/>
+            <a:endParaRPr lang="en-US" sz="880" dirty="0"/>
           </a:p>
         </p:txBody>
       </p:sp>
@@ -4806,8 +4895,8 @@
         </p:nvSpPr>
         <p:spPr>
           <a:xfrm>
-            <a:off x="11109960" y="6501384"/>
-            <a:ext cx="457200" cy="146304"/>
+            <a:off x="10771632" y="6501384"/>
+            <a:ext cx="804672" cy="146304"/>
           </a:xfrm>
           <a:prstGeom prst="rect">
             <a:avLst/>
@@ -4825,7 +4914,7 @@
               <a:buNone/>
             </a:pPr>
             <a:r>
-              <a:rPr lang="en-US" sz="800" dirty="0">
+              <a:rPr lang="en-US" sz="780" dirty="0">
                 <a:solidFill>
                   <a:srgbClr val="5E6B78"/>
                 </a:solidFill>
@@ -4833,9 +4922,9 @@
                 <a:ea typeface="Consolas" pitchFamily="34" charset="-122"/>
                 <a:cs typeface="Consolas" pitchFamily="34" charset="-120"/>
               </a:rPr>
-              <a:t>13</a:t>
-            </a:r>
-            <a:endParaRPr lang="en-US" sz="800" dirty="0"/>
+              <a:t>13 / 24</a:t>
+            </a:r>
+            <a:endParaRPr lang="en-US" sz="780" dirty="0"/>
           </a:p>
         </p:txBody>
       </p:sp>
@@ -4847,8 +4936,8 @@
         </p:nvSpPr>
         <p:spPr>
           <a:xfrm>
-            <a:off x="658368" y="932688"/>
-            <a:ext cx="10789920" cy="713232"/>
+            <a:off x="658368" y="914400"/>
+            <a:ext cx="10881360" cy="713232"/>
           </a:xfrm>
           <a:prstGeom prst="rect">
             <a:avLst/>
@@ -4866,17 +4955,17 @@
               <a:buNone/>
             </a:pPr>
             <a:r>
-              <a:rPr lang="en-US" sz="2900" b="1" dirty="0">
+              <a:rPr lang="en-US" sz="2850" b="1" dirty="0">
                 <a:solidFill>
                   <a:srgbClr val="16324F"/>
                 </a:solidFill>
-                <a:latin typeface="Aptos" pitchFamily="34" charset="0"/>
-                <a:ea typeface="Aptos" pitchFamily="34" charset="-122"/>
-                <a:cs typeface="Aptos" pitchFamily="34" charset="-120"/>
+                <a:latin typeface="Aptos Display" pitchFamily="34" charset="0"/>
+                <a:ea typeface="Aptos Display" pitchFamily="34" charset="-122"/>
+                <a:cs typeface="Aptos Display" pitchFamily="34" charset="-120"/>
               </a:rPr>
               <a:t>The callback only coordinates UI</a:t>
             </a:r>
-            <a:endParaRPr lang="en-US" sz="2900" dirty="0"/>
+            <a:endParaRPr lang="en-US" sz="2850" dirty="0"/>
           </a:p>
         </p:txBody>
       </p:sp>
@@ -4889,19 +4978,17 @@
         <p:spPr>
           <a:xfrm>
             <a:off x="658368" y="1828800"/>
-            <a:ext cx="6812280" cy="4069080"/>
-          </a:xfrm>
-          <a:prstGeom prst="roundRect">
-            <a:avLst>
-              <a:gd name="adj" fmla="val 1348"/>
-            </a:avLst>
+            <a:ext cx="6903720" cy="4069080"/>
+          </a:xfrm>
+          <a:prstGeom prst="rect">
+            <a:avLst/>
           </a:prstGeom>
           <a:solidFill>
             <a:srgbClr val="17212B"/>
           </a:solidFill>
           <a:ln w="12700">
             <a:solidFill>
-              <a:srgbClr val="17212B"/>
+              <a:srgbClr val="243242"/>
             </a:solidFill>
             <a:prstDash val="solid"/>
           </a:ln>
@@ -4909,14 +4996,39 @@
       </p:sp>
       <p:sp>
         <p:nvSpPr>
-          <p:cNvPr id="10" name="Text 8"/>
-          <p:cNvSpPr/>
-          <p:nvPr/>
-        </p:nvSpPr>
-        <p:spPr>
-          <a:xfrm>
-            <a:off x="868680" y="2029968"/>
-            <a:ext cx="6309360" cy="182880"/>
+          <p:cNvPr id="10" name="Shape 8"/>
+          <p:cNvSpPr/>
+          <p:nvPr/>
+        </p:nvSpPr>
+        <p:spPr>
+          <a:xfrm>
+            <a:off x="658368" y="1828800"/>
+            <a:ext cx="6903720" cy="347472"/>
+          </a:xfrm>
+          <a:prstGeom prst="rect">
+            <a:avLst/>
+          </a:prstGeom>
+          <a:solidFill>
+            <a:srgbClr val="223044"/>
+          </a:solidFill>
+          <a:ln w="12700">
+            <a:solidFill>
+              <a:srgbClr val="223044"/>
+            </a:solidFill>
+            <a:prstDash val="solid"/>
+          </a:ln>
+        </p:spPr>
+      </p:sp>
+      <p:sp>
+        <p:nvSpPr>
+          <p:cNvPr id="11" name="Text 9"/>
+          <p:cNvSpPr/>
+          <p:nvPr/>
+        </p:nvSpPr>
+        <p:spPr>
+          <a:xfrm>
+            <a:off x="868680" y="1947672"/>
+            <a:ext cx="6309360" cy="146304"/>
           </a:xfrm>
           <a:prstGeom prst="rect">
             <a:avLst/>
@@ -4934,7 +5046,7 @@
               <a:buNone/>
             </a:pPr>
             <a:r>
-              <a:rPr lang="en-US" sz="850" b="1" spc="70" kern="0" dirty="0">
+              <a:rPr lang="en-US" sz="820" b="1" spc="35" kern="0" dirty="0">
                 <a:solidFill>
                   <a:srgbClr val="8FD3FF"/>
                 </a:solidFill>
@@ -4944,20 +5056,20 @@
               </a:rPr>
               <a:t>python</a:t>
             </a:r>
-            <a:endParaRPr lang="en-US" sz="850" dirty="0"/>
-          </a:p>
-        </p:txBody>
-      </p:sp>
-      <p:sp>
-        <p:nvSpPr>
-          <p:cNvPr id="11" name="Text 9"/>
-          <p:cNvSpPr/>
-          <p:nvPr/>
-        </p:nvSpPr>
-        <p:spPr>
-          <a:xfrm>
-            <a:off x="877824" y="2395728"/>
-            <a:ext cx="6327648" cy="3246120"/>
+            <a:endParaRPr lang="en-US" sz="820" dirty="0"/>
+          </a:p>
+        </p:txBody>
+      </p:sp>
+      <p:sp>
+        <p:nvSpPr>
+          <p:cNvPr id="12" name="Text 10"/>
+          <p:cNvSpPr/>
+          <p:nvPr/>
+        </p:nvSpPr>
+        <p:spPr>
+          <a:xfrm>
+            <a:off x="877824" y="2359152"/>
+            <a:ext cx="6382512" cy="3246120"/>
           </a:xfrm>
           <a:prstGeom prst="rect">
             <a:avLst/>
@@ -4975,7 +5087,7 @@
               <a:buNone/>
             </a:pPr>
             <a:r>
-              <a:rPr lang="en-US" sz="1650" dirty="0">
+              <a:rPr lang="en-US" sz="1600" dirty="0">
                 <a:solidFill>
                   <a:srgbClr val="F4F7FA"/>
                 </a:solidFill>
@@ -4985,14 +5097,14 @@
               </a:rPr>
               <a:t>def analyze() -&gt; None:</a:t>
             </a:r>
-            <a:endParaRPr lang="en-US" sz="1650" dirty="0"/>
-          </a:p>
-          <a:p>
-            <a:pPr algn="l" indent="0" marL="0">
-              <a:buNone/>
-            </a:pPr>
-            <a:r>
-              <a:rPr lang="en-US" sz="1650" dirty="0">
+            <a:endParaRPr lang="en-US" sz="1600" dirty="0"/>
+          </a:p>
+          <a:p>
+            <a:pPr algn="l" indent="0" marL="0">
+              <a:buNone/>
+            </a:pPr>
+            <a:r>
+              <a:rPr lang="en-US" sz="1600" dirty="0">
                 <a:solidFill>
                   <a:srgbClr val="F4F7FA"/>
                 </a:solidFill>
@@ -5002,14 +5114,14 @@
               </a:rPr>
               <a:t>    stats = analyze_text(entry.get())</a:t>
             </a:r>
-            <a:endParaRPr lang="en-US" sz="1650" dirty="0"/>
-          </a:p>
-          <a:p>
-            <a:pPr algn="l" indent="0" marL="0">
-              <a:buNone/>
-            </a:pPr>
-            <a:r>
-              <a:rPr lang="en-US" sz="1650" dirty="0">
+            <a:endParaRPr lang="en-US" sz="1600" dirty="0"/>
+          </a:p>
+          <a:p>
+            <a:pPr algn="l" indent="0" marL="0">
+              <a:buNone/>
+            </a:pPr>
+            <a:r>
+              <a:rPr lang="en-US" sz="1600" dirty="0">
                 <a:solidFill>
                   <a:srgbClr val="F4F7FA"/>
                 </a:solidFill>
@@ -5019,14 +5131,14 @@
               </a:rPr>
               <a:t>    result.config(</a:t>
             </a:r>
-            <a:endParaRPr lang="en-US" sz="1650" dirty="0"/>
-          </a:p>
-          <a:p>
-            <a:pPr algn="l" indent="0" marL="0">
-              <a:buNone/>
-            </a:pPr>
-            <a:r>
-              <a:rPr lang="en-US" sz="1650" dirty="0">
+            <a:endParaRPr lang="en-US" sz="1600" dirty="0"/>
+          </a:p>
+          <a:p>
+            <a:pPr algn="l" indent="0" marL="0">
+              <a:buNone/>
+            </a:pPr>
+            <a:r>
+              <a:rPr lang="en-US" sz="1600" dirty="0">
                 <a:solidFill>
                   <a:srgbClr val="F4F7FA"/>
                 </a:solidFill>
@@ -5036,14 +5148,14 @@
               </a:rPr>
               <a:t>        text=f"Slová: {stats.words}; riadky: {stats.lines}"</a:t>
             </a:r>
-            <a:endParaRPr lang="en-US" sz="1650" dirty="0"/>
-          </a:p>
-          <a:p>
-            <a:pPr algn="l" indent="0" marL="0">
-              <a:buNone/>
-            </a:pPr>
-            <a:r>
-              <a:rPr lang="en-US" sz="1650" dirty="0">
+            <a:endParaRPr lang="en-US" sz="1600" dirty="0"/>
+          </a:p>
+          <a:p>
+            <a:pPr algn="l" indent="0" marL="0">
+              <a:buNone/>
+            </a:pPr>
+            <a:r>
+              <a:rPr lang="en-US" sz="1600" dirty="0">
                 <a:solidFill>
                   <a:srgbClr val="F4F7FA"/>
                 </a:solidFill>
@@ -5053,20 +5165,20 @@
               </a:rPr>
               <a:t>    )</a:t>
             </a:r>
-            <a:endParaRPr lang="en-US" sz="1650" dirty="0"/>
-          </a:p>
-        </p:txBody>
-      </p:sp>
-      <p:sp>
-        <p:nvSpPr>
-          <p:cNvPr id="12" name="Shape 10"/>
-          <p:cNvSpPr/>
-          <p:nvPr/>
-        </p:nvSpPr>
-        <p:spPr>
-          <a:xfrm>
-            <a:off x="7909560" y="1901952"/>
-            <a:ext cx="0" cy="3566160"/>
+            <a:endParaRPr lang="en-US" sz="1600" dirty="0"/>
+          </a:p>
+        </p:txBody>
+      </p:sp>
+      <p:sp>
+        <p:nvSpPr>
+          <p:cNvPr id="13" name="Shape 11"/>
+          <p:cNvSpPr/>
+          <p:nvPr/>
+        </p:nvSpPr>
+        <p:spPr>
+          <a:xfrm>
+            <a:off x="7936992" y="1883664"/>
+            <a:ext cx="0" cy="3639312"/>
           </a:xfrm>
           <a:prstGeom prst="line">
             <a:avLst/>
@@ -5082,14 +5194,14 @@
       </p:sp>
       <p:sp>
         <p:nvSpPr>
-          <p:cNvPr id="13" name="Text 11"/>
-          <p:cNvSpPr/>
-          <p:nvPr/>
-        </p:nvSpPr>
-        <p:spPr>
-          <a:xfrm>
-            <a:off x="8229600" y="2130552"/>
-            <a:ext cx="2743200" cy="2468880"/>
+          <p:cNvPr id="14" name="Text 12"/>
+          <p:cNvSpPr/>
+          <p:nvPr/>
+        </p:nvSpPr>
+        <p:spPr>
+          <a:xfrm>
+            <a:off x="8229600" y="2084832"/>
+            <a:ext cx="2816352" cy="2514600"/>
           </a:xfrm>
           <a:prstGeom prst="rect">
             <a:avLst/>
@@ -5107,7 +5219,7 @@
               <a:buNone/>
             </a:pPr>
             <a:r>
-              <a:rPr lang="en-US" sz="1800" dirty="0">
+              <a:rPr lang="en-US" sz="1720" dirty="0">
                 <a:solidFill>
                   <a:srgbClr val="5E6B78"/>
                 </a:solidFill>
@@ -5117,7 +5229,7 @@
               </a:rPr>
               <a:t>This separation is not an MVC tutorial. It is a practical way to shrink a callback and verify important logic.</a:t>
             </a:r>
-            <a:endParaRPr lang="en-US" sz="1800" dirty="0"/>
+            <a:endParaRPr lang="en-US" sz="1720" dirty="0"/>
           </a:p>
         </p:txBody>
       </p:sp>
@@ -5162,7 +5274,7 @@
         <p:spPr>
           <a:xfrm>
             <a:off x="0" y="0"/>
-            <a:ext cx="12191695" cy="155448"/>
+            <a:ext cx="12191695" cy="109728"/>
           </a:xfrm>
           <a:prstGeom prst="rect">
             <a:avLst/>
@@ -5186,7 +5298,7 @@
         </p:nvSpPr>
         <p:spPr>
           <a:xfrm>
-            <a:off x="566928" y="320040"/>
+            <a:off x="566928" y="310896"/>
             <a:ext cx="4663440" cy="182880"/>
           </a:xfrm>
           <a:prstGeom prst="rect">
@@ -5205,7 +5317,7 @@
               <a:buNone/>
             </a:pPr>
             <a:r>
-              <a:rPr lang="en-US" sz="900" b="1" spc="80" kern="0" dirty="0">
+              <a:rPr lang="en-US" sz="880" b="1" spc="50" kern="0" dirty="0">
                 <a:solidFill>
                   <a:srgbClr val="1877B9"/>
                 </a:solidFill>
@@ -5215,7 +5327,7 @@
               </a:rPr>
               <a:t>PROGRAMMING IN PYTHON</a:t>
             </a:r>
-            <a:endParaRPr lang="en-US" sz="900" dirty="0"/>
+            <a:endParaRPr lang="en-US" sz="880" dirty="0"/>
           </a:p>
         </p:txBody>
       </p:sp>
@@ -5227,7 +5339,7 @@
         </p:nvSpPr>
         <p:spPr>
           <a:xfrm>
-            <a:off x="9829800" y="320040"/>
+            <a:off x="9829800" y="310896"/>
             <a:ext cx="1783080" cy="182880"/>
           </a:xfrm>
           <a:prstGeom prst="rect">
@@ -5246,7 +5358,7 @@
               <a:buNone/>
             </a:pPr>
             <a:r>
-              <a:rPr lang="en-US" sz="900" b="1" dirty="0">
+              <a:rPr lang="en-US" sz="880" b="1" dirty="0">
                 <a:solidFill>
                   <a:srgbClr val="5E6B78"/>
                 </a:solidFill>
@@ -5256,7 +5368,7 @@
               </a:rPr>
               <a:t>LECTURE 03</a:t>
             </a:r>
-            <a:endParaRPr lang="en-US" sz="900" dirty="0"/>
+            <a:endParaRPr lang="en-US" sz="880" dirty="0"/>
           </a:p>
         </p:txBody>
       </p:sp>
@@ -5314,8 +5426,8 @@
         </p:nvSpPr>
         <p:spPr>
           <a:xfrm>
-            <a:off x="11109960" y="6501384"/>
-            <a:ext cx="457200" cy="146304"/>
+            <a:off x="10771632" y="6501384"/>
+            <a:ext cx="804672" cy="146304"/>
           </a:xfrm>
           <a:prstGeom prst="rect">
             <a:avLst/>
@@ -5333,7 +5445,7 @@
               <a:buNone/>
             </a:pPr>
             <a:r>
-              <a:rPr lang="en-US" sz="800" dirty="0">
+              <a:rPr lang="en-US" sz="780" dirty="0">
                 <a:solidFill>
                   <a:srgbClr val="5E6B78"/>
                 </a:solidFill>
@@ -5341,9 +5453,9 @@
                 <a:ea typeface="Consolas" pitchFamily="34" charset="-122"/>
                 <a:cs typeface="Consolas" pitchFamily="34" charset="-120"/>
               </a:rPr>
-              <a:t>14</a:t>
-            </a:r>
-            <a:endParaRPr lang="en-US" sz="800" dirty="0"/>
+              <a:t>14 / 24</a:t>
+            </a:r>
+            <a:endParaRPr lang="en-US" sz="780" dirty="0"/>
           </a:p>
         </p:txBody>
       </p:sp>
@@ -5355,8 +5467,8 @@
         </p:nvSpPr>
         <p:spPr>
           <a:xfrm>
-            <a:off x="658368" y="932688"/>
-            <a:ext cx="10789920" cy="713232"/>
+            <a:off x="658368" y="914400"/>
+            <a:ext cx="10881360" cy="713232"/>
           </a:xfrm>
           <a:prstGeom prst="rect">
             <a:avLst/>
@@ -5374,17 +5486,17 @@
               <a:buNone/>
             </a:pPr>
             <a:r>
-              <a:rPr lang="en-US" sz="2900" b="1" dirty="0">
+              <a:rPr lang="en-US" sz="2850" b="1" dirty="0">
                 <a:solidFill>
                   <a:srgbClr val="16324F"/>
                 </a:solidFill>
-                <a:latin typeface="Aptos" pitchFamily="34" charset="0"/>
-                <a:ea typeface="Aptos" pitchFamily="34" charset="-122"/>
-                <a:cs typeface="Aptos" pitchFamily="34" charset="-120"/>
+                <a:latin typeface="Aptos Display" pitchFamily="34" charset="0"/>
+                <a:ea typeface="Aptos Display" pitchFamily="34" charset="-122"/>
+                <a:cs typeface="Aptos Display" pitchFamily="34" charset="-120"/>
               </a:rPr>
               <a:t>Validation at the user boundary</a:t>
             </a:r>
-            <a:endParaRPr lang="en-US" sz="2900" dirty="0"/>
+            <a:endParaRPr lang="en-US" sz="2850" dirty="0"/>
           </a:p>
         </p:txBody>
       </p:sp>
@@ -5397,19 +5509,17 @@
         <p:spPr>
           <a:xfrm>
             <a:off x="658368" y="1828800"/>
-            <a:ext cx="6812280" cy="4069080"/>
-          </a:xfrm>
-          <a:prstGeom prst="roundRect">
-            <a:avLst>
-              <a:gd name="adj" fmla="val 1348"/>
-            </a:avLst>
+            <a:ext cx="6903720" cy="4069080"/>
+          </a:xfrm>
+          <a:prstGeom prst="rect">
+            <a:avLst/>
           </a:prstGeom>
           <a:solidFill>
             <a:srgbClr val="17212B"/>
           </a:solidFill>
           <a:ln w="12700">
             <a:solidFill>
-              <a:srgbClr val="17212B"/>
+              <a:srgbClr val="243242"/>
             </a:solidFill>
             <a:prstDash val="solid"/>
           </a:ln>
@@ -5417,14 +5527,39 @@
       </p:sp>
       <p:sp>
         <p:nvSpPr>
-          <p:cNvPr id="10" name="Text 8"/>
-          <p:cNvSpPr/>
-          <p:nvPr/>
-        </p:nvSpPr>
-        <p:spPr>
-          <a:xfrm>
-            <a:off x="868680" y="2029968"/>
-            <a:ext cx="6309360" cy="182880"/>
+          <p:cNvPr id="10" name="Shape 8"/>
+          <p:cNvSpPr/>
+          <p:nvPr/>
+        </p:nvSpPr>
+        <p:spPr>
+          <a:xfrm>
+            <a:off x="658368" y="1828800"/>
+            <a:ext cx="6903720" cy="347472"/>
+          </a:xfrm>
+          <a:prstGeom prst="rect">
+            <a:avLst/>
+          </a:prstGeom>
+          <a:solidFill>
+            <a:srgbClr val="223044"/>
+          </a:solidFill>
+          <a:ln w="12700">
+            <a:solidFill>
+              <a:srgbClr val="223044"/>
+            </a:solidFill>
+            <a:prstDash val="solid"/>
+          </a:ln>
+        </p:spPr>
+      </p:sp>
+      <p:sp>
+        <p:nvSpPr>
+          <p:cNvPr id="11" name="Text 9"/>
+          <p:cNvSpPr/>
+          <p:nvPr/>
+        </p:nvSpPr>
+        <p:spPr>
+          <a:xfrm>
+            <a:off x="868680" y="1947672"/>
+            <a:ext cx="6309360" cy="146304"/>
           </a:xfrm>
           <a:prstGeom prst="rect">
             <a:avLst/>
@@ -5442,7 +5577,7 @@
               <a:buNone/>
             </a:pPr>
             <a:r>
-              <a:rPr lang="en-US" sz="850" b="1" spc="70" kern="0" dirty="0">
+              <a:rPr lang="en-US" sz="820" b="1" spc="35" kern="0" dirty="0">
                 <a:solidFill>
                   <a:srgbClr val="8FD3FF"/>
                 </a:solidFill>
@@ -5452,20 +5587,20 @@
               </a:rPr>
               <a:t>python</a:t>
             </a:r>
-            <a:endParaRPr lang="en-US" sz="850" dirty="0"/>
-          </a:p>
-        </p:txBody>
-      </p:sp>
-      <p:sp>
-        <p:nvSpPr>
-          <p:cNvPr id="11" name="Text 9"/>
-          <p:cNvSpPr/>
-          <p:nvPr/>
-        </p:nvSpPr>
-        <p:spPr>
-          <a:xfrm>
-            <a:off x="877824" y="2395728"/>
-            <a:ext cx="6327648" cy="3246120"/>
+            <a:endParaRPr lang="en-US" sz="820" dirty="0"/>
+          </a:p>
+        </p:txBody>
+      </p:sp>
+      <p:sp>
+        <p:nvSpPr>
+          <p:cNvPr id="12" name="Text 10"/>
+          <p:cNvSpPr/>
+          <p:nvPr/>
+        </p:nvSpPr>
+        <p:spPr>
+          <a:xfrm>
+            <a:off x="877824" y="2359152"/>
+            <a:ext cx="6382512" cy="3246120"/>
           </a:xfrm>
           <a:prstGeom prst="rect">
             <a:avLst/>
@@ -5483,7 +5618,7 @@
               <a:buNone/>
             </a:pPr>
             <a:r>
-              <a:rPr lang="en-US" sz="1650" dirty="0">
+              <a:rPr lang="en-US" sz="1600" dirty="0">
                 <a:solidFill>
                   <a:srgbClr val="F4F7FA"/>
                 </a:solidFill>
@@ -5493,20 +5628,20 @@
               </a:rPr>
               <a:t>from tkinter import messagebox</a:t>
             </a:r>
-            <a:endParaRPr lang="en-US" sz="1650" dirty="0"/>
-          </a:p>
-          <a:p>
-            <a:pPr algn="l" indent="0" marL="0">
-              <a:buNone/>
-            </a:pPr>
-            <a:endParaRPr lang="en-US" sz="1650" dirty="0"/>
-          </a:p>
-          <a:p>
-            <a:pPr algn="l" indent="0" marL="0">
-              <a:buNone/>
-            </a:pPr>
-            <a:r>
-              <a:rPr lang="en-US" sz="1650" dirty="0">
+            <a:endParaRPr lang="en-US" sz="1600" dirty="0"/>
+          </a:p>
+          <a:p>
+            <a:pPr algn="l" indent="0" marL="0">
+              <a:buNone/>
+            </a:pPr>
+            <a:endParaRPr lang="en-US" sz="1600" dirty="0"/>
+          </a:p>
+          <a:p>
+            <a:pPr algn="l" indent="0" marL="0">
+              <a:buNone/>
+            </a:pPr>
+            <a:r>
+              <a:rPr lang="en-US" sz="1600" dirty="0">
                 <a:solidFill>
                   <a:srgbClr val="F4F7FA"/>
                 </a:solidFill>
@@ -5516,14 +5651,14 @@
               </a:rPr>
               <a:t>def analyze() -&gt; None:</a:t>
             </a:r>
-            <a:endParaRPr lang="en-US" sz="1650" dirty="0"/>
-          </a:p>
-          <a:p>
-            <a:pPr algn="l" indent="0" marL="0">
-              <a:buNone/>
-            </a:pPr>
-            <a:r>
-              <a:rPr lang="en-US" sz="1650" dirty="0">
+            <a:endParaRPr lang="en-US" sz="1600" dirty="0"/>
+          </a:p>
+          <a:p>
+            <a:pPr algn="l" indent="0" marL="0">
+              <a:buNone/>
+            </a:pPr>
+            <a:r>
+              <a:rPr lang="en-US" sz="1600" dirty="0">
                 <a:solidFill>
                   <a:srgbClr val="F4F7FA"/>
                 </a:solidFill>
@@ -5533,14 +5668,14 @@
               </a:rPr>
               <a:t>    text = entry.get().strip()</a:t>
             </a:r>
-            <a:endParaRPr lang="en-US" sz="1650" dirty="0"/>
-          </a:p>
-          <a:p>
-            <a:pPr algn="l" indent="0" marL="0">
-              <a:buNone/>
-            </a:pPr>
-            <a:r>
-              <a:rPr lang="en-US" sz="1650" dirty="0">
+            <a:endParaRPr lang="en-US" sz="1600" dirty="0"/>
+          </a:p>
+          <a:p>
+            <a:pPr algn="l" indent="0" marL="0">
+              <a:buNone/>
+            </a:pPr>
+            <a:r>
+              <a:rPr lang="en-US" sz="1600" dirty="0">
                 <a:solidFill>
                   <a:srgbClr val="F4F7FA"/>
                 </a:solidFill>
@@ -5550,14 +5685,14 @@
               </a:rPr>
               <a:t>    if not text:</a:t>
             </a:r>
-            <a:endParaRPr lang="en-US" sz="1650" dirty="0"/>
-          </a:p>
-          <a:p>
-            <a:pPr algn="l" indent="0" marL="0">
-              <a:buNone/>
-            </a:pPr>
-            <a:r>
-              <a:rPr lang="en-US" sz="1650" dirty="0">
+            <a:endParaRPr lang="en-US" sz="1600" dirty="0"/>
+          </a:p>
+          <a:p>
+            <a:pPr algn="l" indent="0" marL="0">
+              <a:buNone/>
+            </a:pPr>
+            <a:r>
+              <a:rPr lang="en-US" sz="1600" dirty="0">
                 <a:solidFill>
                   <a:srgbClr val="F4F7FA"/>
                 </a:solidFill>
@@ -5567,14 +5702,14 @@
               </a:rPr>
               <a:t>        messagebox.showerror("Chyba", "Zadajte text.")</a:t>
             </a:r>
-            <a:endParaRPr lang="en-US" sz="1650" dirty="0"/>
-          </a:p>
-          <a:p>
-            <a:pPr algn="l" indent="0" marL="0">
-              <a:buNone/>
-            </a:pPr>
-            <a:r>
-              <a:rPr lang="en-US" sz="1650" dirty="0">
+            <a:endParaRPr lang="en-US" sz="1600" dirty="0"/>
+          </a:p>
+          <a:p>
+            <a:pPr algn="l" indent="0" marL="0">
+              <a:buNone/>
+            </a:pPr>
+            <a:r>
+              <a:rPr lang="en-US" sz="1600" dirty="0">
                 <a:solidFill>
                   <a:srgbClr val="F4F7FA"/>
                 </a:solidFill>
@@ -5584,14 +5719,14 @@
               </a:rPr>
               <a:t>        return</a:t>
             </a:r>
-            <a:endParaRPr lang="en-US" sz="1650" dirty="0"/>
-          </a:p>
-          <a:p>
-            <a:pPr algn="l" indent="0" marL="0">
-              <a:buNone/>
-            </a:pPr>
-            <a:r>
-              <a:rPr lang="en-US" sz="1650" dirty="0">
+            <a:endParaRPr lang="en-US" sz="1600" dirty="0"/>
+          </a:p>
+          <a:p>
+            <a:pPr algn="l" indent="0" marL="0">
+              <a:buNone/>
+            </a:pPr>
+            <a:r>
+              <a:rPr lang="en-US" sz="1600" dirty="0">
                 <a:solidFill>
                   <a:srgbClr val="F4F7FA"/>
                 </a:solidFill>
@@ -5601,20 +5736,20 @@
               </a:rPr>
               <a:t>    result.config(text=str(analyze_text(text)))</a:t>
             </a:r>
-            <a:endParaRPr lang="en-US" sz="1650" dirty="0"/>
-          </a:p>
-        </p:txBody>
-      </p:sp>
-      <p:sp>
-        <p:nvSpPr>
-          <p:cNvPr id="12" name="Shape 10"/>
-          <p:cNvSpPr/>
-          <p:nvPr/>
-        </p:nvSpPr>
-        <p:spPr>
-          <a:xfrm>
-            <a:off x="7909560" y="1901952"/>
-            <a:ext cx="0" cy="3566160"/>
+            <a:endParaRPr lang="en-US" sz="1600" dirty="0"/>
+          </a:p>
+        </p:txBody>
+      </p:sp>
+      <p:sp>
+        <p:nvSpPr>
+          <p:cNvPr id="13" name="Shape 11"/>
+          <p:cNvSpPr/>
+          <p:nvPr/>
+        </p:nvSpPr>
+        <p:spPr>
+          <a:xfrm>
+            <a:off x="7936992" y="1883664"/>
+            <a:ext cx="0" cy="3639312"/>
           </a:xfrm>
           <a:prstGeom prst="line">
             <a:avLst/>
@@ -5630,14 +5765,14 @@
       </p:sp>
       <p:sp>
         <p:nvSpPr>
-          <p:cNvPr id="13" name="Text 11"/>
-          <p:cNvSpPr/>
-          <p:nvPr/>
-        </p:nvSpPr>
-        <p:spPr>
-          <a:xfrm>
-            <a:off x="8229600" y="2130552"/>
-            <a:ext cx="2743200" cy="2468880"/>
+          <p:cNvPr id="14" name="Text 12"/>
+          <p:cNvSpPr/>
+          <p:nvPr/>
+        </p:nvSpPr>
+        <p:spPr>
+          <a:xfrm>
+            <a:off x="8229600" y="2084832"/>
+            <a:ext cx="2816352" cy="2514600"/>
           </a:xfrm>
           <a:prstGeom prst="rect">
             <a:avLst/>
@@ -5655,7 +5790,7 @@
               <a:buNone/>
             </a:pPr>
             <a:r>
-              <a:rPr lang="en-US" sz="1800" dirty="0">
+              <a:rPr lang="en-US" sz="1720" dirty="0">
                 <a:solidFill>
                   <a:srgbClr val="5E6B78"/>
                 </a:solidFill>
@@ -5665,7 +5800,7 @@
               </a:rPr>
               <a:t>User input can be empty or invalid. Validate it at the UI boundary before further processing.</a:t>
             </a:r>
-            <a:endParaRPr lang="en-US" sz="1800" dirty="0"/>
+            <a:endParaRPr lang="en-US" sz="1720" dirty="0"/>
           </a:p>
         </p:txBody>
       </p:sp>
@@ -5710,7 +5845,7 @@
         <p:spPr>
           <a:xfrm>
             <a:off x="0" y="0"/>
-            <a:ext cx="12191695" cy="155448"/>
+            <a:ext cx="12191695" cy="109728"/>
           </a:xfrm>
           <a:prstGeom prst="rect">
             <a:avLst/>
@@ -5734,7 +5869,7 @@
         </p:nvSpPr>
         <p:spPr>
           <a:xfrm>
-            <a:off x="566928" y="320040"/>
+            <a:off x="566928" y="310896"/>
             <a:ext cx="4663440" cy="182880"/>
           </a:xfrm>
           <a:prstGeom prst="rect">
@@ -5753,7 +5888,7 @@
               <a:buNone/>
             </a:pPr>
             <a:r>
-              <a:rPr lang="en-US" sz="900" b="1" spc="80" kern="0" dirty="0">
+              <a:rPr lang="en-US" sz="880" b="1" spc="50" kern="0" dirty="0">
                 <a:solidFill>
                   <a:srgbClr val="1877B9"/>
                 </a:solidFill>
@@ -5763,7 +5898,7 @@
               </a:rPr>
               <a:t>PROGRAMMING IN PYTHON</a:t>
             </a:r>
-            <a:endParaRPr lang="en-US" sz="900" dirty="0"/>
+            <a:endParaRPr lang="en-US" sz="880" dirty="0"/>
           </a:p>
         </p:txBody>
       </p:sp>
@@ -5775,7 +5910,7 @@
         </p:nvSpPr>
         <p:spPr>
           <a:xfrm>
-            <a:off x="9829800" y="320040"/>
+            <a:off x="9829800" y="310896"/>
             <a:ext cx="1783080" cy="182880"/>
           </a:xfrm>
           <a:prstGeom prst="rect">
@@ -5794,7 +5929,7 @@
               <a:buNone/>
             </a:pPr>
             <a:r>
-              <a:rPr lang="en-US" sz="900" b="1" dirty="0">
+              <a:rPr lang="en-US" sz="880" b="1" dirty="0">
                 <a:solidFill>
                   <a:srgbClr val="5E6B78"/>
                 </a:solidFill>
@@ -5804,7 +5939,7 @@
               </a:rPr>
               <a:t>LECTURE 03</a:t>
             </a:r>
-            <a:endParaRPr lang="en-US" sz="900" dirty="0"/>
+            <a:endParaRPr lang="en-US" sz="880" dirty="0"/>
           </a:p>
         </p:txBody>
       </p:sp>
@@ -5862,8 +5997,8 @@
         </p:nvSpPr>
         <p:spPr>
           <a:xfrm>
-            <a:off x="11109960" y="6501384"/>
-            <a:ext cx="457200" cy="146304"/>
+            <a:off x="10771632" y="6501384"/>
+            <a:ext cx="804672" cy="146304"/>
           </a:xfrm>
           <a:prstGeom prst="rect">
             <a:avLst/>
@@ -5881,7 +6016,7 @@
               <a:buNone/>
             </a:pPr>
             <a:r>
-              <a:rPr lang="en-US" sz="800" dirty="0">
+              <a:rPr lang="en-US" sz="780" dirty="0">
                 <a:solidFill>
                   <a:srgbClr val="5E6B78"/>
                 </a:solidFill>
@@ -5889,9 +6024,9 @@
                 <a:ea typeface="Consolas" pitchFamily="34" charset="-122"/>
                 <a:cs typeface="Consolas" pitchFamily="34" charset="-120"/>
               </a:rPr>
-              <a:t>15</a:t>
-            </a:r>
-            <a:endParaRPr lang="en-US" sz="800" dirty="0"/>
+              <a:t>15 / 24</a:t>
+            </a:r>
+            <a:endParaRPr lang="en-US" sz="780" dirty="0"/>
           </a:p>
         </p:txBody>
       </p:sp>
@@ -5903,8 +6038,8 @@
         </p:nvSpPr>
         <p:spPr>
           <a:xfrm>
-            <a:off x="658368" y="932688"/>
-            <a:ext cx="10789920" cy="713232"/>
+            <a:off x="658368" y="914400"/>
+            <a:ext cx="10881360" cy="713232"/>
           </a:xfrm>
           <a:prstGeom prst="rect">
             <a:avLst/>
@@ -5922,49 +6057,67 @@
               <a:buNone/>
             </a:pPr>
             <a:r>
-              <a:rPr lang="en-US" sz="2900" b="1" dirty="0">
+              <a:rPr lang="en-US" sz="2850" b="1" dirty="0">
                 <a:solidFill>
                   <a:srgbClr val="16324F"/>
+                </a:solidFill>
+                <a:latin typeface="Aptos Display" pitchFamily="34" charset="0"/>
+                <a:ea typeface="Aptos Display" pitchFamily="34" charset="-122"/>
+                <a:cs typeface="Aptos Display" pitchFamily="34" charset="-120"/>
+              </a:rPr>
+              <a:t>A dialog extends the workflow</a:t>
+            </a:r>
+            <a:endParaRPr lang="en-US" sz="2850" dirty="0"/>
+          </a:p>
+        </p:txBody>
+      </p:sp>
+      <p:sp>
+        <p:nvSpPr>
+          <p:cNvPr id="9" name="Text 7"/>
+          <p:cNvSpPr/>
+          <p:nvPr/>
+        </p:nvSpPr>
+        <p:spPr>
+          <a:xfrm>
+            <a:off x="749808" y="1920240"/>
+            <a:ext cx="4160520" cy="3886200"/>
+          </a:xfrm>
+          <a:prstGeom prst="rect">
+            <a:avLst/>
+          </a:prstGeom>
+          <a:noFill/>
+          <a:ln/>
+        </p:spPr>
+        <p:txBody>
+          <a:bodyPr wrap="square" lIns="508" tIns="508" rIns="508" bIns="508" rtlCol="0" anchor="t">
+            <a:normAutofit/>
+          </a:bodyPr>
+          <a:lstStyle/>
+          <a:p>
+            <a:pPr marL="228600" indent="-228600">
+              <a:buSzPct val="100000"/>
+              <a:buChar char="•"/>
+            </a:pPr>
+            <a:r>
+              <a:rPr lang="en-US" sz="1650" dirty="0">
+                <a:solidFill>
+                  <a:srgbClr val="18212B"/>
                 </a:solidFill>
                 <a:latin typeface="Aptos" pitchFamily="34" charset="0"/>
                 <a:ea typeface="Aptos" pitchFamily="34" charset="-122"/>
                 <a:cs typeface="Aptos" pitchFamily="34" charset="-120"/>
               </a:rPr>
-              <a:t>A dialog extends the workflow</a:t>
-            </a:r>
-            <a:endParaRPr lang="en-US" sz="2900" dirty="0"/>
-          </a:p>
-        </p:txBody>
-      </p:sp>
-      <p:sp>
-        <p:nvSpPr>
-          <p:cNvPr id="9" name="Text 7"/>
-          <p:cNvSpPr/>
-          <p:nvPr/>
-        </p:nvSpPr>
-        <p:spPr>
-          <a:xfrm>
-            <a:off x="749808" y="1920240"/>
-            <a:ext cx="4160520" cy="3886200"/>
-          </a:xfrm>
-          <a:prstGeom prst="rect">
-            <a:avLst/>
-          </a:prstGeom>
-          <a:noFill/>
-          <a:ln/>
-        </p:spPr>
-        <p:txBody>
-          <a:bodyPr wrap="square" lIns="508" tIns="508" rIns="508" bIns="508" rtlCol="0" anchor="t">
-            <a:normAutofit/>
-          </a:bodyPr>
-          <a:lstStyle/>
+              <a:t>Cancel is not an error</a:t>
+            </a:r>
+            <a:endParaRPr lang="en-US" sz="1650" dirty="0"/>
+          </a:p>
           <a:p>
             <a:pPr marL="228600" indent="-228600">
               <a:buSzPct val="100000"/>
               <a:buChar char="•"/>
             </a:pPr>
             <a:r>
-              <a:rPr lang="en-US" sz="1700" dirty="0">
+              <a:rPr lang="en-US" sz="1650" dirty="0">
                 <a:solidFill>
                   <a:srgbClr val="18212B"/>
                 </a:solidFill>
@@ -5972,9 +6125,9 @@
                 <a:ea typeface="Aptos" pitchFamily="34" charset="-122"/>
                 <a:cs typeface="Aptos" pitchFamily="34" charset="-120"/>
               </a:rPr>
-              <a:t>Cancel is not an error</a:t>
-            </a:r>
-            <a:endParaRPr lang="en-US" sz="1700" dirty="0"/>
+              <a:t>a file path can fail while reading</a:t>
+            </a:r>
+            <a:endParaRPr lang="en-US" sz="1650" dirty="0"/>
           </a:p>
           <a:p>
             <a:pPr marL="228600" indent="-228600">
@@ -5982,7 +6135,7 @@
               <a:buChar char="•"/>
             </a:pPr>
             <a:r>
-              <a:rPr lang="en-US" sz="1700" dirty="0">
+              <a:rPr lang="en-US" sz="1650" dirty="0">
                 <a:solidFill>
                   <a:srgbClr val="18212B"/>
                 </a:solidFill>
@@ -5990,27 +6143,9 @@
                 <a:ea typeface="Aptos" pitchFamily="34" charset="-122"/>
                 <a:cs typeface="Aptos" pitchFamily="34" charset="-120"/>
               </a:rPr>
-              <a:t>a file path can fail while reading</a:t>
-            </a:r>
-            <a:endParaRPr lang="en-US" sz="1700" dirty="0"/>
-          </a:p>
-          <a:p>
-            <a:pPr marL="228600" indent="-228600">
-              <a:buSzPct val="100000"/>
-              <a:buChar char="•"/>
-            </a:pPr>
-            <a:r>
-              <a:rPr lang="en-US" sz="1700" dirty="0">
-                <a:solidFill>
-                  <a:srgbClr val="18212B"/>
-                </a:solidFill>
-                <a:latin typeface="Aptos" pitchFamily="34" charset="0"/>
-                <a:ea typeface="Aptos" pitchFamily="34" charset="-122"/>
-                <a:cs typeface="Aptos" pitchFamily="34" charset="-120"/>
-              </a:rPr>
               <a:t>Path from Lecture 02 remains useful</a:t>
             </a:r>
-            <a:endParaRPr lang="en-US" sz="1700" dirty="0"/>
+            <a:endParaRPr lang="en-US" sz="1650" dirty="0"/>
           </a:p>
         </p:txBody>
       </p:sp>
@@ -6022,8 +6157,8 @@
         </p:nvSpPr>
         <p:spPr>
           <a:xfrm>
-            <a:off x="5394960" y="1792224"/>
-            <a:ext cx="5943600" cy="4160520"/>
+            <a:off x="5413248" y="1792224"/>
+            <a:ext cx="5925312" cy="4160520"/>
           </a:xfrm>
           <a:prstGeom prst="rect">
             <a:avLst/>
@@ -6033,7 +6168,7 @@
           </a:solidFill>
           <a:ln w="12700">
             <a:solidFill>
-              <a:srgbClr val="17212B"/>
+              <a:srgbClr val="243242"/>
             </a:solidFill>
             <a:prstDash val="solid"/>
           </a:ln>
@@ -6041,14 +6176,39 @@
       </p:sp>
       <p:sp>
         <p:nvSpPr>
-          <p:cNvPr id="11" name="Text 9"/>
-          <p:cNvSpPr/>
-          <p:nvPr/>
-        </p:nvSpPr>
-        <p:spPr>
-          <a:xfrm>
-            <a:off x="5641848" y="1993392"/>
-            <a:ext cx="5394960" cy="182880"/>
+          <p:cNvPr id="11" name="Shape 9"/>
+          <p:cNvSpPr/>
+          <p:nvPr/>
+        </p:nvSpPr>
+        <p:spPr>
+          <a:xfrm>
+            <a:off x="5413248" y="1792224"/>
+            <a:ext cx="5925312" cy="329184"/>
+          </a:xfrm>
+          <a:prstGeom prst="rect">
+            <a:avLst/>
+          </a:prstGeom>
+          <a:solidFill>
+            <a:srgbClr val="223044"/>
+          </a:solidFill>
+          <a:ln w="12700">
+            <a:solidFill>
+              <a:srgbClr val="223044"/>
+            </a:solidFill>
+            <a:prstDash val="solid"/>
+          </a:ln>
+        </p:spPr>
+      </p:sp>
+      <p:sp>
+        <p:nvSpPr>
+          <p:cNvPr id="12" name="Text 10"/>
+          <p:cNvSpPr/>
+          <p:nvPr/>
+        </p:nvSpPr>
+        <p:spPr>
+          <a:xfrm>
+            <a:off x="5641848" y="1901952"/>
+            <a:ext cx="5394960" cy="146304"/>
           </a:xfrm>
           <a:prstGeom prst="rect">
             <a:avLst/>
@@ -6066,7 +6226,7 @@
               <a:buNone/>
             </a:pPr>
             <a:r>
-              <a:rPr lang="en-US" sz="850" b="1" spc="70" kern="0" dirty="0">
+              <a:rPr lang="en-US" sz="810" b="1" spc="35" kern="0" dirty="0">
                 <a:solidFill>
                   <a:srgbClr val="8FD3FF"/>
                 </a:solidFill>
@@ -6076,20 +6236,20 @@
               </a:rPr>
               <a:t>python</a:t>
             </a:r>
-            <a:endParaRPr lang="en-US" sz="850" dirty="0"/>
-          </a:p>
-        </p:txBody>
-      </p:sp>
-      <p:sp>
-        <p:nvSpPr>
-          <p:cNvPr id="12" name="Text 10"/>
-          <p:cNvSpPr/>
-          <p:nvPr/>
-        </p:nvSpPr>
-        <p:spPr>
-          <a:xfrm>
-            <a:off x="5641848" y="2395728"/>
-            <a:ext cx="5330952" cy="3127248"/>
+            <a:endParaRPr lang="en-US" sz="810" dirty="0"/>
+          </a:p>
+        </p:txBody>
+      </p:sp>
+      <p:sp>
+        <p:nvSpPr>
+          <p:cNvPr id="13" name="Text 11"/>
+          <p:cNvSpPr/>
+          <p:nvPr/>
+        </p:nvSpPr>
+        <p:spPr>
+          <a:xfrm>
+            <a:off x="5641848" y="2331720"/>
+            <a:ext cx="5340096" cy="3182112"/>
           </a:xfrm>
           <a:prstGeom prst="rect">
             <a:avLst/>
@@ -6107,7 +6267,7 @@
               <a:buNone/>
             </a:pPr>
             <a:r>
-              <a:rPr lang="en-US" sz="1560" dirty="0">
+              <a:rPr lang="en-US" sz="1500" dirty="0">
                 <a:solidFill>
                   <a:srgbClr val="F4F7FA"/>
                 </a:solidFill>
@@ -6117,14 +6277,14 @@
               </a:rPr>
               <a:t>from tkinter import filedialog</a:t>
             </a:r>
-            <a:endParaRPr lang="en-US" sz="1560" dirty="0"/>
-          </a:p>
-          <a:p>
-            <a:pPr algn="l" indent="0" marL="0">
-              <a:buNone/>
-            </a:pPr>
-            <a:r>
-              <a:rPr lang="en-US" sz="1560" dirty="0">
+            <a:endParaRPr lang="en-US" sz="1500" dirty="0"/>
+          </a:p>
+          <a:p>
+            <a:pPr algn="l" indent="0" marL="0">
+              <a:buNone/>
+            </a:pPr>
+            <a:r>
+              <a:rPr lang="en-US" sz="1500" dirty="0">
                 <a:solidFill>
                   <a:srgbClr val="F4F7FA"/>
                 </a:solidFill>
@@ -6134,20 +6294,20 @@
               </a:rPr>
               <a:t>from pathlib import Path</a:t>
             </a:r>
-            <a:endParaRPr lang="en-US" sz="1560" dirty="0"/>
-          </a:p>
-          <a:p>
-            <a:pPr algn="l" indent="0" marL="0">
-              <a:buNone/>
-            </a:pPr>
-            <a:endParaRPr lang="en-US" sz="1560" dirty="0"/>
-          </a:p>
-          <a:p>
-            <a:pPr algn="l" indent="0" marL="0">
-              <a:buNone/>
-            </a:pPr>
-            <a:r>
-              <a:rPr lang="en-US" sz="1560" dirty="0">
+            <a:endParaRPr lang="en-US" sz="1500" dirty="0"/>
+          </a:p>
+          <a:p>
+            <a:pPr algn="l" indent="0" marL="0">
+              <a:buNone/>
+            </a:pPr>
+            <a:endParaRPr lang="en-US" sz="1500" dirty="0"/>
+          </a:p>
+          <a:p>
+            <a:pPr algn="l" indent="0" marL="0">
+              <a:buNone/>
+            </a:pPr>
+            <a:r>
+              <a:rPr lang="en-US" sz="1500" dirty="0">
                 <a:solidFill>
                   <a:srgbClr val="F4F7FA"/>
                 </a:solidFill>
@@ -6157,14 +6317,14 @@
               </a:rPr>
               <a:t>def open_file() -&gt; None:</a:t>
             </a:r>
-            <a:endParaRPr lang="en-US" sz="1560" dirty="0"/>
-          </a:p>
-          <a:p>
-            <a:pPr algn="l" indent="0" marL="0">
-              <a:buNone/>
-            </a:pPr>
-            <a:r>
-              <a:rPr lang="en-US" sz="1560" dirty="0">
+            <a:endParaRPr lang="en-US" sz="1500" dirty="0"/>
+          </a:p>
+          <a:p>
+            <a:pPr algn="l" indent="0" marL="0">
+              <a:buNone/>
+            </a:pPr>
+            <a:r>
+              <a:rPr lang="en-US" sz="1500" dirty="0">
                 <a:solidFill>
                   <a:srgbClr val="F4F7FA"/>
                 </a:solidFill>
@@ -6174,14 +6334,14 @@
               </a:rPr>
               <a:t>    filename = filedialog.askopenfilename(filetypes=[("Text", "*.txt")])</a:t>
             </a:r>
-            <a:endParaRPr lang="en-US" sz="1560" dirty="0"/>
-          </a:p>
-          <a:p>
-            <a:pPr algn="l" indent="0" marL="0">
-              <a:buNone/>
-            </a:pPr>
-            <a:r>
-              <a:rPr lang="en-US" sz="1560" dirty="0">
+            <a:endParaRPr lang="en-US" sz="1500" dirty="0"/>
+          </a:p>
+          <a:p>
+            <a:pPr algn="l" indent="0" marL="0">
+              <a:buNone/>
+            </a:pPr>
+            <a:r>
+              <a:rPr lang="en-US" sz="1500" dirty="0">
                 <a:solidFill>
                   <a:srgbClr val="F4F7FA"/>
                 </a:solidFill>
@@ -6191,14 +6351,14 @@
               </a:rPr>
               <a:t>    if not filename:</a:t>
             </a:r>
-            <a:endParaRPr lang="en-US" sz="1560" dirty="0"/>
-          </a:p>
-          <a:p>
-            <a:pPr algn="l" indent="0" marL="0">
-              <a:buNone/>
-            </a:pPr>
-            <a:r>
-              <a:rPr lang="en-US" sz="1560" dirty="0">
+            <a:endParaRPr lang="en-US" sz="1500" dirty="0"/>
+          </a:p>
+          <a:p>
+            <a:pPr algn="l" indent="0" marL="0">
+              <a:buNone/>
+            </a:pPr>
+            <a:r>
+              <a:rPr lang="en-US" sz="1500" dirty="0">
                 <a:solidFill>
                   <a:srgbClr val="F4F7FA"/>
                 </a:solidFill>
@@ -6208,14 +6368,14 @@
               </a:rPr>
               <a:t>        return</a:t>
             </a:r>
-            <a:endParaRPr lang="en-US" sz="1560" dirty="0"/>
-          </a:p>
-          <a:p>
-            <a:pPr algn="l" indent="0" marL="0">
-              <a:buNone/>
-            </a:pPr>
-            <a:r>
-              <a:rPr lang="en-US" sz="1560" dirty="0">
+            <a:endParaRPr lang="en-US" sz="1500" dirty="0"/>
+          </a:p>
+          <a:p>
+            <a:pPr algn="l" indent="0" marL="0">
+              <a:buNone/>
+            </a:pPr>
+            <a:r>
+              <a:rPr lang="en-US" sz="1500" dirty="0">
                 <a:solidFill>
                   <a:srgbClr val="F4F7FA"/>
                 </a:solidFill>
@@ -6225,14 +6385,14 @@
               </a:rPr>
               <a:t>    text = Path(filename).read_text(encoding="utf-8")</a:t>
             </a:r>
-            <a:endParaRPr lang="en-US" sz="1560" dirty="0"/>
-          </a:p>
-          <a:p>
-            <a:pPr algn="l" indent="0" marL="0">
-              <a:buNone/>
-            </a:pPr>
-            <a:r>
-              <a:rPr lang="en-US" sz="1560" dirty="0">
+            <a:endParaRPr lang="en-US" sz="1500" dirty="0"/>
+          </a:p>
+          <a:p>
+            <a:pPr algn="l" indent="0" marL="0">
+              <a:buNone/>
+            </a:pPr>
+            <a:r>
+              <a:rPr lang="en-US" sz="1500" dirty="0">
                 <a:solidFill>
                   <a:srgbClr val="F4F7FA"/>
                 </a:solidFill>
@@ -6242,7 +6402,7 @@
               </a:rPr>
               <a:t>    show_stats(analyze_text(text))</a:t>
             </a:r>
-            <a:endParaRPr lang="en-US" sz="1560" dirty="0"/>
+            <a:endParaRPr lang="en-US" sz="1500" dirty="0"/>
           </a:p>
         </p:txBody>
       </p:sp>
@@ -6287,7 +6447,7 @@
         <p:spPr>
           <a:xfrm>
             <a:off x="0" y="0"/>
-            <a:ext cx="12191695" cy="155448"/>
+            <a:ext cx="12191695" cy="109728"/>
           </a:xfrm>
           <a:prstGeom prst="rect">
             <a:avLst/>
@@ -6311,7 +6471,7 @@
         </p:nvSpPr>
         <p:spPr>
           <a:xfrm>
-            <a:off x="566928" y="320040"/>
+            <a:off x="566928" y="310896"/>
             <a:ext cx="4663440" cy="182880"/>
           </a:xfrm>
           <a:prstGeom prst="rect">
@@ -6330,7 +6490,7 @@
               <a:buNone/>
             </a:pPr>
             <a:r>
-              <a:rPr lang="en-US" sz="900" b="1" spc="80" kern="0" dirty="0">
+              <a:rPr lang="en-US" sz="880" b="1" spc="50" kern="0" dirty="0">
                 <a:solidFill>
                   <a:srgbClr val="1877B9"/>
                 </a:solidFill>
@@ -6340,7 +6500,7 @@
               </a:rPr>
               <a:t>PROGRAMMING IN PYTHON</a:t>
             </a:r>
-            <a:endParaRPr lang="en-US" sz="900" dirty="0"/>
+            <a:endParaRPr lang="en-US" sz="880" dirty="0"/>
           </a:p>
         </p:txBody>
       </p:sp>
@@ -6352,7 +6512,7 @@
         </p:nvSpPr>
         <p:spPr>
           <a:xfrm>
-            <a:off x="9829800" y="320040"/>
+            <a:off x="9829800" y="310896"/>
             <a:ext cx="1783080" cy="182880"/>
           </a:xfrm>
           <a:prstGeom prst="rect">
@@ -6371,7 +6531,7 @@
               <a:buNone/>
             </a:pPr>
             <a:r>
-              <a:rPr lang="en-US" sz="900" b="1" dirty="0">
+              <a:rPr lang="en-US" sz="880" b="1" dirty="0">
                 <a:solidFill>
                   <a:srgbClr val="5E6B78"/>
                 </a:solidFill>
@@ -6381,7 +6541,7 @@
               </a:rPr>
               <a:t>LECTURE 03</a:t>
             </a:r>
-            <a:endParaRPr lang="en-US" sz="900" dirty="0"/>
+            <a:endParaRPr lang="en-US" sz="880" dirty="0"/>
           </a:p>
         </p:txBody>
       </p:sp>
@@ -6439,8 +6599,8 @@
         </p:nvSpPr>
         <p:spPr>
           <a:xfrm>
-            <a:off x="11109960" y="6501384"/>
-            <a:ext cx="457200" cy="146304"/>
+            <a:off x="10771632" y="6501384"/>
+            <a:ext cx="804672" cy="146304"/>
           </a:xfrm>
           <a:prstGeom prst="rect">
             <a:avLst/>
@@ -6458,7 +6618,7 @@
               <a:buNone/>
             </a:pPr>
             <a:r>
-              <a:rPr lang="en-US" sz="800" dirty="0">
+              <a:rPr lang="en-US" sz="780" dirty="0">
                 <a:solidFill>
                   <a:srgbClr val="5E6B78"/>
                 </a:solidFill>
@@ -6466,9 +6626,9 @@
                 <a:ea typeface="Consolas" pitchFamily="34" charset="-122"/>
                 <a:cs typeface="Consolas" pitchFamily="34" charset="-120"/>
               </a:rPr>
-              <a:t>16</a:t>
-            </a:r>
-            <a:endParaRPr lang="en-US" sz="800" dirty="0"/>
+              <a:t>16 / 24</a:t>
+            </a:r>
+            <a:endParaRPr lang="en-US" sz="780" dirty="0"/>
           </a:p>
         </p:txBody>
       </p:sp>
@@ -6480,8 +6640,8 @@
         </p:nvSpPr>
         <p:spPr>
           <a:xfrm>
-            <a:off x="658368" y="932688"/>
-            <a:ext cx="10789920" cy="713232"/>
+            <a:off x="658368" y="914400"/>
+            <a:ext cx="10881360" cy="713232"/>
           </a:xfrm>
           <a:prstGeom prst="rect">
             <a:avLst/>
@@ -6499,55 +6659,55 @@
               <a:buNone/>
             </a:pPr>
             <a:r>
-              <a:rPr lang="en-US" sz="2900" b="1" dirty="0">
+              <a:rPr lang="en-US" sz="2850" b="1" dirty="0">
                 <a:solidFill>
                   <a:srgbClr val="16324F"/>
+                </a:solidFill>
+                <a:latin typeface="Aptos Display" pitchFamily="34" charset="0"/>
+                <a:ea typeface="Aptos Display" pitchFamily="34" charset="-122"/>
+                <a:cs typeface="Aptos Display" pitchFamily="34" charset="-120"/>
+              </a:rPr>
+              <a:t>Why does the window freeze?</a:t>
+            </a:r>
+            <a:endParaRPr lang="en-US" sz="2850" dirty="0"/>
+          </a:p>
+        </p:txBody>
+      </p:sp>
+      <p:sp>
+        <p:nvSpPr>
+          <p:cNvPr id="9" name="Text 7"/>
+          <p:cNvSpPr/>
+          <p:nvPr/>
+        </p:nvSpPr>
+        <p:spPr>
+          <a:xfrm>
+            <a:off x="694944" y="1709928"/>
+            <a:ext cx="9235440" cy="457200"/>
+          </a:xfrm>
+          <a:prstGeom prst="rect">
+            <a:avLst/>
+          </a:prstGeom>
+          <a:noFill/>
+          <a:ln/>
+        </p:spPr>
+        <p:txBody>
+          <a:bodyPr wrap="square" lIns="0" tIns="0" rIns="0" bIns="0" rtlCol="0" anchor="t">
+            <a:normAutofit/>
+          </a:bodyPr>
+          <a:lstStyle/>
+          <a:p>
+            <a:pPr algn="l" indent="0" marL="0">
+              <a:buNone/>
+            </a:pPr>
+            <a:r>
+              <a:rPr lang="en-US" sz="2000" dirty="0">
+                <a:solidFill>
+                  <a:srgbClr val="5E6B78"/>
                 </a:solidFill>
                 <a:latin typeface="Aptos" pitchFamily="34" charset="0"/>
                 <a:ea typeface="Aptos" pitchFamily="34" charset="-122"/>
                 <a:cs typeface="Aptos" pitchFamily="34" charset="-120"/>
               </a:rPr>
-              <a:t>Why does the window freeze?</a:t>
-            </a:r>
-            <a:endParaRPr lang="en-US" sz="2900" dirty="0"/>
-          </a:p>
-        </p:txBody>
-      </p:sp>
-      <p:sp>
-        <p:nvSpPr>
-          <p:cNvPr id="9" name="Text 7"/>
-          <p:cNvSpPr/>
-          <p:nvPr/>
-        </p:nvSpPr>
-        <p:spPr>
-          <a:xfrm>
-            <a:off x="694944" y="1709928"/>
-            <a:ext cx="9235440" cy="457200"/>
-          </a:xfrm>
-          <a:prstGeom prst="rect">
-            <a:avLst/>
-          </a:prstGeom>
-          <a:noFill/>
-          <a:ln/>
-        </p:spPr>
-        <p:txBody>
-          <a:bodyPr wrap="square" lIns="0" tIns="0" rIns="0" bIns="0" rtlCol="0" anchor="t">
-            <a:normAutofit/>
-          </a:bodyPr>
-          <a:lstStyle/>
-          <a:p>
-            <a:pPr algn="l" indent="0" marL="0">
-              <a:buNone/>
-            </a:pPr>
-            <a:r>
-              <a:rPr lang="en-US" sz="2000" dirty="0">
-                <a:solidFill>
-                  <a:srgbClr val="5E6B78"/>
-                </a:solidFill>
-                <a:latin typeface="Aptos" pitchFamily="34" charset="0"/>
-                <a:ea typeface="Aptos" pitchFamily="34" charset="-122"/>
-                <a:cs typeface="Aptos" pitchFamily="34" charset="-120"/>
-              </a:rPr>
               <a:t>What happens to the event loop during sleep()?</a:t>
             </a:r>
             <a:endParaRPr lang="en-US" sz="2000" dirty="0"/>
@@ -6565,10 +6725,8 @@
             <a:off x="658368" y="2423160"/>
             <a:ext cx="7863840" cy="3154680"/>
           </a:xfrm>
-          <a:prstGeom prst="roundRect">
-            <a:avLst>
-              <a:gd name="adj" fmla="val 1739"/>
-            </a:avLst>
+          <a:prstGeom prst="rect">
+            <a:avLst/>
           </a:prstGeom>
           <a:solidFill>
             <a:srgbClr val="F3F6F8"/>
@@ -6583,14 +6741,39 @@
       </p:sp>
       <p:sp>
         <p:nvSpPr>
-          <p:cNvPr id="11" name="Text 9"/>
-          <p:cNvSpPr/>
-          <p:nvPr/>
-        </p:nvSpPr>
-        <p:spPr>
-          <a:xfrm>
-            <a:off x="896112" y="2651760"/>
-            <a:ext cx="7132320" cy="182880"/>
+          <p:cNvPr id="11" name="Shape 9"/>
+          <p:cNvSpPr/>
+          <p:nvPr/>
+        </p:nvSpPr>
+        <p:spPr>
+          <a:xfrm>
+            <a:off x="658368" y="2423160"/>
+            <a:ext cx="7863840" cy="347472"/>
+          </a:xfrm>
+          <a:prstGeom prst="rect">
+            <a:avLst/>
+          </a:prstGeom>
+          <a:solidFill>
+            <a:srgbClr val="E7EEF4"/>
+          </a:solidFill>
+          <a:ln w="12700">
+            <a:solidFill>
+              <a:srgbClr val="E7EEF4"/>
+            </a:solidFill>
+            <a:prstDash val="solid"/>
+          </a:ln>
+        </p:spPr>
+      </p:sp>
+      <p:sp>
+        <p:nvSpPr>
+          <p:cNvPr id="12" name="Text 10"/>
+          <p:cNvSpPr/>
+          <p:nvPr/>
+        </p:nvSpPr>
+        <p:spPr>
+          <a:xfrm>
+            <a:off x="896112" y="2542032"/>
+            <a:ext cx="7132320" cy="146304"/>
           </a:xfrm>
           <a:prstGeom prst="rect">
             <a:avLst/>
@@ -6608,7 +6791,7 @@
               <a:buNone/>
             </a:pPr>
             <a:r>
-              <a:rPr lang="en-US" sz="850" b="1" dirty="0">
+              <a:rPr lang="en-US" sz="820" b="1" dirty="0">
                 <a:solidFill>
                   <a:srgbClr val="1877B9"/>
                 </a:solidFill>
@@ -6618,19 +6801,19 @@
               </a:rPr>
               <a:t>python</a:t>
             </a:r>
-            <a:endParaRPr lang="en-US" sz="850" dirty="0"/>
-          </a:p>
-        </p:txBody>
-      </p:sp>
-      <p:sp>
-        <p:nvSpPr>
-          <p:cNvPr id="12" name="Text 10"/>
-          <p:cNvSpPr/>
-          <p:nvPr/>
-        </p:nvSpPr>
-        <p:spPr>
-          <a:xfrm>
-            <a:off x="896112" y="2990088"/>
+            <a:endParaRPr lang="en-US" sz="820" dirty="0"/>
+          </a:p>
+        </p:txBody>
+      </p:sp>
+      <p:sp>
+        <p:nvSpPr>
+          <p:cNvPr id="13" name="Text 11"/>
+          <p:cNvSpPr/>
+          <p:nvPr/>
+        </p:nvSpPr>
+        <p:spPr>
+          <a:xfrm>
+            <a:off x="896112" y="2971800"/>
             <a:ext cx="7132320" cy="2148840"/>
           </a:xfrm>
           <a:prstGeom prst="rect">
@@ -6649,7 +6832,7 @@
               <a:buNone/>
             </a:pPr>
             <a:r>
-              <a:rPr lang="en-US" sz="1800" dirty="0">
+              <a:rPr lang="en-US" sz="1700" dirty="0">
                 <a:solidFill>
                   <a:srgbClr val="18212B"/>
                 </a:solidFill>
@@ -6659,14 +6842,14 @@
               </a:rPr>
               <a:t>def on_click() -&gt; None:</a:t>
             </a:r>
-            <a:endParaRPr lang="en-US" sz="1800" dirty="0"/>
-          </a:p>
-          <a:p>
-            <a:pPr algn="l" indent="0" marL="0">
-              <a:buNone/>
-            </a:pPr>
-            <a:r>
-              <a:rPr lang="en-US" sz="1800" dirty="0">
+            <a:endParaRPr lang="en-US" sz="1700" dirty="0"/>
+          </a:p>
+          <a:p>
+            <a:pPr algn="l" indent="0" marL="0">
+              <a:buNone/>
+            </a:pPr>
+            <a:r>
+              <a:rPr lang="en-US" sz="1700" dirty="0">
                 <a:solidFill>
                   <a:srgbClr val="18212B"/>
                 </a:solidFill>
@@ -6676,14 +6859,14 @@
               </a:rPr>
               <a:t>    time.sleep(5)</a:t>
             </a:r>
-            <a:endParaRPr lang="en-US" sz="1800" dirty="0"/>
-          </a:p>
-          <a:p>
-            <a:pPr algn="l" indent="0" marL="0">
-              <a:buNone/>
-            </a:pPr>
-            <a:r>
-              <a:rPr lang="en-US" sz="1800" dirty="0">
+            <a:endParaRPr lang="en-US" sz="1700" dirty="0"/>
+          </a:p>
+          <a:p>
+            <a:pPr algn="l" indent="0" marL="0">
+              <a:buNone/>
+            </a:pPr>
+            <a:r>
+              <a:rPr lang="en-US" sz="1700" dirty="0">
                 <a:solidFill>
                   <a:srgbClr val="18212B"/>
                 </a:solidFill>
@@ -6693,20 +6876,20 @@
               </a:rPr>
               <a:t>    status.config(text="Done")</a:t>
             </a:r>
-            <a:endParaRPr lang="en-US" sz="1800" dirty="0"/>
-          </a:p>
-        </p:txBody>
-      </p:sp>
-      <p:sp>
-        <p:nvSpPr>
-          <p:cNvPr id="13" name="Text 11"/>
-          <p:cNvSpPr/>
-          <p:nvPr/>
-        </p:nvSpPr>
-        <p:spPr>
-          <a:xfrm>
-            <a:off x="8915400" y="2880360"/>
-            <a:ext cx="2011680" cy="1234440"/>
+            <a:endParaRPr lang="en-US" sz="1700" dirty="0"/>
+          </a:p>
+        </p:txBody>
+      </p:sp>
+      <p:sp>
+        <p:nvSpPr>
+          <p:cNvPr id="14" name="Text 12"/>
+          <p:cNvSpPr/>
+          <p:nvPr/>
+        </p:nvSpPr>
+        <p:spPr>
+          <a:xfrm>
+            <a:off x="8915400" y="2834640"/>
+            <a:ext cx="2011680" cy="1298448"/>
           </a:xfrm>
           <a:prstGeom prst="rect">
             <a:avLst/>
@@ -6724,7 +6907,7 @@
               <a:buNone/>
             </a:pPr>
             <a:r>
-              <a:rPr lang="en-US" sz="1700" dirty="0">
+              <a:rPr lang="en-US" sz="1650" dirty="0">
                 <a:solidFill>
                   <a:srgbClr val="5E6B78"/>
                 </a:solidFill>
@@ -6734,7 +6917,7 @@
               </a:rPr>
               <a:t>Justify your answer first. Then run the code.</a:t>
             </a:r>
-            <a:endParaRPr lang="en-US" sz="1700" dirty="0"/>
+            <a:endParaRPr lang="en-US" sz="1650" dirty="0"/>
           </a:p>
         </p:txBody>
       </p:sp>
@@ -6779,7 +6962,7 @@
         <p:spPr>
           <a:xfrm>
             <a:off x="0" y="0"/>
-            <a:ext cx="12191695" cy="155448"/>
+            <a:ext cx="12191695" cy="109728"/>
           </a:xfrm>
           <a:prstGeom prst="rect">
             <a:avLst/>
@@ -6803,7 +6986,7 @@
         </p:nvSpPr>
         <p:spPr>
           <a:xfrm>
-            <a:off x="566928" y="320040"/>
+            <a:off x="566928" y="310896"/>
             <a:ext cx="4663440" cy="182880"/>
           </a:xfrm>
           <a:prstGeom prst="rect">
@@ -6822,7 +7005,7 @@
               <a:buNone/>
             </a:pPr>
             <a:r>
-              <a:rPr lang="en-US" sz="900" b="1" spc="80" kern="0" dirty="0">
+              <a:rPr lang="en-US" sz="880" b="1" spc="50" kern="0" dirty="0">
                 <a:solidFill>
                   <a:srgbClr val="1877B9"/>
                 </a:solidFill>
@@ -6832,7 +7015,7 @@
               </a:rPr>
               <a:t>PROGRAMMING IN PYTHON</a:t>
             </a:r>
-            <a:endParaRPr lang="en-US" sz="900" dirty="0"/>
+            <a:endParaRPr lang="en-US" sz="880" dirty="0"/>
           </a:p>
         </p:txBody>
       </p:sp>
@@ -6844,7 +7027,7 @@
         </p:nvSpPr>
         <p:spPr>
           <a:xfrm>
-            <a:off x="9829800" y="320040"/>
+            <a:off x="9829800" y="310896"/>
             <a:ext cx="1783080" cy="182880"/>
           </a:xfrm>
           <a:prstGeom prst="rect">
@@ -6863,7 +7046,7 @@
               <a:buNone/>
             </a:pPr>
             <a:r>
-              <a:rPr lang="en-US" sz="900" b="1" dirty="0">
+              <a:rPr lang="en-US" sz="880" b="1" dirty="0">
                 <a:solidFill>
                   <a:srgbClr val="5E6B78"/>
                 </a:solidFill>
@@ -6873,7 +7056,7 @@
               </a:rPr>
               <a:t>LECTURE 03</a:t>
             </a:r>
-            <a:endParaRPr lang="en-US" sz="900" dirty="0"/>
+            <a:endParaRPr lang="en-US" sz="880" dirty="0"/>
           </a:p>
         </p:txBody>
       </p:sp>
@@ -6931,8 +7114,8 @@
         </p:nvSpPr>
         <p:spPr>
           <a:xfrm>
-            <a:off x="11109960" y="6501384"/>
-            <a:ext cx="457200" cy="146304"/>
+            <a:off x="10771632" y="6501384"/>
+            <a:ext cx="804672" cy="146304"/>
           </a:xfrm>
           <a:prstGeom prst="rect">
             <a:avLst/>
@@ -6950,7 +7133,7 @@
               <a:buNone/>
             </a:pPr>
             <a:r>
-              <a:rPr lang="en-US" sz="800" dirty="0">
+              <a:rPr lang="en-US" sz="780" dirty="0">
                 <a:solidFill>
                   <a:srgbClr val="5E6B78"/>
                 </a:solidFill>
@@ -6958,9 +7141,9 @@
                 <a:ea typeface="Consolas" pitchFamily="34" charset="-122"/>
                 <a:cs typeface="Consolas" pitchFamily="34" charset="-120"/>
               </a:rPr>
-              <a:t>17</a:t>
-            </a:r>
-            <a:endParaRPr lang="en-US" sz="800" dirty="0"/>
+              <a:t>17 / 24</a:t>
+            </a:r>
+            <a:endParaRPr lang="en-US" sz="780" dirty="0"/>
           </a:p>
         </p:txBody>
       </p:sp>
@@ -6972,8 +7155,8 @@
         </p:nvSpPr>
         <p:spPr>
           <a:xfrm>
-            <a:off x="658368" y="932688"/>
-            <a:ext cx="10789920" cy="713232"/>
+            <a:off x="658368" y="914400"/>
+            <a:ext cx="10881360" cy="713232"/>
           </a:xfrm>
           <a:prstGeom prst="rect">
             <a:avLst/>
@@ -6991,17 +7174,17 @@
               <a:buNone/>
             </a:pPr>
             <a:r>
-              <a:rPr lang="en-US" sz="2900" b="1" dirty="0">
+              <a:rPr lang="en-US" sz="2850" b="1" dirty="0">
                 <a:solidFill>
                   <a:srgbClr val="16324F"/>
                 </a:solidFill>
-                <a:latin typeface="Aptos" pitchFamily="34" charset="0"/>
-                <a:ea typeface="Aptos" pitchFamily="34" charset="-122"/>
-                <a:cs typeface="Aptos" pitchFamily="34" charset="-120"/>
+                <a:latin typeface="Aptos Display" pitchFamily="34" charset="0"/>
+                <a:ea typeface="Aptos Display" pitchFamily="34" charset="-122"/>
+                <a:cs typeface="Aptos Display" pitchFamily="34" charset="-120"/>
               </a:rPr>
               <a:t>A blocking callback stops the event loop</a:t>
             </a:r>
-            <a:endParaRPr lang="en-US" sz="2900" dirty="0"/>
+            <a:endParaRPr lang="en-US" sz="2850" dirty="0"/>
           </a:p>
         </p:txBody>
       </p:sp>
@@ -7013,13 +7196,11 @@
         </p:nvSpPr>
         <p:spPr>
           <a:xfrm>
-            <a:off x="731520" y="2834640"/>
-            <a:ext cx="2450592" cy="1042416"/>
-          </a:xfrm>
-          <a:prstGeom prst="roundRect">
-            <a:avLst>
-              <a:gd name="adj" fmla="val 4386"/>
-            </a:avLst>
+            <a:off x="694944" y="2834640"/>
+            <a:ext cx="2400300" cy="1042416"/>
+          </a:xfrm>
+          <a:prstGeom prst="rect">
+            <a:avLst/>
           </a:prstGeom>
           <a:solidFill>
             <a:srgbClr val="F3F6F8"/>
@@ -7040,8 +7221,8 @@
         </p:nvSpPr>
         <p:spPr>
           <a:xfrm>
-            <a:off x="877824" y="3063240"/>
-            <a:ext cx="2157984" cy="548640"/>
+            <a:off x="804672" y="3063240"/>
+            <a:ext cx="2180844" cy="548640"/>
           </a:xfrm>
           <a:prstGeom prst="rect">
             <a:avLst/>
@@ -7081,7 +7262,7 @@
         </p:nvSpPr>
         <p:spPr>
           <a:xfrm>
-            <a:off x="3319272" y="3209544"/>
+            <a:off x="3232404" y="3209544"/>
             <a:ext cx="182880" cy="292608"/>
           </a:xfrm>
           <a:prstGeom prst="chevron">
@@ -7106,13 +7287,11 @@
         </p:nvSpPr>
         <p:spPr>
           <a:xfrm>
-            <a:off x="3593592" y="2834640"/>
-            <a:ext cx="2450592" cy="1042416"/>
-          </a:xfrm>
-          <a:prstGeom prst="roundRect">
-            <a:avLst>
-              <a:gd name="adj" fmla="val 4386"/>
-            </a:avLst>
+            <a:off x="3506724" y="2834640"/>
+            <a:ext cx="2400300" cy="1042416"/>
+          </a:xfrm>
+          <a:prstGeom prst="rect">
+            <a:avLst/>
           </a:prstGeom>
           <a:solidFill>
             <a:srgbClr val="EAF3F7"/>
@@ -7133,8 +7312,8 @@
         </p:nvSpPr>
         <p:spPr>
           <a:xfrm>
-            <a:off x="3739896" y="3063240"/>
-            <a:ext cx="2157984" cy="548640"/>
+            <a:off x="3616452" y="3063240"/>
+            <a:ext cx="2180844" cy="548640"/>
           </a:xfrm>
           <a:prstGeom prst="rect">
             <a:avLst/>
@@ -7174,7 +7353,7 @@
         </p:nvSpPr>
         <p:spPr>
           <a:xfrm>
-            <a:off x="6181344" y="3209544"/>
+            <a:off x="6044184" y="3209544"/>
             <a:ext cx="182880" cy="292608"/>
           </a:xfrm>
           <a:prstGeom prst="chevron">
@@ -7199,13 +7378,11 @@
         </p:nvSpPr>
         <p:spPr>
           <a:xfrm>
-            <a:off x="6455664" y="2834640"/>
-            <a:ext cx="2450592" cy="1042416"/>
-          </a:xfrm>
-          <a:prstGeom prst="roundRect">
-            <a:avLst>
-              <a:gd name="adj" fmla="val 4386"/>
-            </a:avLst>
+            <a:off x="6318504" y="2834640"/>
+            <a:ext cx="2400300" cy="1042416"/>
+          </a:xfrm>
+          <a:prstGeom prst="rect">
+            <a:avLst/>
           </a:prstGeom>
           <a:solidFill>
             <a:srgbClr val="F3F6F8"/>
@@ -7226,8 +7403,8 @@
         </p:nvSpPr>
         <p:spPr>
           <a:xfrm>
-            <a:off x="6601968" y="3063240"/>
-            <a:ext cx="2157984" cy="548640"/>
+            <a:off x="6428232" y="3063240"/>
+            <a:ext cx="2180844" cy="548640"/>
           </a:xfrm>
           <a:prstGeom prst="rect">
             <a:avLst/>
@@ -7267,7 +7444,7 @@
         </p:nvSpPr>
         <p:spPr>
           <a:xfrm>
-            <a:off x="9043416" y="3209544"/>
+            <a:off x="8855964" y="3209544"/>
             <a:ext cx="182880" cy="292608"/>
           </a:xfrm>
           <a:prstGeom prst="chevron">
@@ -7292,13 +7469,11 @@
         </p:nvSpPr>
         <p:spPr>
           <a:xfrm>
-            <a:off x="9317736" y="2834640"/>
-            <a:ext cx="2450592" cy="1042416"/>
-          </a:xfrm>
-          <a:prstGeom prst="roundRect">
-            <a:avLst>
-              <a:gd name="adj" fmla="val 4386"/>
-            </a:avLst>
+            <a:off x="9130284" y="2834640"/>
+            <a:ext cx="2400300" cy="1042416"/>
+          </a:xfrm>
+          <a:prstGeom prst="rect">
+            <a:avLst/>
           </a:prstGeom>
           <a:solidFill>
             <a:srgbClr val="EAF3F7"/>
@@ -7319,8 +7494,8 @@
         </p:nvSpPr>
         <p:spPr>
           <a:xfrm>
-            <a:off x="9464040" y="3063240"/>
-            <a:ext cx="2157984" cy="548640"/>
+            <a:off x="9240012" y="3063240"/>
+            <a:ext cx="2180844" cy="548640"/>
           </a:xfrm>
           <a:prstGeom prst="rect">
             <a:avLst/>
@@ -7393,7 +7568,7 @@
         <p:spPr>
           <a:xfrm>
             <a:off x="0" y="0"/>
-            <a:ext cx="12191695" cy="155448"/>
+            <a:ext cx="12191695" cy="109728"/>
           </a:xfrm>
           <a:prstGeom prst="rect">
             <a:avLst/>
@@ -7417,7 +7592,7 @@
         </p:nvSpPr>
         <p:spPr>
           <a:xfrm>
-            <a:off x="566928" y="320040"/>
+            <a:off x="566928" y="310896"/>
             <a:ext cx="4663440" cy="182880"/>
           </a:xfrm>
           <a:prstGeom prst="rect">
@@ -7436,7 +7611,7 @@
               <a:buNone/>
             </a:pPr>
             <a:r>
-              <a:rPr lang="en-US" sz="900" b="1" spc="80" kern="0" dirty="0">
+              <a:rPr lang="en-US" sz="880" b="1" spc="50" kern="0" dirty="0">
                 <a:solidFill>
                   <a:srgbClr val="1877B9"/>
                 </a:solidFill>
@@ -7446,7 +7621,7 @@
               </a:rPr>
               <a:t>PROGRAMMING IN PYTHON</a:t>
             </a:r>
-            <a:endParaRPr lang="en-US" sz="900" dirty="0"/>
+            <a:endParaRPr lang="en-US" sz="880" dirty="0"/>
           </a:p>
         </p:txBody>
       </p:sp>
@@ -7458,7 +7633,7 @@
         </p:nvSpPr>
         <p:spPr>
           <a:xfrm>
-            <a:off x="9829800" y="320040"/>
+            <a:off x="9829800" y="310896"/>
             <a:ext cx="1783080" cy="182880"/>
           </a:xfrm>
           <a:prstGeom prst="rect">
@@ -7477,7 +7652,7 @@
               <a:buNone/>
             </a:pPr>
             <a:r>
-              <a:rPr lang="en-US" sz="900" b="1" dirty="0">
+              <a:rPr lang="en-US" sz="880" b="1" dirty="0">
                 <a:solidFill>
                   <a:srgbClr val="5E6B78"/>
                 </a:solidFill>
@@ -7487,7 +7662,7 @@
               </a:rPr>
               <a:t>LECTURE 03</a:t>
             </a:r>
-            <a:endParaRPr lang="en-US" sz="900" dirty="0"/>
+            <a:endParaRPr lang="en-US" sz="880" dirty="0"/>
           </a:p>
         </p:txBody>
       </p:sp>
@@ -7545,8 +7720,8 @@
         </p:nvSpPr>
         <p:spPr>
           <a:xfrm>
-            <a:off x="11109960" y="6501384"/>
-            <a:ext cx="457200" cy="146304"/>
+            <a:off x="10771632" y="6501384"/>
+            <a:ext cx="804672" cy="146304"/>
           </a:xfrm>
           <a:prstGeom prst="rect">
             <a:avLst/>
@@ -7564,7 +7739,7 @@
               <a:buNone/>
             </a:pPr>
             <a:r>
-              <a:rPr lang="en-US" sz="800" dirty="0">
+              <a:rPr lang="en-US" sz="780" dirty="0">
                 <a:solidFill>
                   <a:srgbClr val="5E6B78"/>
                 </a:solidFill>
@@ -7572,9 +7747,9 @@
                 <a:ea typeface="Consolas" pitchFamily="34" charset="-122"/>
                 <a:cs typeface="Consolas" pitchFamily="34" charset="-120"/>
               </a:rPr>
-              <a:t>18</a:t>
-            </a:r>
-            <a:endParaRPr lang="en-US" sz="800" dirty="0"/>
+              <a:t>18 / 24</a:t>
+            </a:r>
+            <a:endParaRPr lang="en-US" sz="780" dirty="0"/>
           </a:p>
         </p:txBody>
       </p:sp>
@@ -7586,8 +7761,8 @@
         </p:nvSpPr>
         <p:spPr>
           <a:xfrm>
-            <a:off x="658368" y="932688"/>
-            <a:ext cx="10789920" cy="713232"/>
+            <a:off x="658368" y="914400"/>
+            <a:ext cx="10881360" cy="713232"/>
           </a:xfrm>
           <a:prstGeom prst="rect">
             <a:avLst/>
@@ -7605,17 +7780,17 @@
               <a:buNone/>
             </a:pPr>
             <a:r>
-              <a:rPr lang="en-US" sz="2900" b="1" dirty="0">
+              <a:rPr lang="en-US" sz="2850" b="1" dirty="0">
                 <a:solidFill>
                   <a:srgbClr val="16324F"/>
                 </a:solidFill>
-                <a:latin typeface="Aptos" pitchFamily="34" charset="0"/>
-                <a:ea typeface="Aptos" pitchFamily="34" charset="-122"/>
-                <a:cs typeface="Aptos" pitchFamily="34" charset="-120"/>
+                <a:latin typeface="Aptos Display" pitchFamily="34" charset="0"/>
+                <a:ea typeface="Aptos Display" pitchFamily="34" charset="-122"/>
+                <a:cs typeface="Aptos Display" pitchFamily="34" charset="-120"/>
               </a:rPr>
               <a:t>after schedules the next step</a:t>
             </a:r>
-            <a:endParaRPr lang="en-US" sz="2900" dirty="0"/>
+            <a:endParaRPr lang="en-US" sz="2850" dirty="0"/>
           </a:p>
         </p:txBody>
       </p:sp>
@@ -7628,19 +7803,17 @@
         <p:spPr>
           <a:xfrm>
             <a:off x="658368" y="1828800"/>
-            <a:ext cx="6812280" cy="4069080"/>
-          </a:xfrm>
-          <a:prstGeom prst="roundRect">
-            <a:avLst>
-              <a:gd name="adj" fmla="val 1348"/>
-            </a:avLst>
+            <a:ext cx="6903720" cy="4069080"/>
+          </a:xfrm>
+          <a:prstGeom prst="rect">
+            <a:avLst/>
           </a:prstGeom>
           <a:solidFill>
             <a:srgbClr val="17212B"/>
           </a:solidFill>
           <a:ln w="12700">
             <a:solidFill>
-              <a:srgbClr val="17212B"/>
+              <a:srgbClr val="243242"/>
             </a:solidFill>
             <a:prstDash val="solid"/>
           </a:ln>
@@ -7648,14 +7821,39 @@
       </p:sp>
       <p:sp>
         <p:nvSpPr>
-          <p:cNvPr id="10" name="Text 8"/>
-          <p:cNvSpPr/>
-          <p:nvPr/>
-        </p:nvSpPr>
-        <p:spPr>
-          <a:xfrm>
-            <a:off x="868680" y="2029968"/>
-            <a:ext cx="6309360" cy="182880"/>
+          <p:cNvPr id="10" name="Shape 8"/>
+          <p:cNvSpPr/>
+          <p:nvPr/>
+        </p:nvSpPr>
+        <p:spPr>
+          <a:xfrm>
+            <a:off x="658368" y="1828800"/>
+            <a:ext cx="6903720" cy="347472"/>
+          </a:xfrm>
+          <a:prstGeom prst="rect">
+            <a:avLst/>
+          </a:prstGeom>
+          <a:solidFill>
+            <a:srgbClr val="223044"/>
+          </a:solidFill>
+          <a:ln w="12700">
+            <a:solidFill>
+              <a:srgbClr val="223044"/>
+            </a:solidFill>
+            <a:prstDash val="solid"/>
+          </a:ln>
+        </p:spPr>
+      </p:sp>
+      <p:sp>
+        <p:nvSpPr>
+          <p:cNvPr id="11" name="Text 9"/>
+          <p:cNvSpPr/>
+          <p:nvPr/>
+        </p:nvSpPr>
+        <p:spPr>
+          <a:xfrm>
+            <a:off x="868680" y="1947672"/>
+            <a:ext cx="6309360" cy="146304"/>
           </a:xfrm>
           <a:prstGeom prst="rect">
             <a:avLst/>
@@ -7673,7 +7871,7 @@
               <a:buNone/>
             </a:pPr>
             <a:r>
-              <a:rPr lang="en-US" sz="850" b="1" spc="70" kern="0" dirty="0">
+              <a:rPr lang="en-US" sz="820" b="1" spc="35" kern="0" dirty="0">
                 <a:solidFill>
                   <a:srgbClr val="8FD3FF"/>
                 </a:solidFill>
@@ -7683,20 +7881,20 @@
               </a:rPr>
               <a:t>python</a:t>
             </a:r>
-            <a:endParaRPr lang="en-US" sz="850" dirty="0"/>
-          </a:p>
-        </p:txBody>
-      </p:sp>
-      <p:sp>
-        <p:nvSpPr>
-          <p:cNvPr id="11" name="Text 9"/>
-          <p:cNvSpPr/>
-          <p:nvPr/>
-        </p:nvSpPr>
-        <p:spPr>
-          <a:xfrm>
-            <a:off x="877824" y="2395728"/>
-            <a:ext cx="6327648" cy="3246120"/>
+            <a:endParaRPr lang="en-US" sz="820" dirty="0"/>
+          </a:p>
+        </p:txBody>
+      </p:sp>
+      <p:sp>
+        <p:nvSpPr>
+          <p:cNvPr id="12" name="Text 10"/>
+          <p:cNvSpPr/>
+          <p:nvPr/>
+        </p:nvSpPr>
+        <p:spPr>
+          <a:xfrm>
+            <a:off x="877824" y="2359152"/>
+            <a:ext cx="6382512" cy="3246120"/>
           </a:xfrm>
           <a:prstGeom prst="rect">
             <a:avLst/>
@@ -7714,7 +7912,7 @@
               <a:buNone/>
             </a:pPr>
             <a:r>
-              <a:rPr lang="en-US" sz="1650" dirty="0">
+              <a:rPr lang="en-US" sz="1600" dirty="0">
                 <a:solidFill>
                   <a:srgbClr val="F4F7FA"/>
                 </a:solidFill>
@@ -7724,20 +7922,20 @@
               </a:rPr>
               <a:t>from datetime import datetime</a:t>
             </a:r>
-            <a:endParaRPr lang="en-US" sz="1650" dirty="0"/>
-          </a:p>
-          <a:p>
-            <a:pPr algn="l" indent="0" marL="0">
-              <a:buNone/>
-            </a:pPr>
-            <a:endParaRPr lang="en-US" sz="1650" dirty="0"/>
-          </a:p>
-          <a:p>
-            <a:pPr algn="l" indent="0" marL="0">
-              <a:buNone/>
-            </a:pPr>
-            <a:r>
-              <a:rPr lang="en-US" sz="1650" dirty="0">
+            <a:endParaRPr lang="en-US" sz="1600" dirty="0"/>
+          </a:p>
+          <a:p>
+            <a:pPr algn="l" indent="0" marL="0">
+              <a:buNone/>
+            </a:pPr>
+            <a:endParaRPr lang="en-US" sz="1600" dirty="0"/>
+          </a:p>
+          <a:p>
+            <a:pPr algn="l" indent="0" marL="0">
+              <a:buNone/>
+            </a:pPr>
+            <a:r>
+              <a:rPr lang="en-US" sz="1600" dirty="0">
                 <a:solidFill>
                   <a:srgbClr val="F4F7FA"/>
                 </a:solidFill>
@@ -7747,14 +7945,14 @@
               </a:rPr>
               <a:t>def update_clock() -&gt; None:</a:t>
             </a:r>
-            <a:endParaRPr lang="en-US" sz="1650" dirty="0"/>
-          </a:p>
-          <a:p>
-            <a:pPr algn="l" indent="0" marL="0">
-              <a:buNone/>
-            </a:pPr>
-            <a:r>
-              <a:rPr lang="en-US" sz="1650" dirty="0">
+            <a:endParaRPr lang="en-US" sz="1600" dirty="0"/>
+          </a:p>
+          <a:p>
+            <a:pPr algn="l" indent="0" marL="0">
+              <a:buNone/>
+            </a:pPr>
+            <a:r>
+              <a:rPr lang="en-US" sz="1600" dirty="0">
                 <a:solidFill>
                   <a:srgbClr val="F4F7FA"/>
                 </a:solidFill>
@@ -7764,14 +7962,14 @@
               </a:rPr>
               <a:t>    status.config(text=datetime.now().strftime("%H:%M:%S"))</a:t>
             </a:r>
-            <a:endParaRPr lang="en-US" sz="1650" dirty="0"/>
-          </a:p>
-          <a:p>
-            <a:pPr algn="l" indent="0" marL="0">
-              <a:buNone/>
-            </a:pPr>
-            <a:r>
-              <a:rPr lang="en-US" sz="1650" dirty="0">
+            <a:endParaRPr lang="en-US" sz="1600" dirty="0"/>
+          </a:p>
+          <a:p>
+            <a:pPr algn="l" indent="0" marL="0">
+              <a:buNone/>
+            </a:pPr>
+            <a:r>
+              <a:rPr lang="en-US" sz="1600" dirty="0">
                 <a:solidFill>
                   <a:srgbClr val="F4F7FA"/>
                 </a:solidFill>
@@ -7781,20 +7979,20 @@
               </a:rPr>
               <a:t>    root.after(1000, update_clock)</a:t>
             </a:r>
-            <a:endParaRPr lang="en-US" sz="1650" dirty="0"/>
-          </a:p>
-          <a:p>
-            <a:pPr algn="l" indent="0" marL="0">
-              <a:buNone/>
-            </a:pPr>
-            <a:endParaRPr lang="en-US" sz="1650" dirty="0"/>
-          </a:p>
-          <a:p>
-            <a:pPr algn="l" indent="0" marL="0">
-              <a:buNone/>
-            </a:pPr>
-            <a:r>
-              <a:rPr lang="en-US" sz="1650" dirty="0">
+            <a:endParaRPr lang="en-US" sz="1600" dirty="0"/>
+          </a:p>
+          <a:p>
+            <a:pPr algn="l" indent="0" marL="0">
+              <a:buNone/>
+            </a:pPr>
+            <a:endParaRPr lang="en-US" sz="1600" dirty="0"/>
+          </a:p>
+          <a:p>
+            <a:pPr algn="l" indent="0" marL="0">
+              <a:buNone/>
+            </a:pPr>
+            <a:r>
+              <a:rPr lang="en-US" sz="1600" dirty="0">
                 <a:solidFill>
                   <a:srgbClr val="F4F7FA"/>
                 </a:solidFill>
@@ -7804,20 +8002,20 @@
               </a:rPr>
               <a:t>update_clock()</a:t>
             </a:r>
-            <a:endParaRPr lang="en-US" sz="1650" dirty="0"/>
-          </a:p>
-        </p:txBody>
-      </p:sp>
-      <p:sp>
-        <p:nvSpPr>
-          <p:cNvPr id="12" name="Shape 10"/>
-          <p:cNvSpPr/>
-          <p:nvPr/>
-        </p:nvSpPr>
-        <p:spPr>
-          <a:xfrm>
-            <a:off x="7909560" y="1901952"/>
-            <a:ext cx="0" cy="3566160"/>
+            <a:endParaRPr lang="en-US" sz="1600" dirty="0"/>
+          </a:p>
+        </p:txBody>
+      </p:sp>
+      <p:sp>
+        <p:nvSpPr>
+          <p:cNvPr id="13" name="Shape 11"/>
+          <p:cNvSpPr/>
+          <p:nvPr/>
+        </p:nvSpPr>
+        <p:spPr>
+          <a:xfrm>
+            <a:off x="7936992" y="1883664"/>
+            <a:ext cx="0" cy="3639312"/>
           </a:xfrm>
           <a:prstGeom prst="line">
             <a:avLst/>
@@ -7833,14 +8031,14 @@
       </p:sp>
       <p:sp>
         <p:nvSpPr>
-          <p:cNvPr id="13" name="Text 11"/>
-          <p:cNvSpPr/>
-          <p:nvPr/>
-        </p:nvSpPr>
-        <p:spPr>
-          <a:xfrm>
-            <a:off x="8229600" y="2130552"/>
-            <a:ext cx="2743200" cy="2468880"/>
+          <p:cNvPr id="14" name="Text 12"/>
+          <p:cNvSpPr/>
+          <p:nvPr/>
+        </p:nvSpPr>
+        <p:spPr>
+          <a:xfrm>
+            <a:off x="8229600" y="2084832"/>
+            <a:ext cx="2816352" cy="2514600"/>
           </a:xfrm>
           <a:prstGeom prst="rect">
             <a:avLst/>
@@ -7858,7 +8056,7 @@
               <a:buNone/>
             </a:pPr>
             <a:r>
-              <a:rPr lang="en-US" sz="1800" dirty="0">
+              <a:rPr lang="en-US" sz="1720" dirty="0">
                 <a:solidFill>
                   <a:srgbClr val="5E6B78"/>
                 </a:solidFill>
@@ -7868,7 +8066,7 @@
               </a:rPr>
               <a:t>after returns control to the event loop. It is not a replacement for CPU-heavy work, but is the correct basis for timed UI updates.</a:t>
             </a:r>
-            <a:endParaRPr lang="en-US" sz="1800" dirty="0"/>
+            <a:endParaRPr lang="en-US" sz="1720" dirty="0"/>
           </a:p>
         </p:txBody>
       </p:sp>
@@ -7913,7 +8111,7 @@
         <p:spPr>
           <a:xfrm>
             <a:off x="0" y="0"/>
-            <a:ext cx="12191695" cy="155448"/>
+            <a:ext cx="12191695" cy="109728"/>
           </a:xfrm>
           <a:prstGeom prst="rect">
             <a:avLst/>
@@ -7937,7 +8135,7 @@
         </p:nvSpPr>
         <p:spPr>
           <a:xfrm>
-            <a:off x="566928" y="320040"/>
+            <a:off x="566928" y="310896"/>
             <a:ext cx="4663440" cy="182880"/>
           </a:xfrm>
           <a:prstGeom prst="rect">
@@ -7956,7 +8154,7 @@
               <a:buNone/>
             </a:pPr>
             <a:r>
-              <a:rPr lang="en-US" sz="900" b="1" spc="80" kern="0" dirty="0">
+              <a:rPr lang="en-US" sz="880" b="1" spc="50" kern="0" dirty="0">
                 <a:solidFill>
                   <a:srgbClr val="1877B9"/>
                 </a:solidFill>
@@ -7966,7 +8164,7 @@
               </a:rPr>
               <a:t>PROGRAMMING IN PYTHON</a:t>
             </a:r>
-            <a:endParaRPr lang="en-US" sz="900" dirty="0"/>
+            <a:endParaRPr lang="en-US" sz="880" dirty="0"/>
           </a:p>
         </p:txBody>
       </p:sp>
@@ -7978,7 +8176,7 @@
         </p:nvSpPr>
         <p:spPr>
           <a:xfrm>
-            <a:off x="9829800" y="320040"/>
+            <a:off x="9829800" y="310896"/>
             <a:ext cx="1783080" cy="182880"/>
           </a:xfrm>
           <a:prstGeom prst="rect">
@@ -7997,7 +8195,7 @@
               <a:buNone/>
             </a:pPr>
             <a:r>
-              <a:rPr lang="en-US" sz="900" b="1" dirty="0">
+              <a:rPr lang="en-US" sz="880" b="1" dirty="0">
                 <a:solidFill>
                   <a:srgbClr val="5E6B78"/>
                 </a:solidFill>
@@ -8007,7 +8205,7 @@
               </a:rPr>
               <a:t>LECTURE 03</a:t>
             </a:r>
-            <a:endParaRPr lang="en-US" sz="900" dirty="0"/>
+            <a:endParaRPr lang="en-US" sz="880" dirty="0"/>
           </a:p>
         </p:txBody>
       </p:sp>
@@ -8065,8 +8263,8 @@
         </p:nvSpPr>
         <p:spPr>
           <a:xfrm>
-            <a:off x="11109960" y="6501384"/>
-            <a:ext cx="457200" cy="146304"/>
+            <a:off x="10771632" y="6501384"/>
+            <a:ext cx="804672" cy="146304"/>
           </a:xfrm>
           <a:prstGeom prst="rect">
             <a:avLst/>
@@ -8084,7 +8282,7 @@
               <a:buNone/>
             </a:pPr>
             <a:r>
-              <a:rPr lang="en-US" sz="800" dirty="0">
+              <a:rPr lang="en-US" sz="780" dirty="0">
                 <a:solidFill>
                   <a:srgbClr val="5E6B78"/>
                 </a:solidFill>
@@ -8092,9 +8290,9 @@
                 <a:ea typeface="Consolas" pitchFamily="34" charset="-122"/>
                 <a:cs typeface="Consolas" pitchFamily="34" charset="-120"/>
               </a:rPr>
-              <a:t>19</a:t>
-            </a:r>
-            <a:endParaRPr lang="en-US" sz="800" dirty="0"/>
+              <a:t>19 / 24</a:t>
+            </a:r>
+            <a:endParaRPr lang="en-US" sz="780" dirty="0"/>
           </a:p>
         </p:txBody>
       </p:sp>
@@ -8106,8 +8304,8 @@
         </p:nvSpPr>
         <p:spPr>
           <a:xfrm>
-            <a:off x="658368" y="932688"/>
-            <a:ext cx="10789920" cy="713232"/>
+            <a:off x="658368" y="914400"/>
+            <a:ext cx="10881360" cy="713232"/>
           </a:xfrm>
           <a:prstGeom prst="rect">
             <a:avLst/>
@@ -8125,49 +8323,67 @@
               <a:buNone/>
             </a:pPr>
             <a:r>
-              <a:rPr lang="en-US" sz="2900" b="1" dirty="0">
+              <a:rPr lang="en-US" sz="2850" b="1" dirty="0">
                 <a:solidFill>
                   <a:srgbClr val="16324F"/>
+                </a:solidFill>
+                <a:latin typeface="Aptos Display" pitchFamily="34" charset="0"/>
+                <a:ea typeface="Aptos Display" pitchFamily="34" charset="-122"/>
+                <a:cs typeface="Aptos Display" pitchFamily="34" charset="-120"/>
+              </a:rPr>
+              <a:t>Entry is short input, Text is a document</a:t>
+            </a:r>
+            <a:endParaRPr lang="en-US" sz="2850" dirty="0"/>
+          </a:p>
+        </p:txBody>
+      </p:sp>
+      <p:sp>
+        <p:nvSpPr>
+          <p:cNvPr id="9" name="Text 7"/>
+          <p:cNvSpPr/>
+          <p:nvPr/>
+        </p:nvSpPr>
+        <p:spPr>
+          <a:xfrm>
+            <a:off x="749808" y="1920240"/>
+            <a:ext cx="4160520" cy="3886200"/>
+          </a:xfrm>
+          <a:prstGeom prst="rect">
+            <a:avLst/>
+          </a:prstGeom>
+          <a:noFill/>
+          <a:ln/>
+        </p:spPr>
+        <p:txBody>
+          <a:bodyPr wrap="square" lIns="508" tIns="508" rIns="508" bIns="508" rtlCol="0" anchor="t">
+            <a:normAutofit/>
+          </a:bodyPr>
+          <a:lstStyle/>
+          <a:p>
+            <a:pPr marL="228600" indent="-228600">
+              <a:buSzPct val="100000"/>
+              <a:buChar char="•"/>
+            </a:pPr>
+            <a:r>
+              <a:rPr lang="en-US" sz="1650" dirty="0">
+                <a:solidFill>
+                  <a:srgbClr val="18212B"/>
                 </a:solidFill>
                 <a:latin typeface="Aptos" pitchFamily="34" charset="0"/>
                 <a:ea typeface="Aptos" pitchFamily="34" charset="-122"/>
                 <a:cs typeface="Aptos" pitchFamily="34" charset="-120"/>
               </a:rPr>
-              <a:t>Entry is short input, Text is a document</a:t>
-            </a:r>
-            <a:endParaRPr lang="en-US" sz="2900" dirty="0"/>
-          </a:p>
-        </p:txBody>
-      </p:sp>
-      <p:sp>
-        <p:nvSpPr>
-          <p:cNvPr id="9" name="Text 7"/>
-          <p:cNvSpPr/>
-          <p:nvPr/>
-        </p:nvSpPr>
-        <p:spPr>
-          <a:xfrm>
-            <a:off x="749808" y="1920240"/>
-            <a:ext cx="4160520" cy="3886200"/>
-          </a:xfrm>
-          <a:prstGeom prst="rect">
-            <a:avLst/>
-          </a:prstGeom>
-          <a:noFill/>
-          <a:ln/>
-        </p:spPr>
-        <p:txBody>
-          <a:bodyPr wrap="square" lIns="508" tIns="508" rIns="508" bIns="508" rtlCol="0" anchor="t">
-            <a:normAutofit/>
-          </a:bodyPr>
-          <a:lstStyle/>
+              <a:t>Read an Entry through get()</a:t>
+            </a:r>
+            <a:endParaRPr lang="en-US" sz="1650" dirty="0"/>
+          </a:p>
           <a:p>
             <a:pPr marL="228600" indent="-228600">
               <a:buSzPct val="100000"/>
               <a:buChar char="•"/>
             </a:pPr>
             <a:r>
-              <a:rPr lang="en-US" sz="1700" dirty="0">
+              <a:rPr lang="en-US" sz="1650" dirty="0">
                 <a:solidFill>
                   <a:srgbClr val="18212B"/>
                 </a:solidFill>
@@ -8175,9 +8391,9 @@
                 <a:ea typeface="Aptos" pitchFamily="34" charset="-122"/>
                 <a:cs typeface="Aptos" pitchFamily="34" charset="-120"/>
               </a:rPr>
-              <a:t>Read an Entry through get()</a:t>
-            </a:r>
-            <a:endParaRPr lang="en-US" sz="1700" dirty="0"/>
+              <a:t>Text needs a range from 1.0 to end</a:t>
+            </a:r>
+            <a:endParaRPr lang="en-US" sz="1650" dirty="0"/>
           </a:p>
           <a:p>
             <a:pPr marL="228600" indent="-228600">
@@ -8185,7 +8401,7 @@
               <a:buChar char="•"/>
             </a:pPr>
             <a:r>
-              <a:rPr lang="en-US" sz="1700" dirty="0">
+              <a:rPr lang="en-US" sz="1650" dirty="0">
                 <a:solidFill>
                   <a:srgbClr val="18212B"/>
                 </a:solidFill>
@@ -8193,27 +8409,9 @@
                 <a:ea typeface="Aptos" pitchFamily="34" charset="-122"/>
                 <a:cs typeface="Aptos" pitchFamily="34" charset="-120"/>
               </a:rPr>
-              <a:t>Text needs a range from 1.0 to end</a:t>
-            </a:r>
-            <a:endParaRPr lang="en-US" sz="1700" dirty="0"/>
-          </a:p>
-          <a:p>
-            <a:pPr marL="228600" indent="-228600">
-              <a:buSzPct val="100000"/>
-              <a:buChar char="•"/>
-            </a:pPr>
-            <a:r>
-              <a:rPr lang="en-US" sz="1700" dirty="0">
-                <a:solidFill>
-                  <a:srgbClr val="18212B"/>
-                </a:solidFill>
-                <a:latin typeface="Aptos" pitchFamily="34" charset="0"/>
-                <a:ea typeface="Aptos" pitchFamily="34" charset="-122"/>
-                <a:cs typeface="Aptos" pitchFamily="34" charset="-120"/>
-              </a:rPr>
               <a:t>Text is more natural for a document analyser</a:t>
             </a:r>
-            <a:endParaRPr lang="en-US" sz="1700" dirty="0"/>
+            <a:endParaRPr lang="en-US" sz="1650" dirty="0"/>
           </a:p>
         </p:txBody>
       </p:sp>
@@ -8225,8 +8423,8 @@
         </p:nvSpPr>
         <p:spPr>
           <a:xfrm>
-            <a:off x="5394960" y="1792224"/>
-            <a:ext cx="5943600" cy="4160520"/>
+            <a:off x="5413248" y="1792224"/>
+            <a:ext cx="5925312" cy="4160520"/>
           </a:xfrm>
           <a:prstGeom prst="rect">
             <a:avLst/>
@@ -8236,7 +8434,7 @@
           </a:solidFill>
           <a:ln w="12700">
             <a:solidFill>
-              <a:srgbClr val="17212B"/>
+              <a:srgbClr val="243242"/>
             </a:solidFill>
             <a:prstDash val="solid"/>
           </a:ln>
@@ -8244,14 +8442,39 @@
       </p:sp>
       <p:sp>
         <p:nvSpPr>
-          <p:cNvPr id="11" name="Text 9"/>
-          <p:cNvSpPr/>
-          <p:nvPr/>
-        </p:nvSpPr>
-        <p:spPr>
-          <a:xfrm>
-            <a:off x="5641848" y="1993392"/>
-            <a:ext cx="5394960" cy="182880"/>
+          <p:cNvPr id="11" name="Shape 9"/>
+          <p:cNvSpPr/>
+          <p:nvPr/>
+        </p:nvSpPr>
+        <p:spPr>
+          <a:xfrm>
+            <a:off x="5413248" y="1792224"/>
+            <a:ext cx="5925312" cy="329184"/>
+          </a:xfrm>
+          <a:prstGeom prst="rect">
+            <a:avLst/>
+          </a:prstGeom>
+          <a:solidFill>
+            <a:srgbClr val="223044"/>
+          </a:solidFill>
+          <a:ln w="12700">
+            <a:solidFill>
+              <a:srgbClr val="223044"/>
+            </a:solidFill>
+            <a:prstDash val="solid"/>
+          </a:ln>
+        </p:spPr>
+      </p:sp>
+      <p:sp>
+        <p:nvSpPr>
+          <p:cNvPr id="12" name="Text 10"/>
+          <p:cNvSpPr/>
+          <p:nvPr/>
+        </p:nvSpPr>
+        <p:spPr>
+          <a:xfrm>
+            <a:off x="5641848" y="1901952"/>
+            <a:ext cx="5394960" cy="146304"/>
           </a:xfrm>
           <a:prstGeom prst="rect">
             <a:avLst/>
@@ -8269,7 +8492,7 @@
               <a:buNone/>
             </a:pPr>
             <a:r>
-              <a:rPr lang="en-US" sz="850" b="1" spc="70" kern="0" dirty="0">
+              <a:rPr lang="en-US" sz="810" b="1" spc="35" kern="0" dirty="0">
                 <a:solidFill>
                   <a:srgbClr val="8FD3FF"/>
                 </a:solidFill>
@@ -8279,20 +8502,20 @@
               </a:rPr>
               <a:t>python</a:t>
             </a:r>
-            <a:endParaRPr lang="en-US" sz="850" dirty="0"/>
-          </a:p>
-        </p:txBody>
-      </p:sp>
-      <p:sp>
-        <p:nvSpPr>
-          <p:cNvPr id="12" name="Text 10"/>
-          <p:cNvSpPr/>
-          <p:nvPr/>
-        </p:nvSpPr>
-        <p:spPr>
-          <a:xfrm>
-            <a:off x="5641848" y="2395728"/>
-            <a:ext cx="5330952" cy="3127248"/>
+            <a:endParaRPr lang="en-US" sz="810" dirty="0"/>
+          </a:p>
+        </p:txBody>
+      </p:sp>
+      <p:sp>
+        <p:nvSpPr>
+          <p:cNvPr id="13" name="Text 11"/>
+          <p:cNvSpPr/>
+          <p:nvPr/>
+        </p:nvSpPr>
+        <p:spPr>
+          <a:xfrm>
+            <a:off x="5641848" y="2331720"/>
+            <a:ext cx="5340096" cy="3182112"/>
           </a:xfrm>
           <a:prstGeom prst="rect">
             <a:avLst/>
@@ -8310,7 +8533,7 @@
               <a:buNone/>
             </a:pPr>
             <a:r>
-              <a:rPr lang="en-US" sz="1560" dirty="0">
+              <a:rPr lang="en-US" sz="1520" dirty="0">
                 <a:solidFill>
                   <a:srgbClr val="F4F7FA"/>
                 </a:solidFill>
@@ -8320,14 +8543,14 @@
               </a:rPr>
               <a:t>editor = tk.Text(root, width=58, height=10)</a:t>
             </a:r>
-            <a:endParaRPr lang="en-US" sz="1560" dirty="0"/>
-          </a:p>
-          <a:p>
-            <a:pPr algn="l" indent="0" marL="0">
-              <a:buNone/>
-            </a:pPr>
-            <a:r>
-              <a:rPr lang="en-US" sz="1560" dirty="0">
+            <a:endParaRPr lang="en-US" sz="1520" dirty="0"/>
+          </a:p>
+          <a:p>
+            <a:pPr algn="l" indent="0" marL="0">
+              <a:buNone/>
+            </a:pPr>
+            <a:r>
+              <a:rPr lang="en-US" sz="1520" dirty="0">
                 <a:solidFill>
                   <a:srgbClr val="F4F7FA"/>
                 </a:solidFill>
@@ -8337,20 +8560,20 @@
               </a:rPr>
               <a:t>editor.grid(row=1, column=0)</a:t>
             </a:r>
-            <a:endParaRPr lang="en-US" sz="1560" dirty="0"/>
-          </a:p>
-          <a:p>
-            <a:pPr algn="l" indent="0" marL="0">
-              <a:buNone/>
-            </a:pPr>
-            <a:endParaRPr lang="en-US" sz="1560" dirty="0"/>
-          </a:p>
-          <a:p>
-            <a:pPr algn="l" indent="0" marL="0">
-              <a:buNone/>
-            </a:pPr>
-            <a:r>
-              <a:rPr lang="en-US" sz="1560" dirty="0">
+            <a:endParaRPr lang="en-US" sz="1520" dirty="0"/>
+          </a:p>
+          <a:p>
+            <a:pPr algn="l" indent="0" marL="0">
+              <a:buNone/>
+            </a:pPr>
+            <a:endParaRPr lang="en-US" sz="1520" dirty="0"/>
+          </a:p>
+          <a:p>
+            <a:pPr algn="l" indent="0" marL="0">
+              <a:buNone/>
+            </a:pPr>
+            <a:r>
+              <a:rPr lang="en-US" sz="1520" dirty="0">
                 <a:solidFill>
                   <a:srgbClr val="F4F7FA"/>
                 </a:solidFill>
@@ -8360,14 +8583,14 @@
               </a:rPr>
               <a:t>def analyze_editor() -&gt; None:</a:t>
             </a:r>
-            <a:endParaRPr lang="en-US" sz="1560" dirty="0"/>
-          </a:p>
-          <a:p>
-            <a:pPr algn="l" indent="0" marL="0">
-              <a:buNone/>
-            </a:pPr>
-            <a:r>
-              <a:rPr lang="en-US" sz="1560" dirty="0">
+            <a:endParaRPr lang="en-US" sz="1520" dirty="0"/>
+          </a:p>
+          <a:p>
+            <a:pPr algn="l" indent="0" marL="0">
+              <a:buNone/>
+            </a:pPr>
+            <a:r>
+              <a:rPr lang="en-US" sz="1520" dirty="0">
                 <a:solidFill>
                   <a:srgbClr val="F4F7FA"/>
                 </a:solidFill>
@@ -8377,14 +8600,14 @@
               </a:rPr>
               <a:t>    text = editor.get("1.0", "end-1c")</a:t>
             </a:r>
-            <a:endParaRPr lang="en-US" sz="1560" dirty="0"/>
-          </a:p>
-          <a:p>
-            <a:pPr algn="l" indent="0" marL="0">
-              <a:buNone/>
-            </a:pPr>
-            <a:r>
-              <a:rPr lang="en-US" sz="1560" dirty="0">
+            <a:endParaRPr lang="en-US" sz="1520" dirty="0"/>
+          </a:p>
+          <a:p>
+            <a:pPr algn="l" indent="0" marL="0">
+              <a:buNone/>
+            </a:pPr>
+            <a:r>
+              <a:rPr lang="en-US" sz="1520" dirty="0">
                 <a:solidFill>
                   <a:srgbClr val="F4F7FA"/>
                 </a:solidFill>
@@ -8394,7 +8617,7 @@
               </a:rPr>
               <a:t>    show_stats(analyze_text(text))</a:t>
             </a:r>
-            <a:endParaRPr lang="en-US" sz="1560" dirty="0"/>
+            <a:endParaRPr lang="en-US" sz="1520" dirty="0"/>
           </a:p>
         </p:txBody>
       </p:sp>
@@ -8439,7 +8662,7 @@
         <p:spPr>
           <a:xfrm>
             <a:off x="0" y="0"/>
-            <a:ext cx="12191695" cy="155448"/>
+            <a:ext cx="12191695" cy="109728"/>
           </a:xfrm>
           <a:prstGeom prst="rect">
             <a:avLst/>
@@ -8463,7 +8686,7 @@
         </p:nvSpPr>
         <p:spPr>
           <a:xfrm>
-            <a:off x="566928" y="320040"/>
+            <a:off x="566928" y="310896"/>
             <a:ext cx="4663440" cy="182880"/>
           </a:xfrm>
           <a:prstGeom prst="rect">
@@ -8482,7 +8705,7 @@
               <a:buNone/>
             </a:pPr>
             <a:r>
-              <a:rPr lang="en-US" sz="900" b="1" spc="80" kern="0" dirty="0">
+              <a:rPr lang="en-US" sz="880" b="1" spc="50" kern="0" dirty="0">
                 <a:solidFill>
                   <a:srgbClr val="1877B9"/>
                 </a:solidFill>
@@ -8492,7 +8715,7 @@
               </a:rPr>
               <a:t>PROGRAMMING IN PYTHON</a:t>
             </a:r>
-            <a:endParaRPr lang="en-US" sz="900" dirty="0"/>
+            <a:endParaRPr lang="en-US" sz="880" dirty="0"/>
           </a:p>
         </p:txBody>
       </p:sp>
@@ -8504,7 +8727,7 @@
         </p:nvSpPr>
         <p:spPr>
           <a:xfrm>
-            <a:off x="9829800" y="320040"/>
+            <a:off x="9829800" y="310896"/>
             <a:ext cx="1783080" cy="182880"/>
           </a:xfrm>
           <a:prstGeom prst="rect">
@@ -8523,7 +8746,7 @@
               <a:buNone/>
             </a:pPr>
             <a:r>
-              <a:rPr lang="en-US" sz="900" b="1" dirty="0">
+              <a:rPr lang="en-US" sz="880" b="1" dirty="0">
                 <a:solidFill>
                   <a:srgbClr val="5E6B78"/>
                 </a:solidFill>
@@ -8533,7 +8756,7 @@
               </a:rPr>
               <a:t>LECTURE 03</a:t>
             </a:r>
-            <a:endParaRPr lang="en-US" sz="900" dirty="0"/>
+            <a:endParaRPr lang="en-US" sz="880" dirty="0"/>
           </a:p>
         </p:txBody>
       </p:sp>
@@ -8591,8 +8814,8 @@
         </p:nvSpPr>
         <p:spPr>
           <a:xfrm>
-            <a:off x="11109960" y="6501384"/>
-            <a:ext cx="457200" cy="146304"/>
+            <a:off x="10771632" y="6501384"/>
+            <a:ext cx="804672" cy="146304"/>
           </a:xfrm>
           <a:prstGeom prst="rect">
             <a:avLst/>
@@ -8610,7 +8833,7 @@
               <a:buNone/>
             </a:pPr>
             <a:r>
-              <a:rPr lang="en-US" sz="800" dirty="0">
+              <a:rPr lang="en-US" sz="780" dirty="0">
                 <a:solidFill>
                   <a:srgbClr val="5E6B78"/>
                 </a:solidFill>
@@ -8618,9 +8841,9 @@
                 <a:ea typeface="Consolas" pitchFamily="34" charset="-122"/>
                 <a:cs typeface="Consolas" pitchFamily="34" charset="-120"/>
               </a:rPr>
-              <a:t>02</a:t>
-            </a:r>
-            <a:endParaRPr lang="en-US" sz="800" dirty="0"/>
+              <a:t>02 / 24</a:t>
+            </a:r>
+            <a:endParaRPr lang="en-US" sz="780" dirty="0"/>
           </a:p>
         </p:txBody>
       </p:sp>
@@ -8632,8 +8855,8 @@
         </p:nvSpPr>
         <p:spPr>
           <a:xfrm>
-            <a:off x="658368" y="932688"/>
-            <a:ext cx="10789920" cy="713232"/>
+            <a:off x="658368" y="914400"/>
+            <a:ext cx="10881360" cy="713232"/>
           </a:xfrm>
           <a:prstGeom prst="rect">
             <a:avLst/>
@@ -8651,17 +8874,17 @@
               <a:buNone/>
             </a:pPr>
             <a:r>
-              <a:rPr lang="en-US" sz="2900" b="1" dirty="0">
+              <a:rPr lang="en-US" sz="2850" b="1" dirty="0">
                 <a:solidFill>
                   <a:srgbClr val="16324F"/>
                 </a:solidFill>
-                <a:latin typeface="Aptos" pitchFamily="34" charset="0"/>
-                <a:ea typeface="Aptos" pitchFamily="34" charset="-122"/>
-                <a:cs typeface="Aptos" pitchFamily="34" charset="-120"/>
+                <a:latin typeface="Aptos Display" pitchFamily="34" charset="0"/>
+                <a:ea typeface="Aptos Display" pitchFamily="34" charset="-122"/>
+                <a:cs typeface="Aptos Display" pitchFamily="34" charset="-120"/>
               </a:rPr>
               <a:t>Two program flow models</a:t>
             </a:r>
-            <a:endParaRPr lang="en-US" sz="2900" dirty="0"/>
+            <a:endParaRPr lang="en-US" sz="2850" dirty="0"/>
           </a:p>
         </p:txBody>
       </p:sp>
@@ -8673,15 +8896,13 @@
         </p:nvSpPr>
         <p:spPr>
           <a:xfrm>
-            <a:off x="713232" y="1874520"/>
-            <a:ext cx="5010912" cy="109728"/>
-          </a:xfrm>
-          <a:prstGeom prst="rect">
-            <a:avLst/>
-          </a:prstGeom>
-          <a:solidFill>
-            <a:srgbClr val="167C80"/>
-          </a:solidFill>
+            <a:off x="713232" y="1883664"/>
+            <a:ext cx="5010912" cy="0"/>
+          </a:xfrm>
+          <a:prstGeom prst="line">
+            <a:avLst/>
+          </a:prstGeom>
+          <a:noFill/>
           <a:ln w="12700">
             <a:solidFill>
               <a:srgbClr val="167C80"/>
@@ -8698,7 +8919,7 @@
         </p:nvSpPr>
         <p:spPr>
           <a:xfrm>
-            <a:off x="713232" y="2212848"/>
+            <a:off x="713232" y="2139696"/>
             <a:ext cx="5010912" cy="365760"/>
           </a:xfrm>
           <a:prstGeom prst="rect">
@@ -8717,7 +8938,7 @@
               <a:buNone/>
             </a:pPr>
             <a:r>
-              <a:rPr lang="en-US" sz="2000" b="1" dirty="0">
+              <a:rPr lang="en-US" sz="1950" b="1" dirty="0">
                 <a:solidFill>
                   <a:srgbClr val="16324F"/>
                 </a:solidFill>
@@ -8727,7 +8948,7 @@
               </a:rPr>
               <a:t>A terminal program</a:t>
             </a:r>
-            <a:endParaRPr lang="en-US" sz="2000" dirty="0"/>
+            <a:endParaRPr lang="en-US" sz="1950" dirty="0"/>
           </a:p>
         </p:txBody>
       </p:sp>
@@ -8739,7 +8960,7 @@
         </p:nvSpPr>
         <p:spPr>
           <a:xfrm>
-            <a:off x="768096" y="2788920"/>
+            <a:off x="749808" y="2688336"/>
             <a:ext cx="4919472" cy="3886200"/>
           </a:xfrm>
           <a:prstGeom prst="rect">
@@ -8759,7 +8980,7 @@
               <a:buChar char="•"/>
             </a:pPr>
             <a:r>
-              <a:rPr lang="en-US" sz="1650" dirty="0">
+              <a:rPr lang="en-US" sz="1620" dirty="0">
                 <a:solidFill>
                   <a:srgbClr val="18212B"/>
                 </a:solidFill>
@@ -8769,7 +8990,7 @@
               </a:rPr>
               <a:t>input()</a:t>
             </a:r>
-            <a:endParaRPr lang="en-US" sz="1650" dirty="0"/>
+            <a:endParaRPr lang="en-US" sz="1620" dirty="0"/>
           </a:p>
           <a:p>
             <a:pPr marL="228600" indent="-228600">
@@ -8777,7 +8998,7 @@
               <a:buChar char="•"/>
             </a:pPr>
             <a:r>
-              <a:rPr lang="en-US" sz="1650" dirty="0">
+              <a:rPr lang="en-US" sz="1620" dirty="0">
                 <a:solidFill>
                   <a:srgbClr val="18212B"/>
                 </a:solidFill>
@@ -8787,7 +9008,7 @@
               </a:rPr>
               <a:t>processing</a:t>
             </a:r>
-            <a:endParaRPr lang="en-US" sz="1650" dirty="0"/>
+            <a:endParaRPr lang="en-US" sz="1620" dirty="0"/>
           </a:p>
           <a:p>
             <a:pPr marL="228600" indent="-228600">
@@ -8795,7 +9016,7 @@
               <a:buChar char="•"/>
             </a:pPr>
             <a:r>
-              <a:rPr lang="en-US" sz="1650" dirty="0">
+              <a:rPr lang="en-US" sz="1620" dirty="0">
                 <a:solidFill>
                   <a:srgbClr val="18212B"/>
                 </a:solidFill>
@@ -8805,7 +9026,7 @@
               </a:rPr>
               <a:t>print()</a:t>
             </a:r>
-            <a:endParaRPr lang="en-US" sz="1650" dirty="0"/>
+            <a:endParaRPr lang="en-US" sz="1620" dirty="0"/>
           </a:p>
           <a:p>
             <a:pPr marL="228600" indent="-228600">
@@ -8813,7 +9034,7 @@
               <a:buChar char="•"/>
             </a:pPr>
             <a:r>
-              <a:rPr lang="en-US" sz="1650" dirty="0">
+              <a:rPr lang="en-US" sz="1620" dirty="0">
                 <a:solidFill>
                   <a:srgbClr val="18212B"/>
                 </a:solidFill>
@@ -8823,7 +9044,7 @@
               </a:rPr>
               <a:t>end</a:t>
             </a:r>
-            <a:endParaRPr lang="en-US" sz="1650" dirty="0"/>
+            <a:endParaRPr lang="en-US" sz="1620" dirty="0"/>
           </a:p>
         </p:txBody>
       </p:sp>
@@ -8835,15 +9056,13 @@
         </p:nvSpPr>
         <p:spPr>
           <a:xfrm>
-            <a:off x="6373368" y="1874520"/>
-            <a:ext cx="5010912" cy="109728"/>
-          </a:xfrm>
-          <a:prstGeom prst="rect">
-            <a:avLst/>
-          </a:prstGeom>
-          <a:solidFill>
-            <a:srgbClr val="E0A03A"/>
-          </a:solidFill>
+            <a:off x="6373368" y="1883664"/>
+            <a:ext cx="5010912" cy="0"/>
+          </a:xfrm>
+          <a:prstGeom prst="line">
+            <a:avLst/>
+          </a:prstGeom>
+          <a:noFill/>
           <a:ln w="12700">
             <a:solidFill>
               <a:srgbClr val="E0A03A"/>
@@ -8860,7 +9079,7 @@
         </p:nvSpPr>
         <p:spPr>
           <a:xfrm>
-            <a:off x="6373368" y="2212848"/>
+            <a:off x="6373368" y="2139696"/>
             <a:ext cx="5010912" cy="365760"/>
           </a:xfrm>
           <a:prstGeom prst="rect">
@@ -8879,7 +9098,7 @@
               <a:buNone/>
             </a:pPr>
             <a:r>
-              <a:rPr lang="en-US" sz="2000" b="1" dirty="0">
+              <a:rPr lang="en-US" sz="1950" b="1" dirty="0">
                 <a:solidFill>
                   <a:srgbClr val="16324F"/>
                 </a:solidFill>
@@ -8889,7 +9108,7 @@
               </a:rPr>
               <a:t>A GUI application</a:t>
             </a:r>
-            <a:endParaRPr lang="en-US" sz="2000" dirty="0"/>
+            <a:endParaRPr lang="en-US" sz="1950" dirty="0"/>
           </a:p>
         </p:txBody>
       </p:sp>
@@ -8901,7 +9120,7 @@
         </p:nvSpPr>
         <p:spPr>
           <a:xfrm>
-            <a:off x="6428232" y="2788920"/>
+            <a:off x="6409944" y="2688336"/>
             <a:ext cx="4919472" cy="3886200"/>
           </a:xfrm>
           <a:prstGeom prst="rect">
@@ -8921,7 +9140,7 @@
               <a:buChar char="•"/>
             </a:pPr>
             <a:r>
-              <a:rPr lang="en-US" sz="1650" dirty="0">
+              <a:rPr lang="en-US" sz="1620" dirty="0">
                 <a:solidFill>
                   <a:srgbClr val="18212B"/>
                 </a:solidFill>
@@ -8931,7 +9150,7 @@
               </a:rPr>
               <a:t>waits for an event</a:t>
             </a:r>
-            <a:endParaRPr lang="en-US" sz="1650" dirty="0"/>
+            <a:endParaRPr lang="en-US" sz="1620" dirty="0"/>
           </a:p>
           <a:p>
             <a:pPr marL="228600" indent="-228600">
@@ -8939,7 +9158,7 @@
               <a:buChar char="•"/>
             </a:pPr>
             <a:r>
-              <a:rPr lang="en-US" sz="1650" dirty="0">
+              <a:rPr lang="en-US" sz="1620" dirty="0">
                 <a:solidFill>
                   <a:srgbClr val="18212B"/>
                 </a:solidFill>
@@ -8949,7 +9168,7 @@
               </a:rPr>
               <a:t>runs a callback</a:t>
             </a:r>
-            <a:endParaRPr lang="en-US" sz="1650" dirty="0"/>
+            <a:endParaRPr lang="en-US" sz="1620" dirty="0"/>
           </a:p>
           <a:p>
             <a:pPr marL="228600" indent="-228600">
@@ -8957,7 +9176,7 @@
               <a:buChar char="•"/>
             </a:pPr>
             <a:r>
-              <a:rPr lang="en-US" sz="1650" dirty="0">
+              <a:rPr lang="en-US" sz="1620" dirty="0">
                 <a:solidFill>
                   <a:srgbClr val="18212B"/>
                 </a:solidFill>
@@ -8967,7 +9186,7 @@
               </a:rPr>
               <a:t>changes state or UI</a:t>
             </a:r>
-            <a:endParaRPr lang="en-US" sz="1650" dirty="0"/>
+            <a:endParaRPr lang="en-US" sz="1620" dirty="0"/>
           </a:p>
           <a:p>
             <a:pPr marL="228600" indent="-228600">
@@ -8975,7 +9194,7 @@
               <a:buChar char="•"/>
             </a:pPr>
             <a:r>
-              <a:rPr lang="en-US" sz="1650" dirty="0">
+              <a:rPr lang="en-US" sz="1620" dirty="0">
                 <a:solidFill>
                   <a:srgbClr val="18212B"/>
                 </a:solidFill>
@@ -8985,7 +9204,7 @@
               </a:rPr>
               <a:t>waits again</a:t>
             </a:r>
-            <a:endParaRPr lang="en-US" sz="1650" dirty="0"/>
+            <a:endParaRPr lang="en-US" sz="1620" dirty="0"/>
           </a:p>
         </p:txBody>
       </p:sp>
@@ -9030,7 +9249,7 @@
         <p:spPr>
           <a:xfrm>
             <a:off x="0" y="0"/>
-            <a:ext cx="12191695" cy="155448"/>
+            <a:ext cx="12191695" cy="109728"/>
           </a:xfrm>
           <a:prstGeom prst="rect">
             <a:avLst/>
@@ -9054,7 +9273,7 @@
         </p:nvSpPr>
         <p:spPr>
           <a:xfrm>
-            <a:off x="566928" y="320040"/>
+            <a:off x="566928" y="310896"/>
             <a:ext cx="4663440" cy="182880"/>
           </a:xfrm>
           <a:prstGeom prst="rect">
@@ -9073,7 +9292,7 @@
               <a:buNone/>
             </a:pPr>
             <a:r>
-              <a:rPr lang="en-US" sz="900" b="1" spc="80" kern="0" dirty="0">
+              <a:rPr lang="en-US" sz="880" b="1" spc="50" kern="0" dirty="0">
                 <a:solidFill>
                   <a:srgbClr val="1877B9"/>
                 </a:solidFill>
@@ -9083,7 +9302,7 @@
               </a:rPr>
               <a:t>PROGRAMMING IN PYTHON</a:t>
             </a:r>
-            <a:endParaRPr lang="en-US" sz="900" dirty="0"/>
+            <a:endParaRPr lang="en-US" sz="880" dirty="0"/>
           </a:p>
         </p:txBody>
       </p:sp>
@@ -9095,7 +9314,7 @@
         </p:nvSpPr>
         <p:spPr>
           <a:xfrm>
-            <a:off x="9829800" y="320040"/>
+            <a:off x="9829800" y="310896"/>
             <a:ext cx="1783080" cy="182880"/>
           </a:xfrm>
           <a:prstGeom prst="rect">
@@ -9114,7 +9333,7 @@
               <a:buNone/>
             </a:pPr>
             <a:r>
-              <a:rPr lang="en-US" sz="900" b="1" dirty="0">
+              <a:rPr lang="en-US" sz="880" b="1" dirty="0">
                 <a:solidFill>
                   <a:srgbClr val="5E6B78"/>
                 </a:solidFill>
@@ -9124,7 +9343,7 @@
               </a:rPr>
               <a:t>LECTURE 03</a:t>
             </a:r>
-            <a:endParaRPr lang="en-US" sz="900" dirty="0"/>
+            <a:endParaRPr lang="en-US" sz="880" dirty="0"/>
           </a:p>
         </p:txBody>
       </p:sp>
@@ -9182,8 +9401,8 @@
         </p:nvSpPr>
         <p:spPr>
           <a:xfrm>
-            <a:off x="11109960" y="6501384"/>
-            <a:ext cx="457200" cy="146304"/>
+            <a:off x="10771632" y="6501384"/>
+            <a:ext cx="804672" cy="146304"/>
           </a:xfrm>
           <a:prstGeom prst="rect">
             <a:avLst/>
@@ -9201,7 +9420,7 @@
               <a:buNone/>
             </a:pPr>
             <a:r>
-              <a:rPr lang="en-US" sz="800" dirty="0">
+              <a:rPr lang="en-US" sz="780" dirty="0">
                 <a:solidFill>
                   <a:srgbClr val="5E6B78"/>
                 </a:solidFill>
@@ -9209,9 +9428,9 @@
                 <a:ea typeface="Consolas" pitchFamily="34" charset="-122"/>
                 <a:cs typeface="Consolas" pitchFamily="34" charset="-120"/>
               </a:rPr>
-              <a:t>20</a:t>
-            </a:r>
-            <a:endParaRPr lang="en-US" sz="800" dirty="0"/>
+              <a:t>20 / 24</a:t>
+            </a:r>
+            <a:endParaRPr lang="en-US" sz="780" dirty="0"/>
           </a:p>
         </p:txBody>
       </p:sp>
@@ -9223,8 +9442,8 @@
         </p:nvSpPr>
         <p:spPr>
           <a:xfrm>
-            <a:off x="658368" y="932688"/>
-            <a:ext cx="10789920" cy="713232"/>
+            <a:off x="658368" y="914400"/>
+            <a:ext cx="10881360" cy="713232"/>
           </a:xfrm>
           <a:prstGeom prst="rect">
             <a:avLst/>
@@ -9242,17 +9461,17 @@
               <a:buNone/>
             </a:pPr>
             <a:r>
-              <a:rPr lang="en-US" sz="2900" b="1" dirty="0">
+              <a:rPr lang="en-US" sz="2850" b="1" dirty="0">
                 <a:solidFill>
                   <a:srgbClr val="16324F"/>
                 </a:solidFill>
-                <a:latin typeface="Aptos" pitchFamily="34" charset="0"/>
-                <a:ea typeface="Aptos" pitchFamily="34" charset="-122"/>
-                <a:cs typeface="Aptos" pitchFamily="34" charset="-120"/>
+                <a:latin typeface="Aptos Display" pitchFamily="34" charset="0"/>
+                <a:ea typeface="Aptos Display" pitchFamily="34" charset="-122"/>
+                <a:cs typeface="Aptos Display" pitchFamily="34" charset="-120"/>
               </a:rPr>
               <a:t>StringVar is observable state</a:t>
             </a:r>
-            <a:endParaRPr lang="en-US" sz="2900" dirty="0"/>
+            <a:endParaRPr lang="en-US" sz="2850" dirty="0"/>
           </a:p>
         </p:txBody>
       </p:sp>
@@ -9265,19 +9484,17 @@
         <p:spPr>
           <a:xfrm>
             <a:off x="658368" y="1828800"/>
-            <a:ext cx="6812280" cy="4069080"/>
-          </a:xfrm>
-          <a:prstGeom prst="roundRect">
-            <a:avLst>
-              <a:gd name="adj" fmla="val 1348"/>
-            </a:avLst>
+            <a:ext cx="6903720" cy="4069080"/>
+          </a:xfrm>
+          <a:prstGeom prst="rect">
+            <a:avLst/>
           </a:prstGeom>
           <a:solidFill>
             <a:srgbClr val="17212B"/>
           </a:solidFill>
           <a:ln w="12700">
             <a:solidFill>
-              <a:srgbClr val="17212B"/>
+              <a:srgbClr val="243242"/>
             </a:solidFill>
             <a:prstDash val="solid"/>
           </a:ln>
@@ -9285,14 +9502,39 @@
       </p:sp>
       <p:sp>
         <p:nvSpPr>
-          <p:cNvPr id="10" name="Text 8"/>
-          <p:cNvSpPr/>
-          <p:nvPr/>
-        </p:nvSpPr>
-        <p:spPr>
-          <a:xfrm>
-            <a:off x="868680" y="2029968"/>
-            <a:ext cx="6309360" cy="182880"/>
+          <p:cNvPr id="10" name="Shape 8"/>
+          <p:cNvSpPr/>
+          <p:nvPr/>
+        </p:nvSpPr>
+        <p:spPr>
+          <a:xfrm>
+            <a:off x="658368" y="1828800"/>
+            <a:ext cx="6903720" cy="347472"/>
+          </a:xfrm>
+          <a:prstGeom prst="rect">
+            <a:avLst/>
+          </a:prstGeom>
+          <a:solidFill>
+            <a:srgbClr val="223044"/>
+          </a:solidFill>
+          <a:ln w="12700">
+            <a:solidFill>
+              <a:srgbClr val="223044"/>
+            </a:solidFill>
+            <a:prstDash val="solid"/>
+          </a:ln>
+        </p:spPr>
+      </p:sp>
+      <p:sp>
+        <p:nvSpPr>
+          <p:cNvPr id="11" name="Text 9"/>
+          <p:cNvSpPr/>
+          <p:nvPr/>
+        </p:nvSpPr>
+        <p:spPr>
+          <a:xfrm>
+            <a:off x="868680" y="1947672"/>
+            <a:ext cx="6309360" cy="146304"/>
           </a:xfrm>
           <a:prstGeom prst="rect">
             <a:avLst/>
@@ -9310,7 +9552,7 @@
               <a:buNone/>
             </a:pPr>
             <a:r>
-              <a:rPr lang="en-US" sz="850" b="1" spc="70" kern="0" dirty="0">
+              <a:rPr lang="en-US" sz="820" b="1" spc="35" kern="0" dirty="0">
                 <a:solidFill>
                   <a:srgbClr val="8FD3FF"/>
                 </a:solidFill>
@@ -9320,20 +9562,20 @@
               </a:rPr>
               <a:t>python</a:t>
             </a:r>
-            <a:endParaRPr lang="en-US" sz="850" dirty="0"/>
-          </a:p>
-        </p:txBody>
-      </p:sp>
-      <p:sp>
-        <p:nvSpPr>
-          <p:cNvPr id="11" name="Text 9"/>
-          <p:cNvSpPr/>
-          <p:nvPr/>
-        </p:nvSpPr>
-        <p:spPr>
-          <a:xfrm>
-            <a:off x="877824" y="2395728"/>
-            <a:ext cx="6327648" cy="3246120"/>
+            <a:endParaRPr lang="en-US" sz="820" dirty="0"/>
+          </a:p>
+        </p:txBody>
+      </p:sp>
+      <p:sp>
+        <p:nvSpPr>
+          <p:cNvPr id="12" name="Text 10"/>
+          <p:cNvSpPr/>
+          <p:nvPr/>
+        </p:nvSpPr>
+        <p:spPr>
+          <a:xfrm>
+            <a:off x="877824" y="2359152"/>
+            <a:ext cx="6382512" cy="3246120"/>
           </a:xfrm>
           <a:prstGeom prst="rect">
             <a:avLst/>
@@ -9351,7 +9593,7 @@
               <a:buNone/>
             </a:pPr>
             <a:r>
-              <a:rPr lang="en-US" sz="1650" dirty="0">
+              <a:rPr lang="en-US" sz="1600" dirty="0">
                 <a:solidFill>
                   <a:srgbClr val="F4F7FA"/>
                 </a:solidFill>
@@ -9361,20 +9603,20 @@
               </a:rPr>
               <a:t>filename = tk.StringVar(value="Bez súboru")</a:t>
             </a:r>
-            <a:endParaRPr lang="en-US" sz="1650" dirty="0"/>
-          </a:p>
-          <a:p>
-            <a:pPr algn="l" indent="0" marL="0">
-              <a:buNone/>
-            </a:pPr>
-            <a:endParaRPr lang="en-US" sz="1650" dirty="0"/>
-          </a:p>
-          <a:p>
-            <a:pPr algn="l" indent="0" marL="0">
-              <a:buNone/>
-            </a:pPr>
-            <a:r>
-              <a:rPr lang="en-US" sz="1650" dirty="0">
+            <a:endParaRPr lang="en-US" sz="1600" dirty="0"/>
+          </a:p>
+          <a:p>
+            <a:pPr algn="l" indent="0" marL="0">
+              <a:buNone/>
+            </a:pPr>
+            <a:endParaRPr lang="en-US" sz="1600" dirty="0"/>
+          </a:p>
+          <a:p>
+            <a:pPr algn="l" indent="0" marL="0">
+              <a:buNone/>
+            </a:pPr>
+            <a:r>
+              <a:rPr lang="en-US" sz="1600" dirty="0">
                 <a:solidFill>
                   <a:srgbClr val="F4F7FA"/>
                 </a:solidFill>
@@ -9384,20 +9626,20 @@
               </a:rPr>
               <a:t>label = ttk.Label(root, textvariable=filename)</a:t>
             </a:r>
-            <a:endParaRPr lang="en-US" sz="1650" dirty="0"/>
-          </a:p>
-          <a:p>
-            <a:pPr algn="l" indent="0" marL="0">
-              <a:buNone/>
-            </a:pPr>
-            <a:endParaRPr lang="en-US" sz="1650" dirty="0"/>
-          </a:p>
-          <a:p>
-            <a:pPr algn="l" indent="0" marL="0">
-              <a:buNone/>
-            </a:pPr>
-            <a:r>
-              <a:rPr lang="en-US" sz="1650" dirty="0">
+            <a:endParaRPr lang="en-US" sz="1600" dirty="0"/>
+          </a:p>
+          <a:p>
+            <a:pPr algn="l" indent="0" marL="0">
+              <a:buNone/>
+            </a:pPr>
+            <a:endParaRPr lang="en-US" sz="1600" dirty="0"/>
+          </a:p>
+          <a:p>
+            <a:pPr algn="l" indent="0" marL="0">
+              <a:buNone/>
+            </a:pPr>
+            <a:r>
+              <a:rPr lang="en-US" sz="1600" dirty="0">
                 <a:solidFill>
                   <a:srgbClr val="F4F7FA"/>
                 </a:solidFill>
@@ -9407,14 +9649,14 @@
               </a:rPr>
               <a:t>def set_file(path: Path) -&gt; None:</a:t>
             </a:r>
-            <a:endParaRPr lang="en-US" sz="1650" dirty="0"/>
-          </a:p>
-          <a:p>
-            <a:pPr algn="l" indent="0" marL="0">
-              <a:buNone/>
-            </a:pPr>
-            <a:r>
-              <a:rPr lang="en-US" sz="1650" dirty="0">
+            <a:endParaRPr lang="en-US" sz="1600" dirty="0"/>
+          </a:p>
+          <a:p>
+            <a:pPr algn="l" indent="0" marL="0">
+              <a:buNone/>
+            </a:pPr>
+            <a:r>
+              <a:rPr lang="en-US" sz="1600" dirty="0">
                 <a:solidFill>
                   <a:srgbClr val="F4F7FA"/>
                 </a:solidFill>
@@ -9424,20 +9666,20 @@
               </a:rPr>
               <a:t>    filename.set(path.name)</a:t>
             </a:r>
-            <a:endParaRPr lang="en-US" sz="1650" dirty="0"/>
-          </a:p>
-        </p:txBody>
-      </p:sp>
-      <p:sp>
-        <p:nvSpPr>
-          <p:cNvPr id="12" name="Shape 10"/>
-          <p:cNvSpPr/>
-          <p:nvPr/>
-        </p:nvSpPr>
-        <p:spPr>
-          <a:xfrm>
-            <a:off x="7909560" y="1901952"/>
-            <a:ext cx="0" cy="3566160"/>
+            <a:endParaRPr lang="en-US" sz="1600" dirty="0"/>
+          </a:p>
+        </p:txBody>
+      </p:sp>
+      <p:sp>
+        <p:nvSpPr>
+          <p:cNvPr id="13" name="Shape 11"/>
+          <p:cNvSpPr/>
+          <p:nvPr/>
+        </p:nvSpPr>
+        <p:spPr>
+          <a:xfrm>
+            <a:off x="7936992" y="1883664"/>
+            <a:ext cx="0" cy="3639312"/>
           </a:xfrm>
           <a:prstGeom prst="line">
             <a:avLst/>
@@ -9453,14 +9695,14 @@
       </p:sp>
       <p:sp>
         <p:nvSpPr>
-          <p:cNvPr id="13" name="Text 11"/>
-          <p:cNvSpPr/>
-          <p:nvPr/>
-        </p:nvSpPr>
-        <p:spPr>
-          <a:xfrm>
-            <a:off x="8229600" y="2130552"/>
-            <a:ext cx="2743200" cy="2468880"/>
+          <p:cNvPr id="14" name="Text 12"/>
+          <p:cNvSpPr/>
+          <p:nvPr/>
+        </p:nvSpPr>
+        <p:spPr>
+          <a:xfrm>
+            <a:off x="8229600" y="2084832"/>
+            <a:ext cx="2816352" cy="2514600"/>
           </a:xfrm>
           <a:prstGeom prst="rect">
             <a:avLst/>
@@ -9478,7 +9720,7 @@
               <a:buNone/>
             </a:pPr>
             <a:r>
-              <a:rPr lang="en-US" sz="1800" dirty="0">
+              <a:rPr lang="en-US" sz="1720" dirty="0">
                 <a:solidFill>
                   <a:srgbClr val="5E6B78"/>
                 </a:solidFill>
@@ -9488,7 +9730,7 @@
               </a:rPr>
               <a:t>StringVar is not required for every widget. It helps where state has multiple observers or bindings.</a:t>
             </a:r>
-            <a:endParaRPr lang="en-US" sz="1800" dirty="0"/>
+            <a:endParaRPr lang="en-US" sz="1720" dirty="0"/>
           </a:p>
         </p:txBody>
       </p:sp>
@@ -9533,7 +9775,7 @@
         <p:spPr>
           <a:xfrm>
             <a:off x="0" y="0"/>
-            <a:ext cx="12191695" cy="155448"/>
+            <a:ext cx="12191695" cy="109728"/>
           </a:xfrm>
           <a:prstGeom prst="rect">
             <a:avLst/>
@@ -9557,7 +9799,7 @@
         </p:nvSpPr>
         <p:spPr>
           <a:xfrm>
-            <a:off x="566928" y="320040"/>
+            <a:off x="566928" y="310896"/>
             <a:ext cx="4663440" cy="182880"/>
           </a:xfrm>
           <a:prstGeom prst="rect">
@@ -9576,7 +9818,7 @@
               <a:buNone/>
             </a:pPr>
             <a:r>
-              <a:rPr lang="en-US" sz="900" b="1" spc="80" kern="0" dirty="0">
+              <a:rPr lang="en-US" sz="880" b="1" spc="50" kern="0" dirty="0">
                 <a:solidFill>
                   <a:srgbClr val="1877B9"/>
                 </a:solidFill>
@@ -9586,7 +9828,7 @@
               </a:rPr>
               <a:t>PROGRAMMING IN PYTHON</a:t>
             </a:r>
-            <a:endParaRPr lang="en-US" sz="900" dirty="0"/>
+            <a:endParaRPr lang="en-US" sz="880" dirty="0"/>
           </a:p>
         </p:txBody>
       </p:sp>
@@ -9598,7 +9840,7 @@
         </p:nvSpPr>
         <p:spPr>
           <a:xfrm>
-            <a:off x="9829800" y="320040"/>
+            <a:off x="9829800" y="310896"/>
             <a:ext cx="1783080" cy="182880"/>
           </a:xfrm>
           <a:prstGeom prst="rect">
@@ -9617,7 +9859,7 @@
               <a:buNone/>
             </a:pPr>
             <a:r>
-              <a:rPr lang="en-US" sz="900" b="1" dirty="0">
+              <a:rPr lang="en-US" sz="880" b="1" dirty="0">
                 <a:solidFill>
                   <a:srgbClr val="5E6B78"/>
                 </a:solidFill>
@@ -9627,7 +9869,7 @@
               </a:rPr>
               <a:t>LECTURE 03</a:t>
             </a:r>
-            <a:endParaRPr lang="en-US" sz="900" dirty="0"/>
+            <a:endParaRPr lang="en-US" sz="880" dirty="0"/>
           </a:p>
         </p:txBody>
       </p:sp>
@@ -9685,8 +9927,8 @@
         </p:nvSpPr>
         <p:spPr>
           <a:xfrm>
-            <a:off x="11109960" y="6501384"/>
-            <a:ext cx="457200" cy="146304"/>
+            <a:off x="10771632" y="6501384"/>
+            <a:ext cx="804672" cy="146304"/>
           </a:xfrm>
           <a:prstGeom prst="rect">
             <a:avLst/>
@@ -9704,7 +9946,7 @@
               <a:buNone/>
             </a:pPr>
             <a:r>
-              <a:rPr lang="en-US" sz="800" dirty="0">
+              <a:rPr lang="en-US" sz="780" dirty="0">
                 <a:solidFill>
                   <a:srgbClr val="5E6B78"/>
                 </a:solidFill>
@@ -9712,9 +9954,9 @@
                 <a:ea typeface="Consolas" pitchFamily="34" charset="-122"/>
                 <a:cs typeface="Consolas" pitchFamily="34" charset="-120"/>
               </a:rPr>
-              <a:t>21</a:t>
-            </a:r>
-            <a:endParaRPr lang="en-US" sz="800" dirty="0"/>
+              <a:t>21 / 24</a:t>
+            </a:r>
+            <a:endParaRPr lang="en-US" sz="780" dirty="0"/>
           </a:p>
         </p:txBody>
       </p:sp>
@@ -9726,8 +9968,8 @@
         </p:nvSpPr>
         <p:spPr>
           <a:xfrm>
-            <a:off x="658368" y="932688"/>
-            <a:ext cx="10789920" cy="713232"/>
+            <a:off x="658368" y="914400"/>
+            <a:ext cx="10881360" cy="713232"/>
           </a:xfrm>
           <a:prstGeom prst="rect">
             <a:avLst/>
@@ -9745,17 +9987,17 @@
               <a:buNone/>
             </a:pPr>
             <a:r>
-              <a:rPr lang="en-US" sz="2900" b="1" dirty="0">
+              <a:rPr lang="en-US" sz="2850" b="1" dirty="0">
                 <a:solidFill>
                   <a:srgbClr val="16324F"/>
                 </a:solidFill>
-                <a:latin typeface="Aptos" pitchFamily="34" charset="0"/>
-                <a:ea typeface="Aptos" pitchFamily="34" charset="-122"/>
-                <a:cs typeface="Aptos" pitchFamily="34" charset="-120"/>
+                <a:latin typeface="Aptos Display" pitchFamily="34" charset="0"/>
+                <a:ea typeface="Aptos Display" pitchFamily="34" charset="-122"/>
+                <a:cs typeface="Aptos Display" pitchFamily="34" charset="-120"/>
               </a:rPr>
               <a:t>A file can fail after selection</a:t>
             </a:r>
-            <a:endParaRPr lang="en-US" sz="2900" dirty="0"/>
+            <a:endParaRPr lang="en-US" sz="2850" dirty="0"/>
           </a:p>
         </p:txBody>
       </p:sp>
@@ -9768,19 +10010,17 @@
         <p:spPr>
           <a:xfrm>
             <a:off x="658368" y="1828800"/>
-            <a:ext cx="6812280" cy="4069080"/>
-          </a:xfrm>
-          <a:prstGeom prst="roundRect">
-            <a:avLst>
-              <a:gd name="adj" fmla="val 1348"/>
-            </a:avLst>
+            <a:ext cx="6903720" cy="4069080"/>
+          </a:xfrm>
+          <a:prstGeom prst="rect">
+            <a:avLst/>
           </a:prstGeom>
           <a:solidFill>
             <a:srgbClr val="17212B"/>
           </a:solidFill>
           <a:ln w="12700">
             <a:solidFill>
-              <a:srgbClr val="17212B"/>
+              <a:srgbClr val="243242"/>
             </a:solidFill>
             <a:prstDash val="solid"/>
           </a:ln>
@@ -9788,14 +10028,39 @@
       </p:sp>
       <p:sp>
         <p:nvSpPr>
-          <p:cNvPr id="10" name="Text 8"/>
-          <p:cNvSpPr/>
-          <p:nvPr/>
-        </p:nvSpPr>
-        <p:spPr>
-          <a:xfrm>
-            <a:off x="868680" y="2029968"/>
-            <a:ext cx="6309360" cy="182880"/>
+          <p:cNvPr id="10" name="Shape 8"/>
+          <p:cNvSpPr/>
+          <p:nvPr/>
+        </p:nvSpPr>
+        <p:spPr>
+          <a:xfrm>
+            <a:off x="658368" y="1828800"/>
+            <a:ext cx="6903720" cy="347472"/>
+          </a:xfrm>
+          <a:prstGeom prst="rect">
+            <a:avLst/>
+          </a:prstGeom>
+          <a:solidFill>
+            <a:srgbClr val="223044"/>
+          </a:solidFill>
+          <a:ln w="12700">
+            <a:solidFill>
+              <a:srgbClr val="223044"/>
+            </a:solidFill>
+            <a:prstDash val="solid"/>
+          </a:ln>
+        </p:spPr>
+      </p:sp>
+      <p:sp>
+        <p:nvSpPr>
+          <p:cNvPr id="11" name="Text 9"/>
+          <p:cNvSpPr/>
+          <p:nvPr/>
+        </p:nvSpPr>
+        <p:spPr>
+          <a:xfrm>
+            <a:off x="868680" y="1947672"/>
+            <a:ext cx="6309360" cy="146304"/>
           </a:xfrm>
           <a:prstGeom prst="rect">
             <a:avLst/>
@@ -9813,7 +10078,7 @@
               <a:buNone/>
             </a:pPr>
             <a:r>
-              <a:rPr lang="en-US" sz="850" b="1" spc="70" kern="0" dirty="0">
+              <a:rPr lang="en-US" sz="820" b="1" spc="35" kern="0" dirty="0">
                 <a:solidFill>
                   <a:srgbClr val="8FD3FF"/>
                 </a:solidFill>
@@ -9823,20 +10088,20 @@
               </a:rPr>
               <a:t>python</a:t>
             </a:r>
-            <a:endParaRPr lang="en-US" sz="850" dirty="0"/>
-          </a:p>
-        </p:txBody>
-      </p:sp>
-      <p:sp>
-        <p:nvSpPr>
-          <p:cNvPr id="11" name="Text 9"/>
-          <p:cNvSpPr/>
-          <p:nvPr/>
-        </p:nvSpPr>
-        <p:spPr>
-          <a:xfrm>
-            <a:off x="877824" y="2395728"/>
-            <a:ext cx="6327648" cy="3246120"/>
+            <a:endParaRPr lang="en-US" sz="820" dirty="0"/>
+          </a:p>
+        </p:txBody>
+      </p:sp>
+      <p:sp>
+        <p:nvSpPr>
+          <p:cNvPr id="12" name="Text 10"/>
+          <p:cNvSpPr/>
+          <p:nvPr/>
+        </p:nvSpPr>
+        <p:spPr>
+          <a:xfrm>
+            <a:off x="877824" y="2359152"/>
+            <a:ext cx="6382512" cy="3246120"/>
           </a:xfrm>
           <a:prstGeom prst="rect">
             <a:avLst/>
@@ -9854,7 +10119,7 @@
               <a:buNone/>
             </a:pPr>
             <a:r>
-              <a:rPr lang="en-US" sz="1650" dirty="0">
+              <a:rPr lang="en-US" sz="1500" dirty="0">
                 <a:solidFill>
                   <a:srgbClr val="F4F7FA"/>
                 </a:solidFill>
@@ -9864,14 +10129,14 @@
               </a:rPr>
               <a:t>try:</a:t>
             </a:r>
-            <a:endParaRPr lang="en-US" sz="1650" dirty="0"/>
-          </a:p>
-          <a:p>
-            <a:pPr algn="l" indent="0" marL="0">
-              <a:buNone/>
-            </a:pPr>
-            <a:r>
-              <a:rPr lang="en-US" sz="1650" dirty="0">
+            <a:endParaRPr lang="en-US" sz="1500" dirty="0"/>
+          </a:p>
+          <a:p>
+            <a:pPr algn="l" indent="0" marL="0">
+              <a:buNone/>
+            </a:pPr>
+            <a:r>
+              <a:rPr lang="en-US" sz="1500" dirty="0">
                 <a:solidFill>
                   <a:srgbClr val="F4F7FA"/>
                 </a:solidFill>
@@ -9881,14 +10146,14 @@
               </a:rPr>
               <a:t>    text = Path(filename).read_text(encoding="utf-8")</a:t>
             </a:r>
-            <a:endParaRPr lang="en-US" sz="1650" dirty="0"/>
-          </a:p>
-          <a:p>
-            <a:pPr algn="l" indent="0" marL="0">
-              <a:buNone/>
-            </a:pPr>
-            <a:r>
-              <a:rPr lang="en-US" sz="1650" dirty="0">
+            <a:endParaRPr lang="en-US" sz="1500" dirty="0"/>
+          </a:p>
+          <a:p>
+            <a:pPr algn="l" indent="0" marL="0">
+              <a:buNone/>
+            </a:pPr>
+            <a:r>
+              <a:rPr lang="en-US" sz="1500" dirty="0">
                 <a:solidFill>
                   <a:srgbClr val="F4F7FA"/>
                 </a:solidFill>
@@ -9898,14 +10163,14 @@
               </a:rPr>
               <a:t>except OSError as error:</a:t>
             </a:r>
-            <a:endParaRPr lang="en-US" sz="1650" dirty="0"/>
-          </a:p>
-          <a:p>
-            <a:pPr algn="l" indent="0" marL="0">
-              <a:buNone/>
-            </a:pPr>
-            <a:r>
-              <a:rPr lang="en-US" sz="1650" dirty="0">
+            <a:endParaRPr lang="en-US" sz="1500" dirty="0"/>
+          </a:p>
+          <a:p>
+            <a:pPr algn="l" indent="0" marL="0">
+              <a:buNone/>
+            </a:pPr>
+            <a:r>
+              <a:rPr lang="en-US" sz="1500" dirty="0">
                 <a:solidFill>
                   <a:srgbClr val="F4F7FA"/>
                 </a:solidFill>
@@ -9915,14 +10180,14 @@
               </a:rPr>
               <a:t>    messagebox.showerror(</a:t>
             </a:r>
-            <a:endParaRPr lang="en-US" sz="1650" dirty="0"/>
-          </a:p>
-          <a:p>
-            <a:pPr algn="l" indent="0" marL="0">
-              <a:buNone/>
-            </a:pPr>
-            <a:r>
-              <a:rPr lang="en-US" sz="1650" dirty="0">
+            <a:endParaRPr lang="en-US" sz="1500" dirty="0"/>
+          </a:p>
+          <a:p>
+            <a:pPr algn="l" indent="0" marL="0">
+              <a:buNone/>
+            </a:pPr>
+            <a:r>
+              <a:rPr lang="en-US" sz="1500" dirty="0">
                 <a:solidFill>
                   <a:srgbClr val="F4F7FA"/>
                 </a:solidFill>
@@ -9932,14 +10197,14 @@
               </a:rPr>
               <a:t>        "Čítanie súboru", str(error)</a:t>
             </a:r>
-            <a:endParaRPr lang="en-US" sz="1650" dirty="0"/>
-          </a:p>
-          <a:p>
-            <a:pPr algn="l" indent="0" marL="0">
-              <a:buNone/>
-            </a:pPr>
-            <a:r>
-              <a:rPr lang="en-US" sz="1650" dirty="0">
+            <a:endParaRPr lang="en-US" sz="1500" dirty="0"/>
+          </a:p>
+          <a:p>
+            <a:pPr algn="l" indent="0" marL="0">
+              <a:buNone/>
+            </a:pPr>
+            <a:r>
+              <a:rPr lang="en-US" sz="1500" dirty="0">
                 <a:solidFill>
                   <a:srgbClr val="F4F7FA"/>
                 </a:solidFill>
@@ -9949,14 +10214,14 @@
               </a:rPr>
               <a:t>    )</a:t>
             </a:r>
-            <a:endParaRPr lang="en-US" sz="1650" dirty="0"/>
-          </a:p>
-          <a:p>
-            <a:pPr algn="l" indent="0" marL="0">
-              <a:buNone/>
-            </a:pPr>
-            <a:r>
-              <a:rPr lang="en-US" sz="1650" dirty="0">
+            <a:endParaRPr lang="en-US" sz="1500" dirty="0"/>
+          </a:p>
+          <a:p>
+            <a:pPr algn="l" indent="0" marL="0">
+              <a:buNone/>
+            </a:pPr>
+            <a:r>
+              <a:rPr lang="en-US" sz="1500" dirty="0">
                 <a:solidFill>
                   <a:srgbClr val="F4F7FA"/>
                 </a:solidFill>
@@ -9966,14 +10231,14 @@
               </a:rPr>
               <a:t>    return</a:t>
             </a:r>
-            <a:endParaRPr lang="en-US" sz="1650" dirty="0"/>
-          </a:p>
-          <a:p>
-            <a:pPr algn="l" indent="0" marL="0">
-              <a:buNone/>
-            </a:pPr>
-            <a:r>
-              <a:rPr lang="en-US" sz="1650" dirty="0">
+            <a:endParaRPr lang="en-US" sz="1500" dirty="0"/>
+          </a:p>
+          <a:p>
+            <a:pPr algn="l" indent="0" marL="0">
+              <a:buNone/>
+            </a:pPr>
+            <a:r>
+              <a:rPr lang="en-US" sz="1500" dirty="0">
                 <a:solidFill>
                   <a:srgbClr val="F4F7FA"/>
                 </a:solidFill>
@@ -9983,14 +10248,14 @@
               </a:rPr>
               <a:t>editor.delete("1.0", "end")</a:t>
             </a:r>
-            <a:endParaRPr lang="en-US" sz="1650" dirty="0"/>
-          </a:p>
-          <a:p>
-            <a:pPr algn="l" indent="0" marL="0">
-              <a:buNone/>
-            </a:pPr>
-            <a:r>
-              <a:rPr lang="en-US" sz="1650" dirty="0">
+            <a:endParaRPr lang="en-US" sz="1500" dirty="0"/>
+          </a:p>
+          <a:p>
+            <a:pPr algn="l" indent="0" marL="0">
+              <a:buNone/>
+            </a:pPr>
+            <a:r>
+              <a:rPr lang="en-US" sz="1500" dirty="0">
                 <a:solidFill>
                   <a:srgbClr val="F4F7FA"/>
                 </a:solidFill>
@@ -10000,20 +10265,20 @@
               </a:rPr>
               <a:t>editor.insert("1.0", text)</a:t>
             </a:r>
-            <a:endParaRPr lang="en-US" sz="1650" dirty="0"/>
-          </a:p>
-        </p:txBody>
-      </p:sp>
-      <p:sp>
-        <p:nvSpPr>
-          <p:cNvPr id="12" name="Shape 10"/>
-          <p:cNvSpPr/>
-          <p:nvPr/>
-        </p:nvSpPr>
-        <p:spPr>
-          <a:xfrm>
-            <a:off x="7909560" y="1901952"/>
-            <a:ext cx="0" cy="3566160"/>
+            <a:endParaRPr lang="en-US" sz="1500" dirty="0"/>
+          </a:p>
+        </p:txBody>
+      </p:sp>
+      <p:sp>
+        <p:nvSpPr>
+          <p:cNvPr id="13" name="Shape 11"/>
+          <p:cNvSpPr/>
+          <p:nvPr/>
+        </p:nvSpPr>
+        <p:spPr>
+          <a:xfrm>
+            <a:off x="7936992" y="1883664"/>
+            <a:ext cx="0" cy="3639312"/>
           </a:xfrm>
           <a:prstGeom prst="line">
             <a:avLst/>
@@ -10029,14 +10294,14 @@
       </p:sp>
       <p:sp>
         <p:nvSpPr>
-          <p:cNvPr id="13" name="Text 11"/>
-          <p:cNvSpPr/>
-          <p:nvPr/>
-        </p:nvSpPr>
-        <p:spPr>
-          <a:xfrm>
-            <a:off x="8229600" y="2130552"/>
-            <a:ext cx="2743200" cy="2468880"/>
+          <p:cNvPr id="14" name="Text 12"/>
+          <p:cNvSpPr/>
+          <p:nvPr/>
+        </p:nvSpPr>
+        <p:spPr>
+          <a:xfrm>
+            <a:off x="8229600" y="2084832"/>
+            <a:ext cx="2816352" cy="2514600"/>
           </a:xfrm>
           <a:prstGeom prst="rect">
             <a:avLst/>
@@ -10054,7 +10319,7 @@
               <a:buNone/>
             </a:pPr>
             <a:r>
-              <a:rPr lang="en-US" sz="1800" dirty="0">
+              <a:rPr lang="en-US" sz="1720" dirty="0">
                 <a:solidFill>
                   <a:srgbClr val="5E6B78"/>
                 </a:solidFill>
@@ -10064,7 +10329,7 @@
               </a:rPr>
               <a:t>Selecting a file does not mean we can read it. Handle the error at the I/O operation itself.</a:t>
             </a:r>
-            <a:endParaRPr lang="en-US" sz="1800" dirty="0"/>
+            <a:endParaRPr lang="en-US" sz="1720" dirty="0"/>
           </a:p>
         </p:txBody>
       </p:sp>
@@ -10109,7 +10374,7 @@
         <p:spPr>
           <a:xfrm>
             <a:off x="0" y="0"/>
-            <a:ext cx="12191695" cy="155448"/>
+            <a:ext cx="12191695" cy="109728"/>
           </a:xfrm>
           <a:prstGeom prst="rect">
             <a:avLst/>
@@ -10133,7 +10398,7 @@
         </p:nvSpPr>
         <p:spPr>
           <a:xfrm>
-            <a:off x="566928" y="320040"/>
+            <a:off x="566928" y="310896"/>
             <a:ext cx="4663440" cy="182880"/>
           </a:xfrm>
           <a:prstGeom prst="rect">
@@ -10152,7 +10417,7 @@
               <a:buNone/>
             </a:pPr>
             <a:r>
-              <a:rPr lang="en-US" sz="900" b="1" spc="80" kern="0" dirty="0">
+              <a:rPr lang="en-US" sz="880" b="1" spc="50" kern="0" dirty="0">
                 <a:solidFill>
                   <a:srgbClr val="1877B9"/>
                 </a:solidFill>
@@ -10162,7 +10427,7 @@
               </a:rPr>
               <a:t>PROGRAMMING IN PYTHON</a:t>
             </a:r>
-            <a:endParaRPr lang="en-US" sz="900" dirty="0"/>
+            <a:endParaRPr lang="en-US" sz="880" dirty="0"/>
           </a:p>
         </p:txBody>
       </p:sp>
@@ -10174,7 +10439,7 @@
         </p:nvSpPr>
         <p:spPr>
           <a:xfrm>
-            <a:off x="9829800" y="320040"/>
+            <a:off x="9829800" y="310896"/>
             <a:ext cx="1783080" cy="182880"/>
           </a:xfrm>
           <a:prstGeom prst="rect">
@@ -10193,7 +10458,7 @@
               <a:buNone/>
             </a:pPr>
             <a:r>
-              <a:rPr lang="en-US" sz="900" b="1" dirty="0">
+              <a:rPr lang="en-US" sz="880" b="1" dirty="0">
                 <a:solidFill>
                   <a:srgbClr val="5E6B78"/>
                 </a:solidFill>
@@ -10203,7 +10468,7 @@
               </a:rPr>
               <a:t>LECTURE 03</a:t>
             </a:r>
-            <a:endParaRPr lang="en-US" sz="900" dirty="0"/>
+            <a:endParaRPr lang="en-US" sz="880" dirty="0"/>
           </a:p>
         </p:txBody>
       </p:sp>
@@ -10261,8 +10526,8 @@
         </p:nvSpPr>
         <p:spPr>
           <a:xfrm>
-            <a:off x="11109960" y="6501384"/>
-            <a:ext cx="457200" cy="146304"/>
+            <a:off x="10771632" y="6501384"/>
+            <a:ext cx="804672" cy="146304"/>
           </a:xfrm>
           <a:prstGeom prst="rect">
             <a:avLst/>
@@ -10280,7 +10545,7 @@
               <a:buNone/>
             </a:pPr>
             <a:r>
-              <a:rPr lang="en-US" sz="800" dirty="0">
+              <a:rPr lang="en-US" sz="780" dirty="0">
                 <a:solidFill>
                   <a:srgbClr val="5E6B78"/>
                 </a:solidFill>
@@ -10288,9 +10553,9 @@
                 <a:ea typeface="Consolas" pitchFamily="34" charset="-122"/>
                 <a:cs typeface="Consolas" pitchFamily="34" charset="-120"/>
               </a:rPr>
-              <a:t>22</a:t>
-            </a:r>
-            <a:endParaRPr lang="en-US" sz="800" dirty="0"/>
+              <a:t>22 / 24</a:t>
+            </a:r>
+            <a:endParaRPr lang="en-US" sz="780" dirty="0"/>
           </a:p>
         </p:txBody>
       </p:sp>
@@ -10302,8 +10567,8 @@
         </p:nvSpPr>
         <p:spPr>
           <a:xfrm>
-            <a:off x="658368" y="932688"/>
-            <a:ext cx="10789920" cy="713232"/>
+            <a:off x="658368" y="914400"/>
+            <a:ext cx="10881360" cy="713232"/>
           </a:xfrm>
           <a:prstGeom prst="rect">
             <a:avLst/>
@@ -10321,17 +10586,17 @@
               <a:buNone/>
             </a:pPr>
             <a:r>
-              <a:rPr lang="en-US" sz="2900" b="1" dirty="0">
+              <a:rPr lang="en-US" sz="2850" b="1" dirty="0">
                 <a:solidFill>
                   <a:srgbClr val="16324F"/>
                 </a:solidFill>
-                <a:latin typeface="Aptos" pitchFamily="34" charset="0"/>
-                <a:ea typeface="Aptos" pitchFamily="34" charset="-122"/>
-                <a:cs typeface="Aptos" pitchFamily="34" charset="-120"/>
+                <a:latin typeface="Aptos Display" pitchFamily="34" charset="0"/>
+                <a:ea typeface="Aptos Display" pitchFamily="34" charset="-122"/>
+                <a:cs typeface="Aptos Display" pitchFamily="34" charset="-120"/>
               </a:rPr>
               <a:t>Canvas reacts to event coordinates</a:t>
             </a:r>
-            <a:endParaRPr lang="en-US" sz="2900" dirty="0"/>
+            <a:endParaRPr lang="en-US" sz="2850" dirty="0"/>
           </a:p>
         </p:txBody>
       </p:sp>
@@ -10343,13 +10608,11 @@
         </p:nvSpPr>
         <p:spPr>
           <a:xfrm>
-            <a:off x="731520" y="2834640"/>
-            <a:ext cx="2450592" cy="1042416"/>
-          </a:xfrm>
-          <a:prstGeom prst="roundRect">
-            <a:avLst>
-              <a:gd name="adj" fmla="val 4386"/>
-            </a:avLst>
+            <a:off x="694944" y="2834640"/>
+            <a:ext cx="2400300" cy="1042416"/>
+          </a:xfrm>
+          <a:prstGeom prst="rect">
+            <a:avLst/>
           </a:prstGeom>
           <a:solidFill>
             <a:srgbClr val="F3F6F8"/>
@@ -10370,8 +10633,8 @@
         </p:nvSpPr>
         <p:spPr>
           <a:xfrm>
-            <a:off x="877824" y="3063240"/>
-            <a:ext cx="2157984" cy="548640"/>
+            <a:off x="804672" y="3063240"/>
+            <a:ext cx="2180844" cy="548640"/>
           </a:xfrm>
           <a:prstGeom prst="rect">
             <a:avLst/>
@@ -10411,7 +10674,7 @@
         </p:nvSpPr>
         <p:spPr>
           <a:xfrm>
-            <a:off x="3319272" y="3209544"/>
+            <a:off x="3232404" y="3209544"/>
             <a:ext cx="182880" cy="292608"/>
           </a:xfrm>
           <a:prstGeom prst="chevron">
@@ -10436,13 +10699,11 @@
         </p:nvSpPr>
         <p:spPr>
           <a:xfrm>
-            <a:off x="3593592" y="2834640"/>
-            <a:ext cx="2450592" cy="1042416"/>
-          </a:xfrm>
-          <a:prstGeom prst="roundRect">
-            <a:avLst>
-              <a:gd name="adj" fmla="val 4386"/>
-            </a:avLst>
+            <a:off x="3506724" y="2834640"/>
+            <a:ext cx="2400300" cy="1042416"/>
+          </a:xfrm>
+          <a:prstGeom prst="rect">
+            <a:avLst/>
           </a:prstGeom>
           <a:solidFill>
             <a:srgbClr val="EAF3F7"/>
@@ -10463,8 +10724,8 @@
         </p:nvSpPr>
         <p:spPr>
           <a:xfrm>
-            <a:off x="3739896" y="3063240"/>
-            <a:ext cx="2157984" cy="548640"/>
+            <a:off x="3616452" y="3063240"/>
+            <a:ext cx="2180844" cy="548640"/>
           </a:xfrm>
           <a:prstGeom prst="rect">
             <a:avLst/>
@@ -10504,7 +10765,7 @@
         </p:nvSpPr>
         <p:spPr>
           <a:xfrm>
-            <a:off x="6181344" y="3209544"/>
+            <a:off x="6044184" y="3209544"/>
             <a:ext cx="182880" cy="292608"/>
           </a:xfrm>
           <a:prstGeom prst="chevron">
@@ -10529,13 +10790,11 @@
         </p:nvSpPr>
         <p:spPr>
           <a:xfrm>
-            <a:off x="6455664" y="2834640"/>
-            <a:ext cx="2450592" cy="1042416"/>
-          </a:xfrm>
-          <a:prstGeom prst="roundRect">
-            <a:avLst>
-              <a:gd name="adj" fmla="val 4386"/>
-            </a:avLst>
+            <a:off x="6318504" y="2834640"/>
+            <a:ext cx="2400300" cy="1042416"/>
+          </a:xfrm>
+          <a:prstGeom prst="rect">
+            <a:avLst/>
           </a:prstGeom>
           <a:solidFill>
             <a:srgbClr val="F3F6F8"/>
@@ -10556,8 +10815,8 @@
         </p:nvSpPr>
         <p:spPr>
           <a:xfrm>
-            <a:off x="6601968" y="3063240"/>
-            <a:ext cx="2157984" cy="548640"/>
+            <a:off x="6428232" y="3063240"/>
+            <a:ext cx="2180844" cy="548640"/>
           </a:xfrm>
           <a:prstGeom prst="rect">
             <a:avLst/>
@@ -10597,7 +10856,7 @@
         </p:nvSpPr>
         <p:spPr>
           <a:xfrm>
-            <a:off x="9043416" y="3209544"/>
+            <a:off x="8855964" y="3209544"/>
             <a:ext cx="182880" cy="292608"/>
           </a:xfrm>
           <a:prstGeom prst="chevron">
@@ -10622,13 +10881,11 @@
         </p:nvSpPr>
         <p:spPr>
           <a:xfrm>
-            <a:off x="9317736" y="2834640"/>
-            <a:ext cx="2450592" cy="1042416"/>
-          </a:xfrm>
-          <a:prstGeom prst="roundRect">
-            <a:avLst>
-              <a:gd name="adj" fmla="val 4386"/>
-            </a:avLst>
+            <a:off x="9130284" y="2834640"/>
+            <a:ext cx="2400300" cy="1042416"/>
+          </a:xfrm>
+          <a:prstGeom prst="rect">
+            <a:avLst/>
           </a:prstGeom>
           <a:solidFill>
             <a:srgbClr val="EAF3F7"/>
@@ -10649,8 +10906,8 @@
         </p:nvSpPr>
         <p:spPr>
           <a:xfrm>
-            <a:off x="9464040" y="3063240"/>
-            <a:ext cx="2157984" cy="548640"/>
+            <a:off x="9240012" y="3063240"/>
+            <a:ext cx="2180844" cy="548640"/>
           </a:xfrm>
           <a:prstGeom prst="rect">
             <a:avLst/>
@@ -10723,7 +10980,7 @@
         <p:spPr>
           <a:xfrm>
             <a:off x="0" y="0"/>
-            <a:ext cx="12191695" cy="155448"/>
+            <a:ext cx="12191695" cy="109728"/>
           </a:xfrm>
           <a:prstGeom prst="rect">
             <a:avLst/>
@@ -10747,7 +11004,7 @@
         </p:nvSpPr>
         <p:spPr>
           <a:xfrm>
-            <a:off x="566928" y="320040"/>
+            <a:off x="566928" y="310896"/>
             <a:ext cx="4663440" cy="182880"/>
           </a:xfrm>
           <a:prstGeom prst="rect">
@@ -10766,7 +11023,7 @@
               <a:buNone/>
             </a:pPr>
             <a:r>
-              <a:rPr lang="en-US" sz="900" b="1" spc="80" kern="0" dirty="0">
+              <a:rPr lang="en-US" sz="880" b="1" spc="50" kern="0" dirty="0">
                 <a:solidFill>
                   <a:srgbClr val="1877B9"/>
                 </a:solidFill>
@@ -10776,7 +11033,7 @@
               </a:rPr>
               <a:t>PROGRAMMING IN PYTHON</a:t>
             </a:r>
-            <a:endParaRPr lang="en-US" sz="900" dirty="0"/>
+            <a:endParaRPr lang="en-US" sz="880" dirty="0"/>
           </a:p>
         </p:txBody>
       </p:sp>
@@ -10788,7 +11045,7 @@
         </p:nvSpPr>
         <p:spPr>
           <a:xfrm>
-            <a:off x="9829800" y="320040"/>
+            <a:off x="9829800" y="310896"/>
             <a:ext cx="1783080" cy="182880"/>
           </a:xfrm>
           <a:prstGeom prst="rect">
@@ -10807,7 +11064,7 @@
               <a:buNone/>
             </a:pPr>
             <a:r>
-              <a:rPr lang="en-US" sz="900" b="1" dirty="0">
+              <a:rPr lang="en-US" sz="880" b="1" dirty="0">
                 <a:solidFill>
                   <a:srgbClr val="5E6B78"/>
                 </a:solidFill>
@@ -10817,7 +11074,7 @@
               </a:rPr>
               <a:t>LECTURE 03</a:t>
             </a:r>
-            <a:endParaRPr lang="en-US" sz="900" dirty="0"/>
+            <a:endParaRPr lang="en-US" sz="880" dirty="0"/>
           </a:p>
         </p:txBody>
       </p:sp>
@@ -10875,8 +11132,8 @@
         </p:nvSpPr>
         <p:spPr>
           <a:xfrm>
-            <a:off x="11109960" y="6501384"/>
-            <a:ext cx="457200" cy="146304"/>
+            <a:off x="10771632" y="6501384"/>
+            <a:ext cx="804672" cy="146304"/>
           </a:xfrm>
           <a:prstGeom prst="rect">
             <a:avLst/>
@@ -10894,7 +11151,7 @@
               <a:buNone/>
             </a:pPr>
             <a:r>
-              <a:rPr lang="en-US" sz="800" dirty="0">
+              <a:rPr lang="en-US" sz="780" dirty="0">
                 <a:solidFill>
                   <a:srgbClr val="5E6B78"/>
                 </a:solidFill>
@@ -10902,9 +11159,9 @@
                 <a:ea typeface="Consolas" pitchFamily="34" charset="-122"/>
                 <a:cs typeface="Consolas" pitchFamily="34" charset="-120"/>
               </a:rPr>
-              <a:t>23</a:t>
-            </a:r>
-            <a:endParaRPr lang="en-US" sz="800" dirty="0"/>
+              <a:t>23 / 24</a:t>
+            </a:r>
+            <a:endParaRPr lang="en-US" sz="780" dirty="0"/>
           </a:p>
         </p:txBody>
       </p:sp>
@@ -10916,8 +11173,8 @@
         </p:nvSpPr>
         <p:spPr>
           <a:xfrm>
-            <a:off x="658368" y="932688"/>
-            <a:ext cx="10789920" cy="713232"/>
+            <a:off x="658368" y="914400"/>
+            <a:ext cx="10881360" cy="713232"/>
           </a:xfrm>
           <a:prstGeom prst="rect">
             <a:avLst/>
@@ -10935,17 +11192,17 @@
               <a:buNone/>
             </a:pPr>
             <a:r>
-              <a:rPr lang="en-US" sz="2900" b="1" dirty="0">
+              <a:rPr lang="en-US" sz="2850" b="1" dirty="0">
                 <a:solidFill>
                   <a:srgbClr val="16324F"/>
                 </a:solidFill>
-                <a:latin typeface="Aptos" pitchFamily="34" charset="0"/>
-                <a:ea typeface="Aptos" pitchFamily="34" charset="-122"/>
-                <a:cs typeface="Aptos" pitchFamily="34" charset="-120"/>
+                <a:latin typeface="Aptos Display" pitchFamily="34" charset="0"/>
+                <a:ea typeface="Aptos Display" pitchFamily="34" charset="-122"/>
+                <a:cs typeface="Aptos Display" pitchFamily="34" charset="-120"/>
               </a:rPr>
               <a:t>A simple Canvas event</a:t>
             </a:r>
-            <a:endParaRPr lang="en-US" sz="2900" dirty="0"/>
+            <a:endParaRPr lang="en-US" sz="2850" dirty="0"/>
           </a:p>
         </p:txBody>
       </p:sp>
@@ -10958,19 +11215,17 @@
         <p:spPr>
           <a:xfrm>
             <a:off x="658368" y="1828800"/>
-            <a:ext cx="6812280" cy="4069080"/>
-          </a:xfrm>
-          <a:prstGeom prst="roundRect">
-            <a:avLst>
-              <a:gd name="adj" fmla="val 1348"/>
-            </a:avLst>
+            <a:ext cx="6903720" cy="4069080"/>
+          </a:xfrm>
+          <a:prstGeom prst="rect">
+            <a:avLst/>
           </a:prstGeom>
           <a:solidFill>
             <a:srgbClr val="17212B"/>
           </a:solidFill>
           <a:ln w="12700">
             <a:solidFill>
-              <a:srgbClr val="17212B"/>
+              <a:srgbClr val="243242"/>
             </a:solidFill>
             <a:prstDash val="solid"/>
           </a:ln>
@@ -10978,14 +11233,39 @@
       </p:sp>
       <p:sp>
         <p:nvSpPr>
-          <p:cNvPr id="10" name="Text 8"/>
-          <p:cNvSpPr/>
-          <p:nvPr/>
-        </p:nvSpPr>
-        <p:spPr>
-          <a:xfrm>
-            <a:off x="868680" y="2029968"/>
-            <a:ext cx="6309360" cy="182880"/>
+          <p:cNvPr id="10" name="Shape 8"/>
+          <p:cNvSpPr/>
+          <p:nvPr/>
+        </p:nvSpPr>
+        <p:spPr>
+          <a:xfrm>
+            <a:off x="658368" y="1828800"/>
+            <a:ext cx="6903720" cy="347472"/>
+          </a:xfrm>
+          <a:prstGeom prst="rect">
+            <a:avLst/>
+          </a:prstGeom>
+          <a:solidFill>
+            <a:srgbClr val="223044"/>
+          </a:solidFill>
+          <a:ln w="12700">
+            <a:solidFill>
+              <a:srgbClr val="223044"/>
+            </a:solidFill>
+            <a:prstDash val="solid"/>
+          </a:ln>
+        </p:spPr>
+      </p:sp>
+      <p:sp>
+        <p:nvSpPr>
+          <p:cNvPr id="11" name="Text 9"/>
+          <p:cNvSpPr/>
+          <p:nvPr/>
+        </p:nvSpPr>
+        <p:spPr>
+          <a:xfrm>
+            <a:off x="868680" y="1947672"/>
+            <a:ext cx="6309360" cy="146304"/>
           </a:xfrm>
           <a:prstGeom prst="rect">
             <a:avLst/>
@@ -11003,7 +11283,7 @@
               <a:buNone/>
             </a:pPr>
             <a:r>
-              <a:rPr lang="en-US" sz="850" b="1" spc="70" kern="0" dirty="0">
+              <a:rPr lang="en-US" sz="820" b="1" spc="35" kern="0" dirty="0">
                 <a:solidFill>
                   <a:srgbClr val="8FD3FF"/>
                 </a:solidFill>
@@ -11013,20 +11293,20 @@
               </a:rPr>
               <a:t>python</a:t>
             </a:r>
-            <a:endParaRPr lang="en-US" sz="850" dirty="0"/>
-          </a:p>
-        </p:txBody>
-      </p:sp>
-      <p:sp>
-        <p:nvSpPr>
-          <p:cNvPr id="11" name="Text 9"/>
-          <p:cNvSpPr/>
-          <p:nvPr/>
-        </p:nvSpPr>
-        <p:spPr>
-          <a:xfrm>
-            <a:off x="877824" y="2395728"/>
-            <a:ext cx="6327648" cy="3246120"/>
+            <a:endParaRPr lang="en-US" sz="820" dirty="0"/>
+          </a:p>
+        </p:txBody>
+      </p:sp>
+      <p:sp>
+        <p:nvSpPr>
+          <p:cNvPr id="12" name="Text 10"/>
+          <p:cNvSpPr/>
+          <p:nvPr/>
+        </p:nvSpPr>
+        <p:spPr>
+          <a:xfrm>
+            <a:off x="877824" y="2359152"/>
+            <a:ext cx="6382512" cy="3246120"/>
           </a:xfrm>
           <a:prstGeom prst="rect">
             <a:avLst/>
@@ -11044,7 +11324,7 @@
               <a:buNone/>
             </a:pPr>
             <a:r>
-              <a:rPr lang="en-US" sz="1650" dirty="0">
+              <a:rPr lang="en-US" sz="1500" dirty="0">
                 <a:solidFill>
                   <a:srgbClr val="F4F7FA"/>
                 </a:solidFill>
@@ -11054,20 +11334,20 @@
               </a:rPr>
               <a:t>canvas = tk.Canvas(root, width=360, height=180)</a:t>
             </a:r>
-            <a:endParaRPr lang="en-US" sz="1650" dirty="0"/>
-          </a:p>
-          <a:p>
-            <a:pPr algn="l" indent="0" marL="0">
-              <a:buNone/>
-            </a:pPr>
-            <a:endParaRPr lang="en-US" sz="1650" dirty="0"/>
-          </a:p>
-          <a:p>
-            <a:pPr algn="l" indent="0" marL="0">
-              <a:buNone/>
-            </a:pPr>
-            <a:r>
-              <a:rPr lang="en-US" sz="1650" dirty="0">
+            <a:endParaRPr lang="en-US" sz="1500" dirty="0"/>
+          </a:p>
+          <a:p>
+            <a:pPr algn="l" indent="0" marL="0">
+              <a:buNone/>
+            </a:pPr>
+            <a:endParaRPr lang="en-US" sz="1500" dirty="0"/>
+          </a:p>
+          <a:p>
+            <a:pPr algn="l" indent="0" marL="0">
+              <a:buNone/>
+            </a:pPr>
+            <a:r>
+              <a:rPr lang="en-US" sz="1500" dirty="0">
                 <a:solidFill>
                   <a:srgbClr val="F4F7FA"/>
                 </a:solidFill>
@@ -11077,14 +11357,14 @@
               </a:rPr>
               <a:t>def draw_circle(event: tk.Event) -&gt; None:</a:t>
             </a:r>
-            <a:endParaRPr lang="en-US" sz="1650" dirty="0"/>
-          </a:p>
-          <a:p>
-            <a:pPr algn="l" indent="0" marL="0">
-              <a:buNone/>
-            </a:pPr>
-            <a:r>
-              <a:rPr lang="en-US" sz="1650" dirty="0">
+            <a:endParaRPr lang="en-US" sz="1500" dirty="0"/>
+          </a:p>
+          <a:p>
+            <a:pPr algn="l" indent="0" marL="0">
+              <a:buNone/>
+            </a:pPr>
+            <a:r>
+              <a:rPr lang="en-US" sz="1500" dirty="0">
                 <a:solidFill>
                   <a:srgbClr val="F4F7FA"/>
                 </a:solidFill>
@@ -11094,14 +11374,14 @@
               </a:rPr>
               <a:t>    x, y = event.x, event.y</a:t>
             </a:r>
-            <a:endParaRPr lang="en-US" sz="1650" dirty="0"/>
-          </a:p>
-          <a:p>
-            <a:pPr algn="l" indent="0" marL="0">
-              <a:buNone/>
-            </a:pPr>
-            <a:r>
-              <a:rPr lang="en-US" sz="1650" dirty="0">
+            <a:endParaRPr lang="en-US" sz="1500" dirty="0"/>
+          </a:p>
+          <a:p>
+            <a:pPr algn="l" indent="0" marL="0">
+              <a:buNone/>
+            </a:pPr>
+            <a:r>
+              <a:rPr lang="en-US" sz="1500" dirty="0">
                 <a:solidFill>
                   <a:srgbClr val="F4F7FA"/>
                 </a:solidFill>
@@ -11111,20 +11391,20 @@
               </a:rPr>
               <a:t>    canvas.create_oval(x - 8, y - 8, x + 8, y + 8, fill="#1877B9")</a:t>
             </a:r>
-            <a:endParaRPr lang="en-US" sz="1650" dirty="0"/>
-          </a:p>
-          <a:p>
-            <a:pPr algn="l" indent="0" marL="0">
-              <a:buNone/>
-            </a:pPr>
-            <a:endParaRPr lang="en-US" sz="1650" dirty="0"/>
-          </a:p>
-          <a:p>
-            <a:pPr algn="l" indent="0" marL="0">
-              <a:buNone/>
-            </a:pPr>
-            <a:r>
-              <a:rPr lang="en-US" sz="1650" dirty="0">
+            <a:endParaRPr lang="en-US" sz="1500" dirty="0"/>
+          </a:p>
+          <a:p>
+            <a:pPr algn="l" indent="0" marL="0">
+              <a:buNone/>
+            </a:pPr>
+            <a:endParaRPr lang="en-US" sz="1500" dirty="0"/>
+          </a:p>
+          <a:p>
+            <a:pPr algn="l" indent="0" marL="0">
+              <a:buNone/>
+            </a:pPr>
+            <a:r>
+              <a:rPr lang="en-US" sz="1500" dirty="0">
                 <a:solidFill>
                   <a:srgbClr val="F4F7FA"/>
                 </a:solidFill>
@@ -11134,20 +11414,20 @@
               </a:rPr>
               <a:t>canvas.bind("&lt;Button-1&gt;", draw_circle)</a:t>
             </a:r>
-            <a:endParaRPr lang="en-US" sz="1650" dirty="0"/>
-          </a:p>
-        </p:txBody>
-      </p:sp>
-      <p:sp>
-        <p:nvSpPr>
-          <p:cNvPr id="12" name="Shape 10"/>
-          <p:cNvSpPr/>
-          <p:nvPr/>
-        </p:nvSpPr>
-        <p:spPr>
-          <a:xfrm>
-            <a:off x="7909560" y="1901952"/>
-            <a:ext cx="0" cy="3566160"/>
+            <a:endParaRPr lang="en-US" sz="1500" dirty="0"/>
+          </a:p>
+        </p:txBody>
+      </p:sp>
+      <p:sp>
+        <p:nvSpPr>
+          <p:cNvPr id="13" name="Shape 11"/>
+          <p:cNvSpPr/>
+          <p:nvPr/>
+        </p:nvSpPr>
+        <p:spPr>
+          <a:xfrm>
+            <a:off x="7936992" y="1883664"/>
+            <a:ext cx="0" cy="3639312"/>
           </a:xfrm>
           <a:prstGeom prst="line">
             <a:avLst/>
@@ -11163,14 +11443,14 @@
       </p:sp>
       <p:sp>
         <p:nvSpPr>
-          <p:cNvPr id="13" name="Text 11"/>
-          <p:cNvSpPr/>
-          <p:nvPr/>
-        </p:nvSpPr>
-        <p:spPr>
-          <a:xfrm>
-            <a:off x="8229600" y="2130552"/>
-            <a:ext cx="2743200" cy="2468880"/>
+          <p:cNvPr id="14" name="Text 12"/>
+          <p:cNvSpPr/>
+          <p:nvPr/>
+        </p:nvSpPr>
+        <p:spPr>
+          <a:xfrm>
+            <a:off x="8229600" y="2084832"/>
+            <a:ext cx="2816352" cy="2514600"/>
           </a:xfrm>
           <a:prstGeom prst="rect">
             <a:avLst/>
@@ -11188,7 +11468,7 @@
               <a:buNone/>
             </a:pPr>
             <a:r>
-              <a:rPr lang="en-US" sz="1800" dirty="0">
+              <a:rPr lang="en-US" sz="1720" dirty="0">
                 <a:solidFill>
                   <a:srgbClr val="5E6B78"/>
                 </a:solidFill>
@@ -11198,7 +11478,7 @@
               </a:rPr>
               <a:t>The event object carries event context. The same callback can respond to clicks at different positions.</a:t>
             </a:r>
-            <a:endParaRPr lang="en-US" sz="1800" dirty="0"/>
+            <a:endParaRPr lang="en-US" sz="1720" dirty="0"/>
           </a:p>
         </p:txBody>
       </p:sp>
@@ -11243,7 +11523,7 @@
         <p:spPr>
           <a:xfrm>
             <a:off x="0" y="0"/>
-            <a:ext cx="12191695" cy="155448"/>
+            <a:ext cx="12191695" cy="109728"/>
           </a:xfrm>
           <a:prstGeom prst="rect">
             <a:avLst/>
@@ -11267,7 +11547,7 @@
         </p:nvSpPr>
         <p:spPr>
           <a:xfrm>
-            <a:off x="566928" y="320040"/>
+            <a:off x="566928" y="310896"/>
             <a:ext cx="4663440" cy="182880"/>
           </a:xfrm>
           <a:prstGeom prst="rect">
@@ -11286,7 +11566,7 @@
               <a:buNone/>
             </a:pPr>
             <a:r>
-              <a:rPr lang="en-US" sz="900" b="1" spc="80" kern="0" dirty="0">
+              <a:rPr lang="en-US" sz="880" b="1" spc="50" kern="0" dirty="0">
                 <a:solidFill>
                   <a:srgbClr val="1877B9"/>
                 </a:solidFill>
@@ -11296,7 +11576,7 @@
               </a:rPr>
               <a:t>PROGRAMMING IN PYTHON</a:t>
             </a:r>
-            <a:endParaRPr lang="en-US" sz="900" dirty="0"/>
+            <a:endParaRPr lang="en-US" sz="880" dirty="0"/>
           </a:p>
         </p:txBody>
       </p:sp>
@@ -11308,7 +11588,7 @@
         </p:nvSpPr>
         <p:spPr>
           <a:xfrm>
-            <a:off x="9829800" y="320040"/>
+            <a:off x="9829800" y="310896"/>
             <a:ext cx="1783080" cy="182880"/>
           </a:xfrm>
           <a:prstGeom prst="rect">
@@ -11327,7 +11607,7 @@
               <a:buNone/>
             </a:pPr>
             <a:r>
-              <a:rPr lang="en-US" sz="900" b="1" dirty="0">
+              <a:rPr lang="en-US" sz="880" b="1" dirty="0">
                 <a:solidFill>
                   <a:srgbClr val="5E6B78"/>
                 </a:solidFill>
@@ -11337,7 +11617,7 @@
               </a:rPr>
               <a:t>LECTURE 03</a:t>
             </a:r>
-            <a:endParaRPr lang="en-US" sz="900" dirty="0"/>
+            <a:endParaRPr lang="en-US" sz="880" dirty="0"/>
           </a:p>
         </p:txBody>
       </p:sp>
@@ -11395,8 +11675,8 @@
         </p:nvSpPr>
         <p:spPr>
           <a:xfrm>
-            <a:off x="11109960" y="6501384"/>
-            <a:ext cx="457200" cy="146304"/>
+            <a:off x="10771632" y="6501384"/>
+            <a:ext cx="804672" cy="146304"/>
           </a:xfrm>
           <a:prstGeom prst="rect">
             <a:avLst/>
@@ -11414,7 +11694,7 @@
               <a:buNone/>
             </a:pPr>
             <a:r>
-              <a:rPr lang="en-US" sz="800" dirty="0">
+              <a:rPr lang="en-US" sz="780" dirty="0">
                 <a:solidFill>
                   <a:srgbClr val="5E6B78"/>
                 </a:solidFill>
@@ -11422,9 +11702,9 @@
                 <a:ea typeface="Consolas" pitchFamily="34" charset="-122"/>
                 <a:cs typeface="Consolas" pitchFamily="34" charset="-120"/>
               </a:rPr>
-              <a:t>24</a:t>
-            </a:r>
-            <a:endParaRPr lang="en-US" sz="800" dirty="0"/>
+              <a:t>24 / 24</a:t>
+            </a:r>
+            <a:endParaRPr lang="en-US" sz="780" dirty="0"/>
           </a:p>
         </p:txBody>
       </p:sp>
@@ -11436,8 +11716,8 @@
         </p:nvSpPr>
         <p:spPr>
           <a:xfrm>
-            <a:off x="658368" y="932688"/>
-            <a:ext cx="10789920" cy="713232"/>
+            <a:off x="658368" y="914400"/>
+            <a:ext cx="10881360" cy="713232"/>
           </a:xfrm>
           <a:prstGeom prst="rect">
             <a:avLst/>
@@ -11455,17 +11735,17 @@
               <a:buNone/>
             </a:pPr>
             <a:r>
-              <a:rPr lang="en-US" sz="2900" b="1" dirty="0">
+              <a:rPr lang="en-US" sz="2850" b="1" dirty="0">
                 <a:solidFill>
                   <a:srgbClr val="16324F"/>
                 </a:solidFill>
-                <a:latin typeface="Aptos" pitchFamily="34" charset="0"/>
-                <a:ea typeface="Aptos" pitchFamily="34" charset="-122"/>
-                <a:cs typeface="Aptos" pitchFamily="34" charset="-120"/>
+                <a:latin typeface="Aptos Display" pitchFamily="34" charset="0"/>
+                <a:ea typeface="Aptos Display" pitchFamily="34" charset="-122"/>
+                <a:cs typeface="Aptos Display" pitchFamily="34" charset="-120"/>
               </a:rPr>
               <a:t>Text Analyzer as a small application</a:t>
             </a:r>
-            <a:endParaRPr lang="en-US" sz="2900" dirty="0"/>
+            <a:endParaRPr lang="en-US" sz="2850" dirty="0"/>
           </a:p>
         </p:txBody>
       </p:sp>
@@ -11477,8 +11757,8 @@
         </p:nvSpPr>
         <p:spPr>
           <a:xfrm>
-            <a:off x="658368" y="1783080"/>
-            <a:ext cx="10899648" cy="4069080"/>
+            <a:off x="658368" y="1755648"/>
+            <a:ext cx="10899648" cy="4096512"/>
           </a:xfrm>
           <a:prstGeom prst="rect">
             <a:avLst/>
@@ -11488,7 +11768,7 @@
           </a:solidFill>
           <a:ln w="12700">
             <a:solidFill>
-              <a:srgbClr val="17212B"/>
+              <a:srgbClr val="243242"/>
             </a:solidFill>
             <a:prstDash val="solid"/>
           </a:ln>
@@ -11496,14 +11776,39 @@
       </p:sp>
       <p:sp>
         <p:nvSpPr>
-          <p:cNvPr id="10" name="Text 8"/>
-          <p:cNvSpPr/>
-          <p:nvPr/>
-        </p:nvSpPr>
-        <p:spPr>
-          <a:xfrm>
-            <a:off x="896112" y="1984248"/>
-            <a:ext cx="9966960" cy="182880"/>
+          <p:cNvPr id="10" name="Shape 8"/>
+          <p:cNvSpPr/>
+          <p:nvPr/>
+        </p:nvSpPr>
+        <p:spPr>
+          <a:xfrm>
+            <a:off x="658368" y="1755648"/>
+            <a:ext cx="10899648" cy="347472"/>
+          </a:xfrm>
+          <a:prstGeom prst="rect">
+            <a:avLst/>
+          </a:prstGeom>
+          <a:solidFill>
+            <a:srgbClr val="223044"/>
+          </a:solidFill>
+          <a:ln w="12700">
+            <a:solidFill>
+              <a:srgbClr val="223044"/>
+            </a:solidFill>
+            <a:prstDash val="solid"/>
+          </a:ln>
+        </p:spPr>
+      </p:sp>
+      <p:sp>
+        <p:nvSpPr>
+          <p:cNvPr id="11" name="Text 9"/>
+          <p:cNvSpPr/>
+          <p:nvPr/>
+        </p:nvSpPr>
+        <p:spPr>
+          <a:xfrm>
+            <a:off x="896112" y="1874520"/>
+            <a:ext cx="9966960" cy="146304"/>
           </a:xfrm>
           <a:prstGeom prst="rect">
             <a:avLst/>
@@ -11521,7 +11826,7 @@
               <a:buNone/>
             </a:pPr>
             <a:r>
-              <a:rPr lang="en-US" sz="850" b="1" spc="70" kern="0" dirty="0">
+              <a:rPr lang="en-US" sz="820" b="1" spc="35" kern="0" dirty="0">
                 <a:solidFill>
                   <a:srgbClr val="8FD3FF"/>
                 </a:solidFill>
@@ -11531,20 +11836,20 @@
               </a:rPr>
               <a:t>text</a:t>
             </a:r>
-            <a:endParaRPr lang="en-US" sz="850" dirty="0"/>
-          </a:p>
-        </p:txBody>
-      </p:sp>
-      <p:sp>
-        <p:nvSpPr>
-          <p:cNvPr id="11" name="Text 9"/>
-          <p:cNvSpPr/>
-          <p:nvPr/>
-        </p:nvSpPr>
-        <p:spPr>
-          <a:xfrm>
-            <a:off x="896112" y="2395728"/>
-            <a:ext cx="9893808" cy="3063240"/>
+            <a:endParaRPr lang="en-US" sz="820" dirty="0"/>
+          </a:p>
+        </p:txBody>
+      </p:sp>
+      <p:sp>
+        <p:nvSpPr>
+          <p:cNvPr id="12" name="Text 10"/>
+          <p:cNvSpPr/>
+          <p:nvPr/>
+        </p:nvSpPr>
+        <p:spPr>
+          <a:xfrm>
+            <a:off x="896112" y="2304288"/>
+            <a:ext cx="9921240" cy="3127248"/>
           </a:xfrm>
           <a:prstGeom prst="rect">
             <a:avLst/>
@@ -11562,7 +11867,7 @@
               <a:buNone/>
             </a:pPr>
             <a:r>
-              <a:rPr lang="en-US" sz="1750" dirty="0">
+              <a:rPr lang="en-US" sz="1500" dirty="0">
                 <a:solidFill>
                   <a:srgbClr val="F4F7FA"/>
                 </a:solidFill>
@@ -11572,14 +11877,14 @@
               </a:rPr>
               <a:t>ui.py</a:t>
             </a:r>
-            <a:endParaRPr lang="en-US" sz="1750" dirty="0"/>
-          </a:p>
-          <a:p>
-            <a:pPr algn="l" indent="0" marL="0">
-              <a:buNone/>
-            </a:pPr>
-            <a:r>
-              <a:rPr lang="en-US" sz="1750" dirty="0">
+            <a:endParaRPr lang="en-US" sz="1500" dirty="0"/>
+          </a:p>
+          <a:p>
+            <a:pPr algn="l" indent="0" marL="0">
+              <a:buNone/>
+            </a:pPr>
+            <a:r>
+              <a:rPr lang="en-US" sz="1500" dirty="0">
                 <a:solidFill>
                   <a:srgbClr val="F4F7FA"/>
                 </a:solidFill>
@@ -11589,14 +11894,14 @@
               </a:rPr>
               <a:t>├── vytvorí widgety</a:t>
             </a:r>
-            <a:endParaRPr lang="en-US" sz="1750" dirty="0"/>
-          </a:p>
-          <a:p>
-            <a:pPr algn="l" indent="0" marL="0">
-              <a:buNone/>
-            </a:pPr>
-            <a:r>
-              <a:rPr lang="en-US" sz="1750" dirty="0">
+            <a:endParaRPr lang="en-US" sz="1500" dirty="0"/>
+          </a:p>
+          <a:p>
+            <a:pPr algn="l" indent="0" marL="0">
+              <a:buNone/>
+            </a:pPr>
+            <a:r>
+              <a:rPr lang="en-US" sz="1500" dirty="0">
                 <a:solidFill>
                   <a:srgbClr val="F4F7FA"/>
                 </a:solidFill>
@@ -11606,14 +11911,14 @@
               </a:rPr>
               <a:t>├── spracuje eventy</a:t>
             </a:r>
-            <a:endParaRPr lang="en-US" sz="1750" dirty="0"/>
-          </a:p>
-          <a:p>
-            <a:pPr algn="l" indent="0" marL="0">
-              <a:buNone/>
-            </a:pPr>
-            <a:r>
-              <a:rPr lang="en-US" sz="1750" dirty="0">
+            <a:endParaRPr lang="en-US" sz="1500" dirty="0"/>
+          </a:p>
+          <a:p>
+            <a:pPr algn="l" indent="0" marL="0">
+              <a:buNone/>
+            </a:pPr>
+            <a:r>
+              <a:rPr lang="en-US" sz="1500" dirty="0">
                 <a:solidFill>
                   <a:srgbClr val="F4F7FA"/>
                 </a:solidFill>
@@ -11623,20 +11928,20 @@
               </a:rPr>
               <a:t>└── zobrazí výsledok</a:t>
             </a:r>
-            <a:endParaRPr lang="en-US" sz="1750" dirty="0"/>
-          </a:p>
-          <a:p>
-            <a:pPr algn="l" indent="0" marL="0">
-              <a:buNone/>
-            </a:pPr>
-            <a:endParaRPr lang="en-US" sz="1750" dirty="0"/>
-          </a:p>
-          <a:p>
-            <a:pPr algn="l" indent="0" marL="0">
-              <a:buNone/>
-            </a:pPr>
-            <a:r>
-              <a:rPr lang="en-US" sz="1750" dirty="0">
+            <a:endParaRPr lang="en-US" sz="1500" dirty="0"/>
+          </a:p>
+          <a:p>
+            <a:pPr algn="l" indent="0" marL="0">
+              <a:buNone/>
+            </a:pPr>
+            <a:endParaRPr lang="en-US" sz="1500" dirty="0"/>
+          </a:p>
+          <a:p>
+            <a:pPr algn="l" indent="0" marL="0">
+              <a:buNone/>
+            </a:pPr>
+            <a:r>
+              <a:rPr lang="en-US" sz="1500" dirty="0">
                 <a:solidFill>
                   <a:srgbClr val="F4F7FA"/>
                 </a:solidFill>
@@ -11646,14 +11951,14 @@
               </a:rPr>
               <a:t>analysis.py</a:t>
             </a:r>
-            <a:endParaRPr lang="en-US" sz="1750" dirty="0"/>
-          </a:p>
-          <a:p>
-            <a:pPr algn="l" indent="0" marL="0">
-              <a:buNone/>
-            </a:pPr>
-            <a:r>
-              <a:rPr lang="en-US" sz="1750" dirty="0">
+            <a:endParaRPr lang="en-US" sz="1500" dirty="0"/>
+          </a:p>
+          <a:p>
+            <a:pPr algn="l" indent="0" marL="0">
+              <a:buNone/>
+            </a:pPr>
+            <a:r>
+              <a:rPr lang="en-US" sz="1500" dirty="0">
                 <a:solidFill>
                   <a:srgbClr val="F4F7FA"/>
                 </a:solidFill>
@@ -11663,14 +11968,14 @@
               </a:rPr>
               <a:t>├── TextStats</a:t>
             </a:r>
-            <a:endParaRPr lang="en-US" sz="1750" dirty="0"/>
-          </a:p>
-          <a:p>
-            <a:pPr algn="l" indent="0" marL="0">
-              <a:buNone/>
-            </a:pPr>
-            <a:r>
-              <a:rPr lang="en-US" sz="1750" dirty="0">
+            <a:endParaRPr lang="en-US" sz="1500" dirty="0"/>
+          </a:p>
+          <a:p>
+            <a:pPr algn="l" indent="0" marL="0">
+              <a:buNone/>
+            </a:pPr>
+            <a:r>
+              <a:rPr lang="en-US" sz="1500" dirty="0">
                 <a:solidFill>
                   <a:srgbClr val="F4F7FA"/>
                 </a:solidFill>
@@ -11680,20 +11985,20 @@
               </a:rPr>
               <a:t>└── analyze_text()</a:t>
             </a:r>
-            <a:endParaRPr lang="en-US" sz="1750" dirty="0"/>
-          </a:p>
-          <a:p>
-            <a:pPr algn="l" indent="0" marL="0">
-              <a:buNone/>
-            </a:pPr>
-            <a:endParaRPr lang="en-US" sz="1750" dirty="0"/>
-          </a:p>
-          <a:p>
-            <a:pPr algn="l" indent="0" marL="0">
-              <a:buNone/>
-            </a:pPr>
-            <a:r>
-              <a:rPr lang="en-US" sz="1750" dirty="0">
+            <a:endParaRPr lang="en-US" sz="1500" dirty="0"/>
+          </a:p>
+          <a:p>
+            <a:pPr algn="l" indent="0" marL="0">
+              <a:buNone/>
+            </a:pPr>
+            <a:endParaRPr lang="en-US" sz="1500" dirty="0"/>
+          </a:p>
+          <a:p>
+            <a:pPr algn="l" indent="0" marL="0">
+              <a:buNone/>
+            </a:pPr>
+            <a:r>
+              <a:rPr lang="en-US" sz="1500" dirty="0">
                 <a:solidFill>
                   <a:srgbClr val="F4F7FA"/>
                 </a:solidFill>
@@ -11703,14 +12008,14 @@
               </a:rPr>
               <a:t>files.py</a:t>
             </a:r>
-            <a:endParaRPr lang="en-US" sz="1750" dirty="0"/>
-          </a:p>
-          <a:p>
-            <a:pPr algn="l" indent="0" marL="0">
-              <a:buNone/>
-            </a:pPr>
-            <a:r>
-              <a:rPr lang="en-US" sz="1750" dirty="0">
+            <a:endParaRPr lang="en-US" sz="1500" dirty="0"/>
+          </a:p>
+          <a:p>
+            <a:pPr algn="l" indent="0" marL="0">
+              <a:buNone/>
+            </a:pPr>
+            <a:r>
+              <a:rPr lang="en-US" sz="1500" dirty="0">
                 <a:solidFill>
                   <a:srgbClr val="F4F7FA"/>
                 </a:solidFill>
@@ -11720,20 +12025,20 @@
               </a:rPr>
               <a:t>└── načíta text cez Path</a:t>
             </a:r>
-            <a:endParaRPr lang="en-US" sz="1750" dirty="0"/>
-          </a:p>
-        </p:txBody>
-      </p:sp>
-      <p:sp>
-        <p:nvSpPr>
-          <p:cNvPr id="12" name="Text 10"/>
+            <a:endParaRPr lang="en-US" sz="1500" dirty="0"/>
+          </a:p>
+        </p:txBody>
+      </p:sp>
+      <p:sp>
+        <p:nvSpPr>
+          <p:cNvPr id="13" name="Text 11"/>
           <p:cNvSpPr/>
           <p:nvPr/>
         </p:nvSpPr>
         <p:spPr>
           <a:xfrm>
             <a:off x="768096" y="6053328"/>
-            <a:ext cx="9921240" cy="237744"/>
+            <a:ext cx="9921240" cy="256032"/>
           </a:xfrm>
           <a:prstGeom prst="rect">
             <a:avLst/>
@@ -11751,7 +12056,7 @@
               <a:buNone/>
             </a:pPr>
             <a:r>
-              <a:rPr lang="en-US" sz="1550" dirty="0">
+              <a:rPr lang="en-US" sz="1520" dirty="0">
                 <a:solidFill>
                   <a:srgbClr val="5E6B78"/>
                 </a:solidFill>
@@ -11761,7 +12066,7 @@
               </a:rPr>
               <a:t>GUI, logic and file access have different reasons to change. Even a small program gains clearer boundaries.</a:t>
             </a:r>
-            <a:endParaRPr lang="en-US" sz="1550" dirty="0"/>
+            <a:endParaRPr lang="en-US" sz="1520" dirty="0"/>
           </a:p>
         </p:txBody>
       </p:sp>
@@ -11806,7 +12111,7 @@
         <p:spPr>
           <a:xfrm>
             <a:off x="0" y="0"/>
-            <a:ext cx="12191695" cy="155448"/>
+            <a:ext cx="12191695" cy="109728"/>
           </a:xfrm>
           <a:prstGeom prst="rect">
             <a:avLst/>
@@ -11830,7 +12135,7 @@
         </p:nvSpPr>
         <p:spPr>
           <a:xfrm>
-            <a:off x="566928" y="320040"/>
+            <a:off x="566928" y="310896"/>
             <a:ext cx="4663440" cy="182880"/>
           </a:xfrm>
           <a:prstGeom prst="rect">
@@ -11849,7 +12154,7 @@
               <a:buNone/>
             </a:pPr>
             <a:r>
-              <a:rPr lang="en-US" sz="900" b="1" spc="80" kern="0" dirty="0">
+              <a:rPr lang="en-US" sz="880" b="1" spc="50" kern="0" dirty="0">
                 <a:solidFill>
                   <a:srgbClr val="1877B9"/>
                 </a:solidFill>
@@ -11859,7 +12164,7 @@
               </a:rPr>
               <a:t>PROGRAMMING IN PYTHON</a:t>
             </a:r>
-            <a:endParaRPr lang="en-US" sz="900" dirty="0"/>
+            <a:endParaRPr lang="en-US" sz="880" dirty="0"/>
           </a:p>
         </p:txBody>
       </p:sp>
@@ -11871,7 +12176,7 @@
         </p:nvSpPr>
         <p:spPr>
           <a:xfrm>
-            <a:off x="9829800" y="320040"/>
+            <a:off x="9829800" y="310896"/>
             <a:ext cx="1783080" cy="182880"/>
           </a:xfrm>
           <a:prstGeom prst="rect">
@@ -11890,7 +12195,7 @@
               <a:buNone/>
             </a:pPr>
             <a:r>
-              <a:rPr lang="en-US" sz="900" b="1" dirty="0">
+              <a:rPr lang="en-US" sz="880" b="1" dirty="0">
                 <a:solidFill>
                   <a:srgbClr val="5E6B78"/>
                 </a:solidFill>
@@ -11900,7 +12205,7 @@
               </a:rPr>
               <a:t>LECTURE 03</a:t>
             </a:r>
-            <a:endParaRPr lang="en-US" sz="900" dirty="0"/>
+            <a:endParaRPr lang="en-US" sz="880" dirty="0"/>
           </a:p>
         </p:txBody>
       </p:sp>
@@ -11958,8 +12263,8 @@
         </p:nvSpPr>
         <p:spPr>
           <a:xfrm>
-            <a:off x="11109960" y="6501384"/>
-            <a:ext cx="457200" cy="146304"/>
+            <a:off x="10771632" y="6501384"/>
+            <a:ext cx="804672" cy="146304"/>
           </a:xfrm>
           <a:prstGeom prst="rect">
             <a:avLst/>
@@ -11977,7 +12282,7 @@
               <a:buNone/>
             </a:pPr>
             <a:r>
-              <a:rPr lang="en-US" sz="800" dirty="0">
+              <a:rPr lang="en-US" sz="780" dirty="0">
                 <a:solidFill>
                   <a:srgbClr val="5E6B78"/>
                 </a:solidFill>
@@ -11985,9 +12290,9 @@
                 <a:ea typeface="Consolas" pitchFamily="34" charset="-122"/>
                 <a:cs typeface="Consolas" pitchFamily="34" charset="-120"/>
               </a:rPr>
-              <a:t>03</a:t>
-            </a:r>
-            <a:endParaRPr lang="en-US" sz="800" dirty="0"/>
+              <a:t>03 / 24</a:t>
+            </a:r>
+            <a:endParaRPr lang="en-US" sz="780" dirty="0"/>
           </a:p>
         </p:txBody>
       </p:sp>
@@ -11999,8 +12304,8 @@
         </p:nvSpPr>
         <p:spPr>
           <a:xfrm>
-            <a:off x="658368" y="932688"/>
-            <a:ext cx="10789920" cy="713232"/>
+            <a:off x="658368" y="914400"/>
+            <a:ext cx="10881360" cy="713232"/>
           </a:xfrm>
           <a:prstGeom prst="rect">
             <a:avLst/>
@@ -12018,17 +12323,17 @@
               <a:buNone/>
             </a:pPr>
             <a:r>
-              <a:rPr lang="en-US" sz="2900" b="1" dirty="0">
+              <a:rPr lang="en-US" sz="2850" b="1" dirty="0">
                 <a:solidFill>
                   <a:srgbClr val="16324F"/>
                 </a:solidFill>
-                <a:latin typeface="Aptos" pitchFamily="34" charset="0"/>
-                <a:ea typeface="Aptos" pitchFamily="34" charset="-122"/>
-                <a:cs typeface="Aptos" pitchFamily="34" charset="-120"/>
+                <a:latin typeface="Aptos Display" pitchFamily="34" charset="0"/>
+                <a:ea typeface="Aptos Display" pitchFamily="34" charset="-122"/>
+                <a:cs typeface="Aptos Display" pitchFamily="34" charset="-120"/>
               </a:rPr>
               <a:t>The event loop keeps an application alive</a:t>
             </a:r>
-            <a:endParaRPr lang="en-US" sz="2900" dirty="0"/>
+            <a:endParaRPr lang="en-US" sz="2850" dirty="0"/>
           </a:p>
         </p:txBody>
       </p:sp>
@@ -12040,13 +12345,11 @@
         </p:nvSpPr>
         <p:spPr>
           <a:xfrm>
-            <a:off x="731520" y="2834640"/>
-            <a:ext cx="2450592" cy="1042416"/>
-          </a:xfrm>
-          <a:prstGeom prst="roundRect">
-            <a:avLst>
-              <a:gd name="adj" fmla="val 4386"/>
-            </a:avLst>
+            <a:off x="694944" y="2834640"/>
+            <a:ext cx="2400300" cy="1042416"/>
+          </a:xfrm>
+          <a:prstGeom prst="rect">
+            <a:avLst/>
           </a:prstGeom>
           <a:solidFill>
             <a:srgbClr val="F3F6F8"/>
@@ -12067,8 +12370,8 @@
         </p:nvSpPr>
         <p:spPr>
           <a:xfrm>
-            <a:off x="877824" y="3063240"/>
-            <a:ext cx="2157984" cy="548640"/>
+            <a:off x="804672" y="3063240"/>
+            <a:ext cx="2180844" cy="548640"/>
           </a:xfrm>
           <a:prstGeom prst="rect">
             <a:avLst/>
@@ -12108,7 +12411,7 @@
         </p:nvSpPr>
         <p:spPr>
           <a:xfrm>
-            <a:off x="3319272" y="3209544"/>
+            <a:off x="3232404" y="3209544"/>
             <a:ext cx="182880" cy="292608"/>
           </a:xfrm>
           <a:prstGeom prst="chevron">
@@ -12133,13 +12436,11 @@
         </p:nvSpPr>
         <p:spPr>
           <a:xfrm>
-            <a:off x="3593592" y="2834640"/>
-            <a:ext cx="2450592" cy="1042416"/>
-          </a:xfrm>
-          <a:prstGeom prst="roundRect">
-            <a:avLst>
-              <a:gd name="adj" fmla="val 4386"/>
-            </a:avLst>
+            <a:off x="3506724" y="2834640"/>
+            <a:ext cx="2400300" cy="1042416"/>
+          </a:xfrm>
+          <a:prstGeom prst="rect">
+            <a:avLst/>
           </a:prstGeom>
           <a:solidFill>
             <a:srgbClr val="EAF3F7"/>
@@ -12160,8 +12461,8 @@
         </p:nvSpPr>
         <p:spPr>
           <a:xfrm>
-            <a:off x="3739896" y="3063240"/>
-            <a:ext cx="2157984" cy="548640"/>
+            <a:off x="3616452" y="3063240"/>
+            <a:ext cx="2180844" cy="548640"/>
           </a:xfrm>
           <a:prstGeom prst="rect">
             <a:avLst/>
@@ -12201,7 +12502,7 @@
         </p:nvSpPr>
         <p:spPr>
           <a:xfrm>
-            <a:off x="6181344" y="3209544"/>
+            <a:off x="6044184" y="3209544"/>
             <a:ext cx="182880" cy="292608"/>
           </a:xfrm>
           <a:prstGeom prst="chevron">
@@ -12226,13 +12527,11 @@
         </p:nvSpPr>
         <p:spPr>
           <a:xfrm>
-            <a:off x="6455664" y="2834640"/>
-            <a:ext cx="2450592" cy="1042416"/>
-          </a:xfrm>
-          <a:prstGeom prst="roundRect">
-            <a:avLst>
-              <a:gd name="adj" fmla="val 4386"/>
-            </a:avLst>
+            <a:off x="6318504" y="2834640"/>
+            <a:ext cx="2400300" cy="1042416"/>
+          </a:xfrm>
+          <a:prstGeom prst="rect">
+            <a:avLst/>
           </a:prstGeom>
           <a:solidFill>
             <a:srgbClr val="F3F6F8"/>
@@ -12253,8 +12552,8 @@
         </p:nvSpPr>
         <p:spPr>
           <a:xfrm>
-            <a:off x="6601968" y="3063240"/>
-            <a:ext cx="2157984" cy="548640"/>
+            <a:off x="6428232" y="3063240"/>
+            <a:ext cx="2180844" cy="548640"/>
           </a:xfrm>
           <a:prstGeom prst="rect">
             <a:avLst/>
@@ -12294,7 +12593,7 @@
         </p:nvSpPr>
         <p:spPr>
           <a:xfrm>
-            <a:off x="9043416" y="3209544"/>
+            <a:off x="8855964" y="3209544"/>
             <a:ext cx="182880" cy="292608"/>
           </a:xfrm>
           <a:prstGeom prst="chevron">
@@ -12319,13 +12618,11 @@
         </p:nvSpPr>
         <p:spPr>
           <a:xfrm>
-            <a:off x="9317736" y="2834640"/>
-            <a:ext cx="2450592" cy="1042416"/>
-          </a:xfrm>
-          <a:prstGeom prst="roundRect">
-            <a:avLst>
-              <a:gd name="adj" fmla="val 4386"/>
-            </a:avLst>
+            <a:off x="9130284" y="2834640"/>
+            <a:ext cx="2400300" cy="1042416"/>
+          </a:xfrm>
+          <a:prstGeom prst="rect">
+            <a:avLst/>
           </a:prstGeom>
           <a:solidFill>
             <a:srgbClr val="EAF3F7"/>
@@ -12346,8 +12643,8 @@
         </p:nvSpPr>
         <p:spPr>
           <a:xfrm>
-            <a:off x="9464040" y="3063240"/>
-            <a:ext cx="2157984" cy="548640"/>
+            <a:off x="9240012" y="3063240"/>
+            <a:ext cx="2180844" cy="548640"/>
           </a:xfrm>
           <a:prstGeom prst="rect">
             <a:avLst/>
@@ -12420,7 +12717,7 @@
         <p:spPr>
           <a:xfrm>
             <a:off x="0" y="0"/>
-            <a:ext cx="12191695" cy="155448"/>
+            <a:ext cx="12191695" cy="109728"/>
           </a:xfrm>
           <a:prstGeom prst="rect">
             <a:avLst/>
@@ -12444,7 +12741,7 @@
         </p:nvSpPr>
         <p:spPr>
           <a:xfrm>
-            <a:off x="566928" y="320040"/>
+            <a:off x="566928" y="310896"/>
             <a:ext cx="4663440" cy="182880"/>
           </a:xfrm>
           <a:prstGeom prst="rect">
@@ -12463,7 +12760,7 @@
               <a:buNone/>
             </a:pPr>
             <a:r>
-              <a:rPr lang="en-US" sz="900" b="1" spc="80" kern="0" dirty="0">
+              <a:rPr lang="en-US" sz="880" b="1" spc="50" kern="0" dirty="0">
                 <a:solidFill>
                   <a:srgbClr val="1877B9"/>
                 </a:solidFill>
@@ -12473,7 +12770,7 @@
               </a:rPr>
               <a:t>PROGRAMMING IN PYTHON</a:t>
             </a:r>
-            <a:endParaRPr lang="en-US" sz="900" dirty="0"/>
+            <a:endParaRPr lang="en-US" sz="880" dirty="0"/>
           </a:p>
         </p:txBody>
       </p:sp>
@@ -12485,7 +12782,7 @@
         </p:nvSpPr>
         <p:spPr>
           <a:xfrm>
-            <a:off x="9829800" y="320040"/>
+            <a:off x="9829800" y="310896"/>
             <a:ext cx="1783080" cy="182880"/>
           </a:xfrm>
           <a:prstGeom prst="rect">
@@ -12504,7 +12801,7 @@
               <a:buNone/>
             </a:pPr>
             <a:r>
-              <a:rPr lang="en-US" sz="900" b="1" dirty="0">
+              <a:rPr lang="en-US" sz="880" b="1" dirty="0">
                 <a:solidFill>
                   <a:srgbClr val="5E6B78"/>
                 </a:solidFill>
@@ -12514,7 +12811,7 @@
               </a:rPr>
               <a:t>LECTURE 03</a:t>
             </a:r>
-            <a:endParaRPr lang="en-US" sz="900" dirty="0"/>
+            <a:endParaRPr lang="en-US" sz="880" dirty="0"/>
           </a:p>
         </p:txBody>
       </p:sp>
@@ -12572,8 +12869,8 @@
         </p:nvSpPr>
         <p:spPr>
           <a:xfrm>
-            <a:off x="11109960" y="6501384"/>
-            <a:ext cx="457200" cy="146304"/>
+            <a:off x="10771632" y="6501384"/>
+            <a:ext cx="804672" cy="146304"/>
           </a:xfrm>
           <a:prstGeom prst="rect">
             <a:avLst/>
@@ -12591,7 +12888,7 @@
               <a:buNone/>
             </a:pPr>
             <a:r>
-              <a:rPr lang="en-US" sz="800" dirty="0">
+              <a:rPr lang="en-US" sz="780" dirty="0">
                 <a:solidFill>
                   <a:srgbClr val="5E6B78"/>
                 </a:solidFill>
@@ -12599,9 +12896,9 @@
                 <a:ea typeface="Consolas" pitchFamily="34" charset="-122"/>
                 <a:cs typeface="Consolas" pitchFamily="34" charset="-120"/>
               </a:rPr>
-              <a:t>04</a:t>
-            </a:r>
-            <a:endParaRPr lang="en-US" sz="800" dirty="0"/>
+              <a:t>04 / 24</a:t>
+            </a:r>
+            <a:endParaRPr lang="en-US" sz="780" dirty="0"/>
           </a:p>
         </p:txBody>
       </p:sp>
@@ -12613,8 +12910,8 @@
         </p:nvSpPr>
         <p:spPr>
           <a:xfrm>
-            <a:off x="658368" y="932688"/>
-            <a:ext cx="10789920" cy="713232"/>
+            <a:off x="658368" y="914400"/>
+            <a:ext cx="10881360" cy="713232"/>
           </a:xfrm>
           <a:prstGeom prst="rect">
             <a:avLst/>
@@ -12632,17 +12929,17 @@
               <a:buNone/>
             </a:pPr>
             <a:r>
-              <a:rPr lang="en-US" sz="2900" b="1" dirty="0">
+              <a:rPr lang="en-US" sz="2850" b="1" dirty="0">
                 <a:solidFill>
                   <a:srgbClr val="16324F"/>
                 </a:solidFill>
-                <a:latin typeface="Aptos" pitchFamily="34" charset="0"/>
-                <a:ea typeface="Aptos" pitchFamily="34" charset="-122"/>
-                <a:cs typeface="Aptos" pitchFamily="34" charset="-120"/>
+                <a:latin typeface="Aptos Display" pitchFamily="34" charset="0"/>
+                <a:ea typeface="Aptos Display" pitchFamily="34" charset="-122"/>
+                <a:cs typeface="Aptos Display" pitchFamily="34" charset="-120"/>
               </a:rPr>
               <a:t>The smallest working window</a:t>
             </a:r>
-            <a:endParaRPr lang="en-US" sz="2900" dirty="0"/>
+            <a:endParaRPr lang="en-US" sz="2850" dirty="0"/>
           </a:p>
         </p:txBody>
       </p:sp>
@@ -12655,19 +12952,17 @@
         <p:spPr>
           <a:xfrm>
             <a:off x="658368" y="1828800"/>
-            <a:ext cx="6812280" cy="4069080"/>
-          </a:xfrm>
-          <a:prstGeom prst="roundRect">
-            <a:avLst>
-              <a:gd name="adj" fmla="val 1348"/>
-            </a:avLst>
+            <a:ext cx="6903720" cy="4069080"/>
+          </a:xfrm>
+          <a:prstGeom prst="rect">
+            <a:avLst/>
           </a:prstGeom>
           <a:solidFill>
             <a:srgbClr val="17212B"/>
           </a:solidFill>
           <a:ln w="12700">
             <a:solidFill>
-              <a:srgbClr val="17212B"/>
+              <a:srgbClr val="243242"/>
             </a:solidFill>
             <a:prstDash val="solid"/>
           </a:ln>
@@ -12675,14 +12970,39 @@
       </p:sp>
       <p:sp>
         <p:nvSpPr>
-          <p:cNvPr id="10" name="Text 8"/>
-          <p:cNvSpPr/>
-          <p:nvPr/>
-        </p:nvSpPr>
-        <p:spPr>
-          <a:xfrm>
-            <a:off x="868680" y="2029968"/>
-            <a:ext cx="6309360" cy="182880"/>
+          <p:cNvPr id="10" name="Shape 8"/>
+          <p:cNvSpPr/>
+          <p:nvPr/>
+        </p:nvSpPr>
+        <p:spPr>
+          <a:xfrm>
+            <a:off x="658368" y="1828800"/>
+            <a:ext cx="6903720" cy="347472"/>
+          </a:xfrm>
+          <a:prstGeom prst="rect">
+            <a:avLst/>
+          </a:prstGeom>
+          <a:solidFill>
+            <a:srgbClr val="223044"/>
+          </a:solidFill>
+          <a:ln w="12700">
+            <a:solidFill>
+              <a:srgbClr val="223044"/>
+            </a:solidFill>
+            <a:prstDash val="solid"/>
+          </a:ln>
+        </p:spPr>
+      </p:sp>
+      <p:sp>
+        <p:nvSpPr>
+          <p:cNvPr id="11" name="Text 9"/>
+          <p:cNvSpPr/>
+          <p:nvPr/>
+        </p:nvSpPr>
+        <p:spPr>
+          <a:xfrm>
+            <a:off x="868680" y="1947672"/>
+            <a:ext cx="6309360" cy="146304"/>
           </a:xfrm>
           <a:prstGeom prst="rect">
             <a:avLst/>
@@ -12700,7 +13020,7 @@
               <a:buNone/>
             </a:pPr>
             <a:r>
-              <a:rPr lang="en-US" sz="850" b="1" spc="70" kern="0" dirty="0">
+              <a:rPr lang="en-US" sz="820" b="1" spc="35" kern="0" dirty="0">
                 <a:solidFill>
                   <a:srgbClr val="8FD3FF"/>
                 </a:solidFill>
@@ -12710,20 +13030,20 @@
               </a:rPr>
               <a:t>python</a:t>
             </a:r>
-            <a:endParaRPr lang="en-US" sz="850" dirty="0"/>
-          </a:p>
-        </p:txBody>
-      </p:sp>
-      <p:sp>
-        <p:nvSpPr>
-          <p:cNvPr id="11" name="Text 9"/>
-          <p:cNvSpPr/>
-          <p:nvPr/>
-        </p:nvSpPr>
-        <p:spPr>
-          <a:xfrm>
-            <a:off x="877824" y="2395728"/>
-            <a:ext cx="6327648" cy="3246120"/>
+            <a:endParaRPr lang="en-US" sz="820" dirty="0"/>
+          </a:p>
+        </p:txBody>
+      </p:sp>
+      <p:sp>
+        <p:nvSpPr>
+          <p:cNvPr id="12" name="Text 10"/>
+          <p:cNvSpPr/>
+          <p:nvPr/>
+        </p:nvSpPr>
+        <p:spPr>
+          <a:xfrm>
+            <a:off x="877824" y="2359152"/>
+            <a:ext cx="6382512" cy="3246120"/>
           </a:xfrm>
           <a:prstGeom prst="rect">
             <a:avLst/>
@@ -12741,7 +13061,7 @@
               <a:buNone/>
             </a:pPr>
             <a:r>
-              <a:rPr lang="en-US" sz="1650" dirty="0">
+              <a:rPr lang="en-US" sz="1600" dirty="0">
                 <a:solidFill>
                   <a:srgbClr val="F4F7FA"/>
                 </a:solidFill>
@@ -12751,20 +13071,20 @@
               </a:rPr>
               <a:t>import tkinter as tk</a:t>
             </a:r>
-            <a:endParaRPr lang="en-US" sz="1650" dirty="0"/>
-          </a:p>
-          <a:p>
-            <a:pPr algn="l" indent="0" marL="0">
-              <a:buNone/>
-            </a:pPr>
-            <a:endParaRPr lang="en-US" sz="1650" dirty="0"/>
-          </a:p>
-          <a:p>
-            <a:pPr algn="l" indent="0" marL="0">
-              <a:buNone/>
-            </a:pPr>
-            <a:r>
-              <a:rPr lang="en-US" sz="1650" dirty="0">
+            <a:endParaRPr lang="en-US" sz="1600" dirty="0"/>
+          </a:p>
+          <a:p>
+            <a:pPr algn="l" indent="0" marL="0">
+              <a:buNone/>
+            </a:pPr>
+            <a:endParaRPr lang="en-US" sz="1600" dirty="0"/>
+          </a:p>
+          <a:p>
+            <a:pPr algn="l" indent="0" marL="0">
+              <a:buNone/>
+            </a:pPr>
+            <a:r>
+              <a:rPr lang="en-US" sz="1600" dirty="0">
                 <a:solidFill>
                   <a:srgbClr val="F4F7FA"/>
                 </a:solidFill>
@@ -12774,14 +13094,14 @@
               </a:rPr>
               <a:t>root = tk.Tk()</a:t>
             </a:r>
-            <a:endParaRPr lang="en-US" sz="1650" dirty="0"/>
-          </a:p>
-          <a:p>
-            <a:pPr algn="l" indent="0" marL="0">
-              <a:buNone/>
-            </a:pPr>
-            <a:r>
-              <a:rPr lang="en-US" sz="1650" dirty="0">
+            <a:endParaRPr lang="en-US" sz="1600" dirty="0"/>
+          </a:p>
+          <a:p>
+            <a:pPr algn="l" indent="0" marL="0">
+              <a:buNone/>
+            </a:pPr>
+            <a:r>
+              <a:rPr lang="en-US" sz="1600" dirty="0">
                 <a:solidFill>
                   <a:srgbClr val="F4F7FA"/>
                 </a:solidFill>
@@ -12791,14 +13111,14 @@
               </a:rPr>
               <a:t>root.title("Text Analyzer")</a:t>
             </a:r>
-            <a:endParaRPr lang="en-US" sz="1650" dirty="0"/>
-          </a:p>
-          <a:p>
-            <a:pPr algn="l" indent="0" marL="0">
-              <a:buNone/>
-            </a:pPr>
-            <a:r>
-              <a:rPr lang="en-US" sz="1650" dirty="0">
+            <a:endParaRPr lang="en-US" sz="1600" dirty="0"/>
+          </a:p>
+          <a:p>
+            <a:pPr algn="l" indent="0" marL="0">
+              <a:buNone/>
+            </a:pPr>
+            <a:r>
+              <a:rPr lang="en-US" sz="1600" dirty="0">
                 <a:solidFill>
                   <a:srgbClr val="F4F7FA"/>
                 </a:solidFill>
@@ -12808,20 +13128,20 @@
               </a:rPr>
               <a:t>root.geometry("520x280")</a:t>
             </a:r>
-            <a:endParaRPr lang="en-US" sz="1650" dirty="0"/>
-          </a:p>
-          <a:p>
-            <a:pPr algn="l" indent="0" marL="0">
-              <a:buNone/>
-            </a:pPr>
-            <a:endParaRPr lang="en-US" sz="1650" dirty="0"/>
-          </a:p>
-          <a:p>
-            <a:pPr algn="l" indent="0" marL="0">
-              <a:buNone/>
-            </a:pPr>
-            <a:r>
-              <a:rPr lang="en-US" sz="1650" dirty="0">
+            <a:endParaRPr lang="en-US" sz="1600" dirty="0"/>
+          </a:p>
+          <a:p>
+            <a:pPr algn="l" indent="0" marL="0">
+              <a:buNone/>
+            </a:pPr>
+            <a:endParaRPr lang="en-US" sz="1600" dirty="0"/>
+          </a:p>
+          <a:p>
+            <a:pPr algn="l" indent="0" marL="0">
+              <a:buNone/>
+            </a:pPr>
+            <a:r>
+              <a:rPr lang="en-US" sz="1600" dirty="0">
                 <a:solidFill>
                   <a:srgbClr val="F4F7FA"/>
                 </a:solidFill>
@@ -12831,20 +13151,20 @@
               </a:rPr>
               <a:t>root.mainloop()</a:t>
             </a:r>
-            <a:endParaRPr lang="en-US" sz="1650" dirty="0"/>
-          </a:p>
-        </p:txBody>
-      </p:sp>
-      <p:sp>
-        <p:nvSpPr>
-          <p:cNvPr id="12" name="Shape 10"/>
-          <p:cNvSpPr/>
-          <p:nvPr/>
-        </p:nvSpPr>
-        <p:spPr>
-          <a:xfrm>
-            <a:off x="7909560" y="1901952"/>
-            <a:ext cx="0" cy="3566160"/>
+            <a:endParaRPr lang="en-US" sz="1600" dirty="0"/>
+          </a:p>
+        </p:txBody>
+      </p:sp>
+      <p:sp>
+        <p:nvSpPr>
+          <p:cNvPr id="13" name="Shape 11"/>
+          <p:cNvSpPr/>
+          <p:nvPr/>
+        </p:nvSpPr>
+        <p:spPr>
+          <a:xfrm>
+            <a:off x="7936992" y="1883664"/>
+            <a:ext cx="0" cy="3639312"/>
           </a:xfrm>
           <a:prstGeom prst="line">
             <a:avLst/>
@@ -12860,14 +13180,14 @@
       </p:sp>
       <p:sp>
         <p:nvSpPr>
-          <p:cNvPr id="13" name="Text 11"/>
-          <p:cNvSpPr/>
-          <p:nvPr/>
-        </p:nvSpPr>
-        <p:spPr>
-          <a:xfrm>
-            <a:off x="8229600" y="2130552"/>
-            <a:ext cx="2743200" cy="2468880"/>
+          <p:cNvPr id="14" name="Text 12"/>
+          <p:cNvSpPr/>
+          <p:nvPr/>
+        </p:nvSpPr>
+        <p:spPr>
+          <a:xfrm>
+            <a:off x="8229600" y="2084832"/>
+            <a:ext cx="2816352" cy="2514600"/>
           </a:xfrm>
           <a:prstGeom prst="rect">
             <a:avLst/>
@@ -12885,7 +13205,7 @@
               <a:buNone/>
             </a:pPr>
             <a:r>
-              <a:rPr lang="en-US" sz="1800" dirty="0">
+              <a:rPr lang="en-US" sz="1720" dirty="0">
                 <a:solidFill>
                   <a:srgbClr val="5E6B78"/>
                 </a:solidFill>
@@ -12895,7 +13215,7 @@
               </a:rPr>
               <a:t>After mainloop(), we no longer write a sequential program. The next steps are triggered by user or system events.</a:t>
             </a:r>
-            <a:endParaRPr lang="en-US" sz="1800" dirty="0"/>
+            <a:endParaRPr lang="en-US" sz="1720" dirty="0"/>
           </a:p>
         </p:txBody>
       </p:sp>
@@ -12940,7 +13260,7 @@
         <p:spPr>
           <a:xfrm>
             <a:off x="0" y="0"/>
-            <a:ext cx="12191695" cy="155448"/>
+            <a:ext cx="12191695" cy="109728"/>
           </a:xfrm>
           <a:prstGeom prst="rect">
             <a:avLst/>
@@ -12964,7 +13284,7 @@
         </p:nvSpPr>
         <p:spPr>
           <a:xfrm>
-            <a:off x="566928" y="320040"/>
+            <a:off x="566928" y="310896"/>
             <a:ext cx="4663440" cy="182880"/>
           </a:xfrm>
           <a:prstGeom prst="rect">
@@ -12983,7 +13303,7 @@
               <a:buNone/>
             </a:pPr>
             <a:r>
-              <a:rPr lang="en-US" sz="900" b="1" spc="80" kern="0" dirty="0">
+              <a:rPr lang="en-US" sz="880" b="1" spc="50" kern="0" dirty="0">
                 <a:solidFill>
                   <a:srgbClr val="1877B9"/>
                 </a:solidFill>
@@ -12993,7 +13313,7 @@
               </a:rPr>
               <a:t>PROGRAMMING IN PYTHON</a:t>
             </a:r>
-            <a:endParaRPr lang="en-US" sz="900" dirty="0"/>
+            <a:endParaRPr lang="en-US" sz="880" dirty="0"/>
           </a:p>
         </p:txBody>
       </p:sp>
@@ -13005,7 +13325,7 @@
         </p:nvSpPr>
         <p:spPr>
           <a:xfrm>
-            <a:off x="9829800" y="320040"/>
+            <a:off x="9829800" y="310896"/>
             <a:ext cx="1783080" cy="182880"/>
           </a:xfrm>
           <a:prstGeom prst="rect">
@@ -13024,7 +13344,7 @@
               <a:buNone/>
             </a:pPr>
             <a:r>
-              <a:rPr lang="en-US" sz="900" b="1" dirty="0">
+              <a:rPr lang="en-US" sz="880" b="1" dirty="0">
                 <a:solidFill>
                   <a:srgbClr val="5E6B78"/>
                 </a:solidFill>
@@ -13034,7 +13354,7 @@
               </a:rPr>
               <a:t>LECTURE 03</a:t>
             </a:r>
-            <a:endParaRPr lang="en-US" sz="900" dirty="0"/>
+            <a:endParaRPr lang="en-US" sz="880" dirty="0"/>
           </a:p>
         </p:txBody>
       </p:sp>
@@ -13092,8 +13412,8 @@
         </p:nvSpPr>
         <p:spPr>
           <a:xfrm>
-            <a:off x="11109960" y="6501384"/>
-            <a:ext cx="457200" cy="146304"/>
+            <a:off x="10771632" y="6501384"/>
+            <a:ext cx="804672" cy="146304"/>
           </a:xfrm>
           <a:prstGeom prst="rect">
             <a:avLst/>
@@ -13111,7 +13431,7 @@
               <a:buNone/>
             </a:pPr>
             <a:r>
-              <a:rPr lang="en-US" sz="800" dirty="0">
+              <a:rPr lang="en-US" sz="780" dirty="0">
                 <a:solidFill>
                   <a:srgbClr val="5E6B78"/>
                 </a:solidFill>
@@ -13119,9 +13439,9 @@
                 <a:ea typeface="Consolas" pitchFamily="34" charset="-122"/>
                 <a:cs typeface="Consolas" pitchFamily="34" charset="-120"/>
               </a:rPr>
-              <a:t>05</a:t>
-            </a:r>
-            <a:endParaRPr lang="en-US" sz="800" dirty="0"/>
+              <a:t>05 / 24</a:t>
+            </a:r>
+            <a:endParaRPr lang="en-US" sz="780" dirty="0"/>
           </a:p>
         </p:txBody>
       </p:sp>
@@ -13133,8 +13453,8 @@
         </p:nvSpPr>
         <p:spPr>
           <a:xfrm>
-            <a:off x="749808" y="1554480"/>
-            <a:ext cx="10424160" cy="1508760"/>
+            <a:off x="749808" y="1481328"/>
+            <a:ext cx="10287000" cy="1554480"/>
           </a:xfrm>
           <a:prstGeom prst="rect">
             <a:avLst/>
@@ -13152,17 +13472,17 @@
               <a:buNone/>
             </a:pPr>
             <a:r>
-              <a:rPr lang="en-US" sz="3400" b="1" dirty="0">
+              <a:rPr lang="en-US" sz="3300" b="1" dirty="0">
                 <a:solidFill>
                   <a:srgbClr val="16324F"/>
                 </a:solidFill>
-                <a:latin typeface="Aptos" pitchFamily="34" charset="0"/>
-                <a:ea typeface="Aptos" pitchFamily="34" charset="-122"/>
-                <a:cs typeface="Aptos" pitchFamily="34" charset="-120"/>
+                <a:latin typeface="Aptos Display" pitchFamily="34" charset="0"/>
+                <a:ea typeface="Aptos Display" pitchFamily="34" charset="-122"/>
+                <a:cs typeface="Aptos Display" pitchFamily="34" charset="-120"/>
               </a:rPr>
               <a:t>A widget is an object. A callback is a function the event loop calls later.</a:t>
             </a:r>
-            <a:endParaRPr lang="en-US" sz="3400" dirty="0"/>
+            <a:endParaRPr lang="en-US" sz="3300" dirty="0"/>
           </a:p>
         </p:txBody>
       </p:sp>
@@ -13174,8 +13494,8 @@
         </p:nvSpPr>
         <p:spPr>
           <a:xfrm>
-            <a:off x="768096" y="3456432"/>
-            <a:ext cx="1417320" cy="109728"/>
+            <a:off x="768096" y="3438144"/>
+            <a:ext cx="1280160" cy="91440"/>
           </a:xfrm>
           <a:prstGeom prst="rect">
             <a:avLst/>
@@ -13199,8 +13519,8 @@
         </p:nvSpPr>
         <p:spPr>
           <a:xfrm>
-            <a:off x="768096" y="3913632"/>
-            <a:ext cx="8869680" cy="731520"/>
+            <a:off x="768096" y="3858768"/>
+            <a:ext cx="9006840" cy="804672"/>
           </a:xfrm>
           <a:prstGeom prst="rect">
             <a:avLst/>
@@ -13218,7 +13538,7 @@
               <a:buNone/>
             </a:pPr>
             <a:r>
-              <a:rPr lang="en-US" sz="2200" dirty="0">
+              <a:rPr lang="en-US" sz="2100" dirty="0">
                 <a:solidFill>
                   <a:srgbClr val="5E6B78"/>
                 </a:solidFill>
@@ -13228,7 +13548,7 @@
               </a:rPr>
               <a:t>This difference is the foundation of readable GUI code.</a:t>
             </a:r>
-            <a:endParaRPr lang="en-US" sz="2200" dirty="0"/>
+            <a:endParaRPr lang="en-US" sz="2100" dirty="0"/>
           </a:p>
         </p:txBody>
       </p:sp>
@@ -13273,7 +13593,7 @@
         <p:spPr>
           <a:xfrm>
             <a:off x="0" y="0"/>
-            <a:ext cx="12191695" cy="155448"/>
+            <a:ext cx="12191695" cy="109728"/>
           </a:xfrm>
           <a:prstGeom prst="rect">
             <a:avLst/>
@@ -13297,7 +13617,7 @@
         </p:nvSpPr>
         <p:spPr>
           <a:xfrm>
-            <a:off x="566928" y="320040"/>
+            <a:off x="566928" y="310896"/>
             <a:ext cx="4663440" cy="182880"/>
           </a:xfrm>
           <a:prstGeom prst="rect">
@@ -13316,7 +13636,7 @@
               <a:buNone/>
             </a:pPr>
             <a:r>
-              <a:rPr lang="en-US" sz="900" b="1" spc="80" kern="0" dirty="0">
+              <a:rPr lang="en-US" sz="880" b="1" spc="50" kern="0" dirty="0">
                 <a:solidFill>
                   <a:srgbClr val="1877B9"/>
                 </a:solidFill>
@@ -13326,7 +13646,7 @@
               </a:rPr>
               <a:t>PROGRAMMING IN PYTHON</a:t>
             </a:r>
-            <a:endParaRPr lang="en-US" sz="900" dirty="0"/>
+            <a:endParaRPr lang="en-US" sz="880" dirty="0"/>
           </a:p>
         </p:txBody>
       </p:sp>
@@ -13338,7 +13658,7 @@
         </p:nvSpPr>
         <p:spPr>
           <a:xfrm>
-            <a:off x="9829800" y="320040"/>
+            <a:off x="9829800" y="310896"/>
             <a:ext cx="1783080" cy="182880"/>
           </a:xfrm>
           <a:prstGeom prst="rect">
@@ -13357,7 +13677,7 @@
               <a:buNone/>
             </a:pPr>
             <a:r>
-              <a:rPr lang="en-US" sz="900" b="1" dirty="0">
+              <a:rPr lang="en-US" sz="880" b="1" dirty="0">
                 <a:solidFill>
                   <a:srgbClr val="5E6B78"/>
                 </a:solidFill>
@@ -13367,7 +13687,7 @@
               </a:rPr>
               <a:t>LECTURE 03</a:t>
             </a:r>
-            <a:endParaRPr lang="en-US" sz="900" dirty="0"/>
+            <a:endParaRPr lang="en-US" sz="880" dirty="0"/>
           </a:p>
         </p:txBody>
       </p:sp>
@@ -13425,8 +13745,8 @@
         </p:nvSpPr>
         <p:spPr>
           <a:xfrm>
-            <a:off x="11109960" y="6501384"/>
-            <a:ext cx="457200" cy="146304"/>
+            <a:off x="10771632" y="6501384"/>
+            <a:ext cx="804672" cy="146304"/>
           </a:xfrm>
           <a:prstGeom prst="rect">
             <a:avLst/>
@@ -13444,7 +13764,7 @@
               <a:buNone/>
             </a:pPr>
             <a:r>
-              <a:rPr lang="en-US" sz="800" dirty="0">
+              <a:rPr lang="en-US" sz="780" dirty="0">
                 <a:solidFill>
                   <a:srgbClr val="5E6B78"/>
                 </a:solidFill>
@@ -13452,9 +13772,9 @@
                 <a:ea typeface="Consolas" pitchFamily="34" charset="-122"/>
                 <a:cs typeface="Consolas" pitchFamily="34" charset="-120"/>
               </a:rPr>
-              <a:t>06</a:t>
-            </a:r>
-            <a:endParaRPr lang="en-US" sz="800" dirty="0"/>
+              <a:t>06 / 24</a:t>
+            </a:r>
+            <a:endParaRPr lang="en-US" sz="780" dirty="0"/>
           </a:p>
         </p:txBody>
       </p:sp>
@@ -13466,8 +13786,8 @@
         </p:nvSpPr>
         <p:spPr>
           <a:xfrm>
-            <a:off x="658368" y="932688"/>
-            <a:ext cx="10789920" cy="713232"/>
+            <a:off x="658368" y="914400"/>
+            <a:ext cx="10881360" cy="713232"/>
           </a:xfrm>
           <a:prstGeom prst="rect">
             <a:avLst/>
@@ -13485,49 +13805,67 @@
               <a:buNone/>
             </a:pPr>
             <a:r>
-              <a:rPr lang="en-US" sz="2900" b="1" dirty="0">
+              <a:rPr lang="en-US" sz="2850" b="1" dirty="0">
                 <a:solidFill>
                   <a:srgbClr val="16324F"/>
+                </a:solidFill>
+                <a:latin typeface="Aptos Display" pitchFamily="34" charset="0"/>
+                <a:ea typeface="Aptos Display" pitchFamily="34" charset="-122"/>
+                <a:cs typeface="Aptos Display" pitchFamily="34" charset="-120"/>
+              </a:rPr>
+              <a:t>command needs a function, not its result</a:t>
+            </a:r>
+            <a:endParaRPr lang="en-US" sz="2850" dirty="0"/>
+          </a:p>
+        </p:txBody>
+      </p:sp>
+      <p:sp>
+        <p:nvSpPr>
+          <p:cNvPr id="9" name="Text 7"/>
+          <p:cNvSpPr/>
+          <p:nvPr/>
+        </p:nvSpPr>
+        <p:spPr>
+          <a:xfrm>
+            <a:off x="749808" y="1920240"/>
+            <a:ext cx="4160520" cy="3886200"/>
+          </a:xfrm>
+          <a:prstGeom prst="rect">
+            <a:avLst/>
+          </a:prstGeom>
+          <a:noFill/>
+          <a:ln/>
+        </p:spPr>
+        <p:txBody>
+          <a:bodyPr wrap="square" lIns="508" tIns="508" rIns="508" bIns="508" rtlCol="0" anchor="t">
+            <a:normAutofit/>
+          </a:bodyPr>
+          <a:lstStyle/>
+          <a:p>
+            <a:pPr marL="228600" indent="-228600">
+              <a:buSzPct val="100000"/>
+              <a:buChar char="•"/>
+            </a:pPr>
+            <a:r>
+              <a:rPr lang="en-US" sz="1650" dirty="0">
+                <a:solidFill>
+                  <a:srgbClr val="18212B"/>
                 </a:solidFill>
                 <a:latin typeface="Aptos" pitchFamily="34" charset="0"/>
                 <a:ea typeface="Aptos" pitchFamily="34" charset="-122"/>
                 <a:cs typeface="Aptos" pitchFamily="34" charset="-120"/>
               </a:rPr>
-              <a:t>command needs a function, not its result</a:t>
-            </a:r>
-            <a:endParaRPr lang="en-US" sz="2900" dirty="0"/>
-          </a:p>
-        </p:txBody>
-      </p:sp>
-      <p:sp>
-        <p:nvSpPr>
-          <p:cNvPr id="9" name="Text 7"/>
-          <p:cNvSpPr/>
-          <p:nvPr/>
-        </p:nvSpPr>
-        <p:spPr>
-          <a:xfrm>
-            <a:off x="749808" y="1920240"/>
-            <a:ext cx="4160520" cy="3886200"/>
-          </a:xfrm>
-          <a:prstGeom prst="rect">
-            <a:avLst/>
-          </a:prstGeom>
-          <a:noFill/>
-          <a:ln/>
-        </p:spPr>
-        <p:txBody>
-          <a:bodyPr wrap="square" lIns="508" tIns="508" rIns="508" bIns="508" rtlCol="0" anchor="t">
-            <a:normAutofit/>
-          </a:bodyPr>
-          <a:lstStyle/>
+              <a:t>command=analyze passes a function</a:t>
+            </a:r>
+            <a:endParaRPr lang="en-US" sz="1650" dirty="0"/>
+          </a:p>
           <a:p>
             <a:pPr marL="228600" indent="-228600">
               <a:buSzPct val="100000"/>
               <a:buChar char="•"/>
             </a:pPr>
             <a:r>
-              <a:rPr lang="en-US" sz="1700" dirty="0">
+              <a:rPr lang="en-US" sz="1650" dirty="0">
                 <a:solidFill>
                   <a:srgbClr val="18212B"/>
                 </a:solidFill>
@@ -13535,9 +13873,9 @@
                 <a:ea typeface="Aptos" pitchFamily="34" charset="-122"/>
                 <a:cs typeface="Aptos" pitchFamily="34" charset="-120"/>
               </a:rPr>
-              <a:t>command=analyze passes a function</a:t>
-            </a:r>
-            <a:endParaRPr lang="en-US" sz="1700" dirty="0"/>
+              <a:t>command=analyze() runs it while the button is created</a:t>
+            </a:r>
+            <a:endParaRPr lang="en-US" sz="1650" dirty="0"/>
           </a:p>
           <a:p>
             <a:pPr marL="228600" indent="-228600">
@@ -13545,7 +13883,7 @@
               <a:buChar char="•"/>
             </a:pPr>
             <a:r>
-              <a:rPr lang="en-US" sz="1700" dirty="0">
+              <a:rPr lang="en-US" sz="1650" dirty="0">
                 <a:solidFill>
                   <a:srgbClr val="18212B"/>
                 </a:solidFill>
@@ -13553,27 +13891,9 @@
                 <a:ea typeface="Aptos" pitchFamily="34" charset="-122"/>
                 <a:cs typeface="Aptos" pitchFamily="34" charset="-120"/>
               </a:rPr>
-              <a:t>command=analyze() runs it while the button is created</a:t>
-            </a:r>
-            <a:endParaRPr lang="en-US" sz="1700" dirty="0"/>
-          </a:p>
-          <a:p>
-            <a:pPr marL="228600" indent="-228600">
-              <a:buSzPct val="100000"/>
-              <a:buChar char="•"/>
-            </a:pPr>
-            <a:r>
-              <a:rPr lang="en-US" sz="1700" dirty="0">
-                <a:solidFill>
-                  <a:srgbClr val="18212B"/>
-                </a:solidFill>
-                <a:latin typeface="Aptos" pitchFamily="34" charset="0"/>
-                <a:ea typeface="Aptos" pitchFamily="34" charset="-122"/>
-                <a:cs typeface="Aptos" pitchFamily="34" charset="-120"/>
-              </a:rPr>
               <a:t>the callback gets control only after a click</a:t>
             </a:r>
-            <a:endParaRPr lang="en-US" sz="1700" dirty="0"/>
+            <a:endParaRPr lang="en-US" sz="1650" dirty="0"/>
           </a:p>
         </p:txBody>
       </p:sp>
@@ -13585,8 +13905,8 @@
         </p:nvSpPr>
         <p:spPr>
           <a:xfrm>
-            <a:off x="5394960" y="1792224"/>
-            <a:ext cx="5943600" cy="4160520"/>
+            <a:off x="5413248" y="1792224"/>
+            <a:ext cx="5925312" cy="4160520"/>
           </a:xfrm>
           <a:prstGeom prst="rect">
             <a:avLst/>
@@ -13596,7 +13916,7 @@
           </a:solidFill>
           <a:ln w="12700">
             <a:solidFill>
-              <a:srgbClr val="17212B"/>
+              <a:srgbClr val="243242"/>
             </a:solidFill>
             <a:prstDash val="solid"/>
           </a:ln>
@@ -13604,14 +13924,39 @@
       </p:sp>
       <p:sp>
         <p:nvSpPr>
-          <p:cNvPr id="11" name="Text 9"/>
-          <p:cNvSpPr/>
-          <p:nvPr/>
-        </p:nvSpPr>
-        <p:spPr>
-          <a:xfrm>
-            <a:off x="5641848" y="1993392"/>
-            <a:ext cx="5394960" cy="182880"/>
+          <p:cNvPr id="11" name="Shape 9"/>
+          <p:cNvSpPr/>
+          <p:nvPr/>
+        </p:nvSpPr>
+        <p:spPr>
+          <a:xfrm>
+            <a:off x="5413248" y="1792224"/>
+            <a:ext cx="5925312" cy="329184"/>
+          </a:xfrm>
+          <a:prstGeom prst="rect">
+            <a:avLst/>
+          </a:prstGeom>
+          <a:solidFill>
+            <a:srgbClr val="223044"/>
+          </a:solidFill>
+          <a:ln w="12700">
+            <a:solidFill>
+              <a:srgbClr val="223044"/>
+            </a:solidFill>
+            <a:prstDash val="solid"/>
+          </a:ln>
+        </p:spPr>
+      </p:sp>
+      <p:sp>
+        <p:nvSpPr>
+          <p:cNvPr id="12" name="Text 10"/>
+          <p:cNvSpPr/>
+          <p:nvPr/>
+        </p:nvSpPr>
+        <p:spPr>
+          <a:xfrm>
+            <a:off x="5641848" y="1901952"/>
+            <a:ext cx="5394960" cy="146304"/>
           </a:xfrm>
           <a:prstGeom prst="rect">
             <a:avLst/>
@@ -13629,7 +13974,7 @@
               <a:buNone/>
             </a:pPr>
             <a:r>
-              <a:rPr lang="en-US" sz="850" b="1" spc="70" kern="0" dirty="0">
+              <a:rPr lang="en-US" sz="810" b="1" spc="35" kern="0" dirty="0">
                 <a:solidFill>
                   <a:srgbClr val="8FD3FF"/>
                 </a:solidFill>
@@ -13639,20 +13984,20 @@
               </a:rPr>
               <a:t>python</a:t>
             </a:r>
-            <a:endParaRPr lang="en-US" sz="850" dirty="0"/>
-          </a:p>
-        </p:txBody>
-      </p:sp>
-      <p:sp>
-        <p:nvSpPr>
-          <p:cNvPr id="12" name="Text 10"/>
-          <p:cNvSpPr/>
-          <p:nvPr/>
-        </p:nvSpPr>
-        <p:spPr>
-          <a:xfrm>
-            <a:off x="5641848" y="2395728"/>
-            <a:ext cx="5330952" cy="3127248"/>
+            <a:endParaRPr lang="en-US" sz="810" dirty="0"/>
+          </a:p>
+        </p:txBody>
+      </p:sp>
+      <p:sp>
+        <p:nvSpPr>
+          <p:cNvPr id="13" name="Text 11"/>
+          <p:cNvSpPr/>
+          <p:nvPr/>
+        </p:nvSpPr>
+        <p:spPr>
+          <a:xfrm>
+            <a:off x="5641848" y="2331720"/>
+            <a:ext cx="5340096" cy="3182112"/>
           </a:xfrm>
           <a:prstGeom prst="rect">
             <a:avLst/>
@@ -13670,7 +14015,7 @@
               <a:buNone/>
             </a:pPr>
             <a:r>
-              <a:rPr lang="en-US" sz="1560" dirty="0">
+              <a:rPr lang="en-US" sz="1500" dirty="0">
                 <a:solidFill>
                   <a:srgbClr val="F4F7FA"/>
                 </a:solidFill>
@@ -13680,14 +14025,14 @@
               </a:rPr>
               <a:t>def analyze() -&gt; None:</a:t>
             </a:r>
-            <a:endParaRPr lang="en-US" sz="1560" dirty="0"/>
-          </a:p>
-          <a:p>
-            <a:pPr algn="l" indent="0" marL="0">
-              <a:buNone/>
-            </a:pPr>
-            <a:r>
-              <a:rPr lang="en-US" sz="1560" dirty="0">
+            <a:endParaRPr lang="en-US" sz="1500" dirty="0"/>
+          </a:p>
+          <a:p>
+            <a:pPr algn="l" indent="0" marL="0">
+              <a:buNone/>
+            </a:pPr>
+            <a:r>
+              <a:rPr lang="en-US" sz="1500" dirty="0">
                 <a:solidFill>
                   <a:srgbClr val="F4F7FA"/>
                 </a:solidFill>
@@ -13697,20 +14042,20 @@
               </a:rPr>
               <a:t>    print("Analyze clicked")</a:t>
             </a:r>
-            <a:endParaRPr lang="en-US" sz="1560" dirty="0"/>
-          </a:p>
-          <a:p>
-            <a:pPr algn="l" indent="0" marL="0">
-              <a:buNone/>
-            </a:pPr>
-            <a:endParaRPr lang="en-US" sz="1560" dirty="0"/>
-          </a:p>
-          <a:p>
-            <a:pPr algn="l" indent="0" marL="0">
-              <a:buNone/>
-            </a:pPr>
-            <a:r>
-              <a:rPr lang="en-US" sz="1560" dirty="0">
+            <a:endParaRPr lang="en-US" sz="1500" dirty="0"/>
+          </a:p>
+          <a:p>
+            <a:pPr algn="l" indent="0" marL="0">
+              <a:buNone/>
+            </a:pPr>
+            <a:endParaRPr lang="en-US" sz="1500" dirty="0"/>
+          </a:p>
+          <a:p>
+            <a:pPr algn="l" indent="0" marL="0">
+              <a:buNone/>
+            </a:pPr>
+            <a:r>
+              <a:rPr lang="en-US" sz="1500" dirty="0">
                 <a:solidFill>
                   <a:srgbClr val="F4F7FA"/>
                 </a:solidFill>
@@ -13720,14 +14065,14 @@
               </a:rPr>
               <a:t>button = ttk.Button(</a:t>
             </a:r>
-            <a:endParaRPr lang="en-US" sz="1560" dirty="0"/>
-          </a:p>
-          <a:p>
-            <a:pPr algn="l" indent="0" marL="0">
-              <a:buNone/>
-            </a:pPr>
-            <a:r>
-              <a:rPr lang="en-US" sz="1560" dirty="0">
+            <a:endParaRPr lang="en-US" sz="1500" dirty="0"/>
+          </a:p>
+          <a:p>
+            <a:pPr algn="l" indent="0" marL="0">
+              <a:buNone/>
+            </a:pPr>
+            <a:r>
+              <a:rPr lang="en-US" sz="1500" dirty="0">
                 <a:solidFill>
                   <a:srgbClr val="F4F7FA"/>
                 </a:solidFill>
@@ -13737,14 +14082,14 @@
               </a:rPr>
               <a:t>    root,</a:t>
             </a:r>
-            <a:endParaRPr lang="en-US" sz="1560" dirty="0"/>
-          </a:p>
-          <a:p>
-            <a:pPr algn="l" indent="0" marL="0">
-              <a:buNone/>
-            </a:pPr>
-            <a:r>
-              <a:rPr lang="en-US" sz="1560" dirty="0">
+            <a:endParaRPr lang="en-US" sz="1500" dirty="0"/>
+          </a:p>
+          <a:p>
+            <a:pPr algn="l" indent="0" marL="0">
+              <a:buNone/>
+            </a:pPr>
+            <a:r>
+              <a:rPr lang="en-US" sz="1500" dirty="0">
                 <a:solidFill>
                   <a:srgbClr val="F4F7FA"/>
                 </a:solidFill>
@@ -13754,14 +14099,14 @@
               </a:rPr>
               <a:t>    text="Analyzovať",</a:t>
             </a:r>
-            <a:endParaRPr lang="en-US" sz="1560" dirty="0"/>
-          </a:p>
-          <a:p>
-            <a:pPr algn="l" indent="0" marL="0">
-              <a:buNone/>
-            </a:pPr>
-            <a:r>
-              <a:rPr lang="en-US" sz="1560" dirty="0">
+            <a:endParaRPr lang="en-US" sz="1500" dirty="0"/>
+          </a:p>
+          <a:p>
+            <a:pPr algn="l" indent="0" marL="0">
+              <a:buNone/>
+            </a:pPr>
+            <a:r>
+              <a:rPr lang="en-US" sz="1500" dirty="0">
                 <a:solidFill>
                   <a:srgbClr val="F4F7FA"/>
                 </a:solidFill>
@@ -13771,14 +14116,14 @@
               </a:rPr>
               <a:t>    command=analyze,</a:t>
             </a:r>
-            <a:endParaRPr lang="en-US" sz="1560" dirty="0"/>
-          </a:p>
-          <a:p>
-            <a:pPr algn="l" indent="0" marL="0">
-              <a:buNone/>
-            </a:pPr>
-            <a:r>
-              <a:rPr lang="en-US" sz="1560" dirty="0">
+            <a:endParaRPr lang="en-US" sz="1500" dirty="0"/>
+          </a:p>
+          <a:p>
+            <a:pPr algn="l" indent="0" marL="0">
+              <a:buNone/>
+            </a:pPr>
+            <a:r>
+              <a:rPr lang="en-US" sz="1500" dirty="0">
                 <a:solidFill>
                   <a:srgbClr val="F4F7FA"/>
                 </a:solidFill>
@@ -13788,14 +14133,14 @@
               </a:rPr>
               <a:t>)</a:t>
             </a:r>
-            <a:endParaRPr lang="en-US" sz="1560" dirty="0"/>
-          </a:p>
-          <a:p>
-            <a:pPr algn="l" indent="0" marL="0">
-              <a:buNone/>
-            </a:pPr>
-            <a:r>
-              <a:rPr lang="en-US" sz="1560" dirty="0">
+            <a:endParaRPr lang="en-US" sz="1500" dirty="0"/>
+          </a:p>
+          <a:p>
+            <a:pPr algn="l" indent="0" marL="0">
+              <a:buNone/>
+            </a:pPr>
+            <a:r>
+              <a:rPr lang="en-US" sz="1500" dirty="0">
                 <a:solidFill>
                   <a:srgbClr val="F4F7FA"/>
                 </a:solidFill>
@@ -13805,7 +14150,7 @@
               </a:rPr>
               <a:t>button.grid()</a:t>
             </a:r>
-            <a:endParaRPr lang="en-US" sz="1560" dirty="0"/>
+            <a:endParaRPr lang="en-US" sz="1500" dirty="0"/>
           </a:p>
         </p:txBody>
       </p:sp>
@@ -13850,7 +14195,7 @@
         <p:spPr>
           <a:xfrm>
             <a:off x="0" y="0"/>
-            <a:ext cx="12191695" cy="155448"/>
+            <a:ext cx="12191695" cy="109728"/>
           </a:xfrm>
           <a:prstGeom prst="rect">
             <a:avLst/>
@@ -13874,7 +14219,7 @@
         </p:nvSpPr>
         <p:spPr>
           <a:xfrm>
-            <a:off x="566928" y="320040"/>
+            <a:off x="566928" y="310896"/>
             <a:ext cx="4663440" cy="182880"/>
           </a:xfrm>
           <a:prstGeom prst="rect">
@@ -13893,7 +14238,7 @@
               <a:buNone/>
             </a:pPr>
             <a:r>
-              <a:rPr lang="en-US" sz="900" b="1" spc="80" kern="0" dirty="0">
+              <a:rPr lang="en-US" sz="880" b="1" spc="50" kern="0" dirty="0">
                 <a:solidFill>
                   <a:srgbClr val="1877B9"/>
                 </a:solidFill>
@@ -13903,7 +14248,7 @@
               </a:rPr>
               <a:t>PROGRAMMING IN PYTHON</a:t>
             </a:r>
-            <a:endParaRPr lang="en-US" sz="900" dirty="0"/>
+            <a:endParaRPr lang="en-US" sz="880" dirty="0"/>
           </a:p>
         </p:txBody>
       </p:sp>
@@ -13915,7 +14260,7 @@
         </p:nvSpPr>
         <p:spPr>
           <a:xfrm>
-            <a:off x="9829800" y="320040"/>
+            <a:off x="9829800" y="310896"/>
             <a:ext cx="1783080" cy="182880"/>
           </a:xfrm>
           <a:prstGeom prst="rect">
@@ -13934,7 +14279,7 @@
               <a:buNone/>
             </a:pPr>
             <a:r>
-              <a:rPr lang="en-US" sz="900" b="1" dirty="0">
+              <a:rPr lang="en-US" sz="880" b="1" dirty="0">
                 <a:solidFill>
                   <a:srgbClr val="5E6B78"/>
                 </a:solidFill>
@@ -13944,7 +14289,7 @@
               </a:rPr>
               <a:t>LECTURE 03</a:t>
             </a:r>
-            <a:endParaRPr lang="en-US" sz="900" dirty="0"/>
+            <a:endParaRPr lang="en-US" sz="880" dirty="0"/>
           </a:p>
         </p:txBody>
       </p:sp>
@@ -14002,8 +14347,8 @@
         </p:nvSpPr>
         <p:spPr>
           <a:xfrm>
-            <a:off x="11109960" y="6501384"/>
-            <a:ext cx="457200" cy="146304"/>
+            <a:off x="10771632" y="6501384"/>
+            <a:ext cx="804672" cy="146304"/>
           </a:xfrm>
           <a:prstGeom prst="rect">
             <a:avLst/>
@@ -14021,7 +14366,7 @@
               <a:buNone/>
             </a:pPr>
             <a:r>
-              <a:rPr lang="en-US" sz="800" dirty="0">
+              <a:rPr lang="en-US" sz="780" dirty="0">
                 <a:solidFill>
                   <a:srgbClr val="5E6B78"/>
                 </a:solidFill>
@@ -14029,9 +14374,9 @@
                 <a:ea typeface="Consolas" pitchFamily="34" charset="-122"/>
                 <a:cs typeface="Consolas" pitchFamily="34" charset="-120"/>
               </a:rPr>
-              <a:t>07</a:t>
-            </a:r>
-            <a:endParaRPr lang="en-US" sz="800" dirty="0"/>
+              <a:t>07 / 24</a:t>
+            </a:r>
+            <a:endParaRPr lang="en-US" sz="780" dirty="0"/>
           </a:p>
         </p:txBody>
       </p:sp>
@@ -14043,8 +14388,8 @@
         </p:nvSpPr>
         <p:spPr>
           <a:xfrm>
-            <a:off x="658368" y="932688"/>
-            <a:ext cx="10789920" cy="713232"/>
+            <a:off x="658368" y="914400"/>
+            <a:ext cx="10881360" cy="713232"/>
           </a:xfrm>
           <a:prstGeom prst="rect">
             <a:avLst/>
@@ -14062,17 +14407,17 @@
               <a:buNone/>
             </a:pPr>
             <a:r>
-              <a:rPr lang="en-US" sz="2900" b="1" dirty="0">
+              <a:rPr lang="en-US" sz="2850" b="1" dirty="0">
                 <a:solidFill>
                   <a:srgbClr val="16324F"/>
                 </a:solidFill>
-                <a:latin typeface="Aptos" pitchFamily="34" charset="0"/>
-                <a:ea typeface="Aptos" pitchFamily="34" charset="-122"/>
-                <a:cs typeface="Aptos" pitchFamily="34" charset="-120"/>
+                <a:latin typeface="Aptos Display" pitchFamily="34" charset="0"/>
+                <a:ea typeface="Aptos Display" pitchFamily="34" charset="-122"/>
+                <a:cs typeface="Aptos Display" pitchFamily="34" charset="-120"/>
               </a:rPr>
               <a:t>The first Text Analyzer step</a:t>
             </a:r>
-            <a:endParaRPr lang="en-US" sz="2900" dirty="0"/>
+            <a:endParaRPr lang="en-US" sz="2850" dirty="0"/>
           </a:p>
         </p:txBody>
       </p:sp>
@@ -14085,19 +14430,17 @@
         <p:spPr>
           <a:xfrm>
             <a:off x="658368" y="1828800"/>
-            <a:ext cx="6812280" cy="4069080"/>
-          </a:xfrm>
-          <a:prstGeom prst="roundRect">
-            <a:avLst>
-              <a:gd name="adj" fmla="val 1348"/>
-            </a:avLst>
+            <a:ext cx="6903720" cy="4069080"/>
+          </a:xfrm>
+          <a:prstGeom prst="rect">
+            <a:avLst/>
           </a:prstGeom>
           <a:solidFill>
             <a:srgbClr val="17212B"/>
           </a:solidFill>
           <a:ln w="12700">
             <a:solidFill>
-              <a:srgbClr val="17212B"/>
+              <a:srgbClr val="243242"/>
             </a:solidFill>
             <a:prstDash val="solid"/>
           </a:ln>
@@ -14105,14 +14448,39 @@
       </p:sp>
       <p:sp>
         <p:nvSpPr>
-          <p:cNvPr id="10" name="Text 8"/>
-          <p:cNvSpPr/>
-          <p:nvPr/>
-        </p:nvSpPr>
-        <p:spPr>
-          <a:xfrm>
-            <a:off x="868680" y="2029968"/>
-            <a:ext cx="6309360" cy="182880"/>
+          <p:cNvPr id="10" name="Shape 8"/>
+          <p:cNvSpPr/>
+          <p:nvPr/>
+        </p:nvSpPr>
+        <p:spPr>
+          <a:xfrm>
+            <a:off x="658368" y="1828800"/>
+            <a:ext cx="6903720" cy="347472"/>
+          </a:xfrm>
+          <a:prstGeom prst="rect">
+            <a:avLst/>
+          </a:prstGeom>
+          <a:solidFill>
+            <a:srgbClr val="223044"/>
+          </a:solidFill>
+          <a:ln w="12700">
+            <a:solidFill>
+              <a:srgbClr val="223044"/>
+            </a:solidFill>
+            <a:prstDash val="solid"/>
+          </a:ln>
+        </p:spPr>
+      </p:sp>
+      <p:sp>
+        <p:nvSpPr>
+          <p:cNvPr id="11" name="Text 9"/>
+          <p:cNvSpPr/>
+          <p:nvPr/>
+        </p:nvSpPr>
+        <p:spPr>
+          <a:xfrm>
+            <a:off x="868680" y="1947672"/>
+            <a:ext cx="6309360" cy="146304"/>
           </a:xfrm>
           <a:prstGeom prst="rect">
             <a:avLst/>
@@ -14130,7 +14498,7 @@
               <a:buNone/>
             </a:pPr>
             <a:r>
-              <a:rPr lang="en-US" sz="850" b="1" spc="70" kern="0" dirty="0">
+              <a:rPr lang="en-US" sz="820" b="1" spc="35" kern="0" dirty="0">
                 <a:solidFill>
                   <a:srgbClr val="8FD3FF"/>
                 </a:solidFill>
@@ -14140,20 +14508,20 @@
               </a:rPr>
               <a:t>python</a:t>
             </a:r>
-            <a:endParaRPr lang="en-US" sz="850" dirty="0"/>
-          </a:p>
-        </p:txBody>
-      </p:sp>
-      <p:sp>
-        <p:nvSpPr>
-          <p:cNvPr id="11" name="Text 9"/>
-          <p:cNvSpPr/>
-          <p:nvPr/>
-        </p:nvSpPr>
-        <p:spPr>
-          <a:xfrm>
-            <a:off x="877824" y="2395728"/>
-            <a:ext cx="6327648" cy="3246120"/>
+            <a:endParaRPr lang="en-US" sz="820" dirty="0"/>
+          </a:p>
+        </p:txBody>
+      </p:sp>
+      <p:sp>
+        <p:nvSpPr>
+          <p:cNvPr id="12" name="Text 10"/>
+          <p:cNvSpPr/>
+          <p:nvPr/>
+        </p:nvSpPr>
+        <p:spPr>
+          <a:xfrm>
+            <a:off x="877824" y="2359152"/>
+            <a:ext cx="6382512" cy="3246120"/>
           </a:xfrm>
           <a:prstGeom prst="rect">
             <a:avLst/>
@@ -14171,7 +14539,7 @@
               <a:buNone/>
             </a:pPr>
             <a:r>
-              <a:rPr lang="en-US" sz="1650" dirty="0">
+              <a:rPr lang="en-US" sz="1600" dirty="0">
                 <a:solidFill>
                   <a:srgbClr val="F4F7FA"/>
                 </a:solidFill>
@@ -14181,20 +14549,20 @@
               </a:rPr>
               <a:t>from tkinter import ttk</a:t>
             </a:r>
-            <a:endParaRPr lang="en-US" sz="1650" dirty="0"/>
-          </a:p>
-          <a:p>
-            <a:pPr algn="l" indent="0" marL="0">
-              <a:buNone/>
-            </a:pPr>
-            <a:endParaRPr lang="en-US" sz="1650" dirty="0"/>
-          </a:p>
-          <a:p>
-            <a:pPr algn="l" indent="0" marL="0">
-              <a:buNone/>
-            </a:pPr>
-            <a:r>
-              <a:rPr lang="en-US" sz="1650" dirty="0">
+            <a:endParaRPr lang="en-US" sz="1600" dirty="0"/>
+          </a:p>
+          <a:p>
+            <a:pPr algn="l" indent="0" marL="0">
+              <a:buNone/>
+            </a:pPr>
+            <a:endParaRPr lang="en-US" sz="1600" dirty="0"/>
+          </a:p>
+          <a:p>
+            <a:pPr algn="l" indent="0" marL="0">
+              <a:buNone/>
+            </a:pPr>
+            <a:r>
+              <a:rPr lang="en-US" sz="1600" dirty="0">
                 <a:solidFill>
                   <a:srgbClr val="F4F7FA"/>
                 </a:solidFill>
@@ -14204,14 +14572,14 @@
               </a:rPr>
               <a:t>status = ttk.Label(root, text="Zadajte text")</a:t>
             </a:r>
-            <a:endParaRPr lang="en-US" sz="1650" dirty="0"/>
-          </a:p>
-          <a:p>
-            <a:pPr algn="l" indent="0" marL="0">
-              <a:buNone/>
-            </a:pPr>
-            <a:r>
-              <a:rPr lang="en-US" sz="1650" dirty="0">
+            <a:endParaRPr lang="en-US" sz="1600" dirty="0"/>
+          </a:p>
+          <a:p>
+            <a:pPr algn="l" indent="0" marL="0">
+              <a:buNone/>
+            </a:pPr>
+            <a:r>
+              <a:rPr lang="en-US" sz="1600" dirty="0">
                 <a:solidFill>
                   <a:srgbClr val="F4F7FA"/>
                 </a:solidFill>
@@ -14221,20 +14589,20 @@
               </a:rPr>
               <a:t>button = ttk.Button(root, text="Analyzovať", command=analyze)</a:t>
             </a:r>
-            <a:endParaRPr lang="en-US" sz="1650" dirty="0"/>
-          </a:p>
-          <a:p>
-            <a:pPr algn="l" indent="0" marL="0">
-              <a:buNone/>
-            </a:pPr>
-            <a:endParaRPr lang="en-US" sz="1650" dirty="0"/>
-          </a:p>
-          <a:p>
-            <a:pPr algn="l" indent="0" marL="0">
-              <a:buNone/>
-            </a:pPr>
-            <a:r>
-              <a:rPr lang="en-US" sz="1650" dirty="0">
+            <a:endParaRPr lang="en-US" sz="1600" dirty="0"/>
+          </a:p>
+          <a:p>
+            <a:pPr algn="l" indent="0" marL="0">
+              <a:buNone/>
+            </a:pPr>
+            <a:endParaRPr lang="en-US" sz="1600" dirty="0"/>
+          </a:p>
+          <a:p>
+            <a:pPr algn="l" indent="0" marL="0">
+              <a:buNone/>
+            </a:pPr>
+            <a:r>
+              <a:rPr lang="en-US" sz="1600" dirty="0">
                 <a:solidFill>
                   <a:srgbClr val="F4F7FA"/>
                 </a:solidFill>
@@ -14244,14 +14612,14 @@
               </a:rPr>
               <a:t>status.grid(row=0, column=0, sticky="w")</a:t>
             </a:r>
-            <a:endParaRPr lang="en-US" sz="1650" dirty="0"/>
-          </a:p>
-          <a:p>
-            <a:pPr algn="l" indent="0" marL="0">
-              <a:buNone/>
-            </a:pPr>
-            <a:r>
-              <a:rPr lang="en-US" sz="1650" dirty="0">
+            <a:endParaRPr lang="en-US" sz="1600" dirty="0"/>
+          </a:p>
+          <a:p>
+            <a:pPr algn="l" indent="0" marL="0">
+              <a:buNone/>
+            </a:pPr>
+            <a:r>
+              <a:rPr lang="en-US" sz="1600" dirty="0">
                 <a:solidFill>
                   <a:srgbClr val="F4F7FA"/>
                 </a:solidFill>
@@ -14261,20 +14629,20 @@
               </a:rPr>
               <a:t>button.grid(row=1, column=0, pady=12)</a:t>
             </a:r>
-            <a:endParaRPr lang="en-US" sz="1650" dirty="0"/>
-          </a:p>
-        </p:txBody>
-      </p:sp>
-      <p:sp>
-        <p:nvSpPr>
-          <p:cNvPr id="12" name="Shape 10"/>
-          <p:cNvSpPr/>
-          <p:nvPr/>
-        </p:nvSpPr>
-        <p:spPr>
-          <a:xfrm>
-            <a:off x="7909560" y="1901952"/>
-            <a:ext cx="0" cy="3566160"/>
+            <a:endParaRPr lang="en-US" sz="1600" dirty="0"/>
+          </a:p>
+        </p:txBody>
+      </p:sp>
+      <p:sp>
+        <p:nvSpPr>
+          <p:cNvPr id="13" name="Shape 11"/>
+          <p:cNvSpPr/>
+          <p:nvPr/>
+        </p:nvSpPr>
+        <p:spPr>
+          <a:xfrm>
+            <a:off x="7936992" y="1883664"/>
+            <a:ext cx="0" cy="3639312"/>
           </a:xfrm>
           <a:prstGeom prst="line">
             <a:avLst/>
@@ -14290,14 +14658,14 @@
       </p:sp>
       <p:sp>
         <p:nvSpPr>
-          <p:cNvPr id="13" name="Text 11"/>
-          <p:cNvSpPr/>
-          <p:nvPr/>
-        </p:nvSpPr>
-        <p:spPr>
-          <a:xfrm>
-            <a:off x="8229600" y="2130552"/>
-            <a:ext cx="2743200" cy="2468880"/>
+          <p:cNvPr id="14" name="Text 12"/>
+          <p:cNvSpPr/>
+          <p:nvPr/>
+        </p:nvSpPr>
+        <p:spPr>
+          <a:xfrm>
+            <a:off x="8229600" y="2084832"/>
+            <a:ext cx="2816352" cy="2514600"/>
           </a:xfrm>
           <a:prstGeom prst="rect">
             <a:avLst/>
@@ -14315,7 +14683,7 @@
               <a:buNone/>
             </a:pPr>
             <a:r>
-              <a:rPr lang="en-US" sz="1800" dirty="0">
+              <a:rPr lang="en-US" sz="1720" dirty="0">
                 <a:solidFill>
                   <a:srgbClr val="5E6B78"/>
                 </a:solidFill>
@@ -14325,7 +14693,7 @@
               </a:rPr>
               <a:t>ttk provides system-themed widgets. We use grid for a form-like layout.</a:t>
             </a:r>
-            <a:endParaRPr lang="en-US" sz="1800" dirty="0"/>
+            <a:endParaRPr lang="en-US" sz="1720" dirty="0"/>
           </a:p>
         </p:txBody>
       </p:sp>
@@ -14370,7 +14738,7 @@
         <p:spPr>
           <a:xfrm>
             <a:off x="0" y="0"/>
-            <a:ext cx="12191695" cy="155448"/>
+            <a:ext cx="12191695" cy="109728"/>
           </a:xfrm>
           <a:prstGeom prst="rect">
             <a:avLst/>
@@ -14394,7 +14762,7 @@
         </p:nvSpPr>
         <p:spPr>
           <a:xfrm>
-            <a:off x="566928" y="320040"/>
+            <a:off x="566928" y="310896"/>
             <a:ext cx="4663440" cy="182880"/>
           </a:xfrm>
           <a:prstGeom prst="rect">
@@ -14413,7 +14781,7 @@
               <a:buNone/>
             </a:pPr>
             <a:r>
-              <a:rPr lang="en-US" sz="900" b="1" spc="80" kern="0" dirty="0">
+              <a:rPr lang="en-US" sz="880" b="1" spc="50" kern="0" dirty="0">
                 <a:solidFill>
                   <a:srgbClr val="1877B9"/>
                 </a:solidFill>
@@ -14423,7 +14791,7 @@
               </a:rPr>
               <a:t>PROGRAMMING IN PYTHON</a:t>
             </a:r>
-            <a:endParaRPr lang="en-US" sz="900" dirty="0"/>
+            <a:endParaRPr lang="en-US" sz="880" dirty="0"/>
           </a:p>
         </p:txBody>
       </p:sp>
@@ -14435,7 +14803,7 @@
         </p:nvSpPr>
         <p:spPr>
           <a:xfrm>
-            <a:off x="9829800" y="320040"/>
+            <a:off x="9829800" y="310896"/>
             <a:ext cx="1783080" cy="182880"/>
           </a:xfrm>
           <a:prstGeom prst="rect">
@@ -14454,7 +14822,7 @@
               <a:buNone/>
             </a:pPr>
             <a:r>
-              <a:rPr lang="en-US" sz="900" b="1" dirty="0">
+              <a:rPr lang="en-US" sz="880" b="1" dirty="0">
                 <a:solidFill>
                   <a:srgbClr val="5E6B78"/>
                 </a:solidFill>
@@ -14464,7 +14832,7 @@
               </a:rPr>
               <a:t>LECTURE 03</a:t>
             </a:r>
-            <a:endParaRPr lang="en-US" sz="900" dirty="0"/>
+            <a:endParaRPr lang="en-US" sz="880" dirty="0"/>
           </a:p>
         </p:txBody>
       </p:sp>
@@ -14522,8 +14890,8 @@
         </p:nvSpPr>
         <p:spPr>
           <a:xfrm>
-            <a:off x="11109960" y="6501384"/>
-            <a:ext cx="457200" cy="146304"/>
+            <a:off x="10771632" y="6501384"/>
+            <a:ext cx="804672" cy="146304"/>
           </a:xfrm>
           <a:prstGeom prst="rect">
             <a:avLst/>
@@ -14541,7 +14909,7 @@
               <a:buNone/>
             </a:pPr>
             <a:r>
-              <a:rPr lang="en-US" sz="800" dirty="0">
+              <a:rPr lang="en-US" sz="780" dirty="0">
                 <a:solidFill>
                   <a:srgbClr val="5E6B78"/>
                 </a:solidFill>
@@ -14549,9 +14917,9 @@
                 <a:ea typeface="Consolas" pitchFamily="34" charset="-122"/>
                 <a:cs typeface="Consolas" pitchFamily="34" charset="-120"/>
               </a:rPr>
-              <a:t>08</a:t>
-            </a:r>
-            <a:endParaRPr lang="en-US" sz="800" dirty="0"/>
+              <a:t>08 / 24</a:t>
+            </a:r>
+            <a:endParaRPr lang="en-US" sz="780" dirty="0"/>
           </a:p>
         </p:txBody>
       </p:sp>
@@ -14563,8 +14931,8 @@
         </p:nvSpPr>
         <p:spPr>
           <a:xfrm>
-            <a:off x="658368" y="932688"/>
-            <a:ext cx="10789920" cy="713232"/>
+            <a:off x="658368" y="914400"/>
+            <a:ext cx="10881360" cy="713232"/>
           </a:xfrm>
           <a:prstGeom prst="rect">
             <a:avLst/>
@@ -14582,17 +14950,17 @@
               <a:buNone/>
             </a:pPr>
             <a:r>
-              <a:rPr lang="en-US" sz="2900" b="1" dirty="0">
+              <a:rPr lang="en-US" sz="2850" b="1" dirty="0">
                 <a:solidFill>
                   <a:srgbClr val="16324F"/>
                 </a:solidFill>
-                <a:latin typeface="Aptos" pitchFamily="34" charset="0"/>
-                <a:ea typeface="Aptos" pitchFamily="34" charset="-122"/>
-                <a:cs typeface="Aptos" pitchFamily="34" charset="-120"/>
+                <a:latin typeface="Aptos Display" pitchFamily="34" charset="0"/>
+                <a:ea typeface="Aptos Display" pitchFamily="34" charset="-122"/>
+                <a:cs typeface="Aptos Display" pitchFamily="34" charset="-120"/>
               </a:rPr>
               <a:t>grid expresses relationships, not coordinates</a:t>
             </a:r>
-            <a:endParaRPr lang="en-US" sz="2900" dirty="0"/>
+            <a:endParaRPr lang="en-US" sz="2850" dirty="0"/>
           </a:p>
         </p:txBody>
       </p:sp>
@@ -14604,13 +14972,11 @@
         </p:nvSpPr>
         <p:spPr>
           <a:xfrm>
-            <a:off x="731520" y="2834640"/>
-            <a:ext cx="2450592" cy="1042416"/>
-          </a:xfrm>
-          <a:prstGeom prst="roundRect">
-            <a:avLst>
-              <a:gd name="adj" fmla="val 4386"/>
-            </a:avLst>
+            <a:off x="694944" y="2834640"/>
+            <a:ext cx="2400300" cy="1042416"/>
+          </a:xfrm>
+          <a:prstGeom prst="rect">
+            <a:avLst/>
           </a:prstGeom>
           <a:solidFill>
             <a:srgbClr val="F3F6F8"/>
@@ -14631,8 +14997,8 @@
         </p:nvSpPr>
         <p:spPr>
           <a:xfrm>
-            <a:off x="877824" y="3063240"/>
-            <a:ext cx="2157984" cy="548640"/>
+            <a:off x="804672" y="3063240"/>
+            <a:ext cx="2180844" cy="548640"/>
           </a:xfrm>
           <a:prstGeom prst="rect">
             <a:avLst/>
@@ -14689,7 +15055,7 @@
         </p:nvSpPr>
         <p:spPr>
           <a:xfrm>
-            <a:off x="3319272" y="3209544"/>
+            <a:off x="3232404" y="3209544"/>
             <a:ext cx="182880" cy="292608"/>
           </a:xfrm>
           <a:prstGeom prst="chevron">
@@ -14714,13 +15080,11 @@
         </p:nvSpPr>
         <p:spPr>
           <a:xfrm>
-            <a:off x="3593592" y="2834640"/>
-            <a:ext cx="2450592" cy="1042416"/>
-          </a:xfrm>
-          <a:prstGeom prst="roundRect">
-            <a:avLst>
-              <a:gd name="adj" fmla="val 4386"/>
-            </a:avLst>
+            <a:off x="3506724" y="2834640"/>
+            <a:ext cx="2400300" cy="1042416"/>
+          </a:xfrm>
+          <a:prstGeom prst="rect">
+            <a:avLst/>
           </a:prstGeom>
           <a:solidFill>
             <a:srgbClr val="EAF3F7"/>
@@ -14741,8 +15105,8 @@
         </p:nvSpPr>
         <p:spPr>
           <a:xfrm>
-            <a:off x="3739896" y="3063240"/>
-            <a:ext cx="2157984" cy="548640"/>
+            <a:off x="3616452" y="3063240"/>
+            <a:ext cx="2180844" cy="548640"/>
           </a:xfrm>
           <a:prstGeom prst="rect">
             <a:avLst/>
@@ -14799,7 +15163,7 @@
         </p:nvSpPr>
         <p:spPr>
           <a:xfrm>
-            <a:off x="6181344" y="3209544"/>
+            <a:off x="6044184" y="3209544"/>
             <a:ext cx="182880" cy="292608"/>
           </a:xfrm>
           <a:prstGeom prst="chevron">
@@ -14824,13 +15188,11 @@
         </p:nvSpPr>
         <p:spPr>
           <a:xfrm>
-            <a:off x="6455664" y="2834640"/>
-            <a:ext cx="2450592" cy="1042416"/>
-          </a:xfrm>
-          <a:prstGeom prst="roundRect">
-            <a:avLst>
-              <a:gd name="adj" fmla="val 4386"/>
-            </a:avLst>
+            <a:off x="6318504" y="2834640"/>
+            <a:ext cx="2400300" cy="1042416"/>
+          </a:xfrm>
+          <a:prstGeom prst="rect">
+            <a:avLst/>
           </a:prstGeom>
           <a:solidFill>
             <a:srgbClr val="F3F6F8"/>
@@ -14851,8 +15213,8 @@
         </p:nvSpPr>
         <p:spPr>
           <a:xfrm>
-            <a:off x="6601968" y="3063240"/>
-            <a:ext cx="2157984" cy="548640"/>
+            <a:off x="6428232" y="3063240"/>
+            <a:ext cx="2180844" cy="548640"/>
           </a:xfrm>
           <a:prstGeom prst="rect">
             <a:avLst/>
@@ -14909,7 +15271,7 @@
         </p:nvSpPr>
         <p:spPr>
           <a:xfrm>
-            <a:off x="9043416" y="3209544"/>
+            <a:off x="8855964" y="3209544"/>
             <a:ext cx="182880" cy="292608"/>
           </a:xfrm>
           <a:prstGeom prst="chevron">
@@ -14934,13 +15296,11 @@
         </p:nvSpPr>
         <p:spPr>
           <a:xfrm>
-            <a:off x="9317736" y="2834640"/>
-            <a:ext cx="2450592" cy="1042416"/>
-          </a:xfrm>
-          <a:prstGeom prst="roundRect">
-            <a:avLst>
-              <a:gd name="adj" fmla="val 4386"/>
-            </a:avLst>
+            <a:off x="9130284" y="2834640"/>
+            <a:ext cx="2400300" cy="1042416"/>
+          </a:xfrm>
+          <a:prstGeom prst="rect">
+            <a:avLst/>
           </a:prstGeom>
           <a:solidFill>
             <a:srgbClr val="EAF3F7"/>
@@ -14961,8 +15321,8 @@
         </p:nvSpPr>
         <p:spPr>
           <a:xfrm>
-            <a:off x="9464040" y="3063240"/>
-            <a:ext cx="2157984" cy="548640"/>
+            <a:off x="9240012" y="3063240"/>
+            <a:ext cx="2180844" cy="548640"/>
           </a:xfrm>
           <a:prstGeom prst="rect">
             <a:avLst/>
@@ -15052,7 +15412,7 @@
         <p:spPr>
           <a:xfrm>
             <a:off x="0" y="0"/>
-            <a:ext cx="12191695" cy="155448"/>
+            <a:ext cx="12191695" cy="109728"/>
           </a:xfrm>
           <a:prstGeom prst="rect">
             <a:avLst/>
@@ -15076,7 +15436,7 @@
         </p:nvSpPr>
         <p:spPr>
           <a:xfrm>
-            <a:off x="566928" y="320040"/>
+            <a:off x="566928" y="310896"/>
             <a:ext cx="4663440" cy="182880"/>
           </a:xfrm>
           <a:prstGeom prst="rect">
@@ -15095,7 +15455,7 @@
               <a:buNone/>
             </a:pPr>
             <a:r>
-              <a:rPr lang="en-US" sz="900" b="1" spc="80" kern="0" dirty="0">
+              <a:rPr lang="en-US" sz="880" b="1" spc="50" kern="0" dirty="0">
                 <a:solidFill>
                   <a:srgbClr val="1877B9"/>
                 </a:solidFill>
@@ -15105,7 +15465,7 @@
               </a:rPr>
               <a:t>PROGRAMMING IN PYTHON</a:t>
             </a:r>
-            <a:endParaRPr lang="en-US" sz="900" dirty="0"/>
+            <a:endParaRPr lang="en-US" sz="880" dirty="0"/>
           </a:p>
         </p:txBody>
       </p:sp>
@@ -15117,7 +15477,7 @@
         </p:nvSpPr>
         <p:spPr>
           <a:xfrm>
-            <a:off x="9829800" y="320040"/>
+            <a:off x="9829800" y="310896"/>
             <a:ext cx="1783080" cy="182880"/>
           </a:xfrm>
           <a:prstGeom prst="rect">
@@ -15136,7 +15496,7 @@
               <a:buNone/>
             </a:pPr>
             <a:r>
-              <a:rPr lang="en-US" sz="900" b="1" dirty="0">
+              <a:rPr lang="en-US" sz="880" b="1" dirty="0">
                 <a:solidFill>
                   <a:srgbClr val="5E6B78"/>
                 </a:solidFill>
@@ -15146,7 +15506,7 @@
               </a:rPr>
               <a:t>LECTURE 03</a:t>
             </a:r>
-            <a:endParaRPr lang="en-US" sz="900" dirty="0"/>
+            <a:endParaRPr lang="en-US" sz="880" dirty="0"/>
           </a:p>
         </p:txBody>
       </p:sp>
@@ -15204,8 +15564,8 @@
         </p:nvSpPr>
         <p:spPr>
           <a:xfrm>
-            <a:off x="11109960" y="6501384"/>
-            <a:ext cx="457200" cy="146304"/>
+            <a:off x="10771632" y="6501384"/>
+            <a:ext cx="804672" cy="146304"/>
           </a:xfrm>
           <a:prstGeom prst="rect">
             <a:avLst/>
@@ -15223,7 +15583,7 @@
               <a:buNone/>
             </a:pPr>
             <a:r>
-              <a:rPr lang="en-US" sz="800" dirty="0">
+              <a:rPr lang="en-US" sz="780" dirty="0">
                 <a:solidFill>
                   <a:srgbClr val="5E6B78"/>
                 </a:solidFill>
@@ -15231,9 +15591,9 @@
                 <a:ea typeface="Consolas" pitchFamily="34" charset="-122"/>
                 <a:cs typeface="Consolas" pitchFamily="34" charset="-120"/>
               </a:rPr>
-              <a:t>09</a:t>
-            </a:r>
-            <a:endParaRPr lang="en-US" sz="800" dirty="0"/>
+              <a:t>09 / 24</a:t>
+            </a:r>
+            <a:endParaRPr lang="en-US" sz="780" dirty="0"/>
           </a:p>
         </p:txBody>
       </p:sp>
@@ -15245,8 +15605,8 @@
         </p:nvSpPr>
         <p:spPr>
           <a:xfrm>
-            <a:off x="658368" y="932688"/>
-            <a:ext cx="10789920" cy="713232"/>
+            <a:off x="658368" y="914400"/>
+            <a:ext cx="10881360" cy="713232"/>
           </a:xfrm>
           <a:prstGeom prst="rect">
             <a:avLst/>
@@ -15264,17 +15624,17 @@
               <a:buNone/>
             </a:pPr>
             <a:r>
-              <a:rPr lang="en-US" sz="2900" b="1" dirty="0">
+              <a:rPr lang="en-US" sz="2850" b="1" dirty="0">
                 <a:solidFill>
                   <a:srgbClr val="16324F"/>
                 </a:solidFill>
-                <a:latin typeface="Aptos" pitchFamily="34" charset="0"/>
-                <a:ea typeface="Aptos" pitchFamily="34" charset="-122"/>
-                <a:cs typeface="Aptos" pitchFamily="34" charset="-120"/>
+                <a:latin typeface="Aptos Display" pitchFamily="34" charset="0"/>
+                <a:ea typeface="Aptos Display" pitchFamily="34" charset="-122"/>
+                <a:cs typeface="Aptos Display" pitchFamily="34" charset="-120"/>
               </a:rPr>
               <a:t>Input, callback, output</a:t>
             </a:r>
-            <a:endParaRPr lang="en-US" sz="2900" dirty="0"/>
+            <a:endParaRPr lang="en-US" sz="2850" dirty="0"/>
           </a:p>
         </p:txBody>
       </p:sp>
@@ -15286,8 +15646,8 @@
         </p:nvSpPr>
         <p:spPr>
           <a:xfrm>
-            <a:off x="658368" y="1783080"/>
-            <a:ext cx="10899648" cy="4069080"/>
+            <a:off x="658368" y="1755648"/>
+            <a:ext cx="10899648" cy="4096512"/>
           </a:xfrm>
           <a:prstGeom prst="rect">
             <a:avLst/>
@@ -15297,7 +15657,7 @@
           </a:solidFill>
           <a:ln w="12700">
             <a:solidFill>
-              <a:srgbClr val="17212B"/>
+              <a:srgbClr val="243242"/>
             </a:solidFill>
             <a:prstDash val="solid"/>
           </a:ln>
@@ -15305,14 +15665,39 @@
       </p:sp>
       <p:sp>
         <p:nvSpPr>
-          <p:cNvPr id="10" name="Text 8"/>
-          <p:cNvSpPr/>
-          <p:nvPr/>
-        </p:nvSpPr>
-        <p:spPr>
-          <a:xfrm>
-            <a:off x="896112" y="1984248"/>
-            <a:ext cx="9966960" cy="182880"/>
+          <p:cNvPr id="10" name="Shape 8"/>
+          <p:cNvSpPr/>
+          <p:nvPr/>
+        </p:nvSpPr>
+        <p:spPr>
+          <a:xfrm>
+            <a:off x="658368" y="1755648"/>
+            <a:ext cx="10899648" cy="347472"/>
+          </a:xfrm>
+          <a:prstGeom prst="rect">
+            <a:avLst/>
+          </a:prstGeom>
+          <a:solidFill>
+            <a:srgbClr val="223044"/>
+          </a:solidFill>
+          <a:ln w="12700">
+            <a:solidFill>
+              <a:srgbClr val="223044"/>
+            </a:solidFill>
+            <a:prstDash val="solid"/>
+          </a:ln>
+        </p:spPr>
+      </p:sp>
+      <p:sp>
+        <p:nvSpPr>
+          <p:cNvPr id="11" name="Text 9"/>
+          <p:cNvSpPr/>
+          <p:nvPr/>
+        </p:nvSpPr>
+        <p:spPr>
+          <a:xfrm>
+            <a:off x="896112" y="1874520"/>
+            <a:ext cx="9966960" cy="146304"/>
           </a:xfrm>
           <a:prstGeom prst="rect">
             <a:avLst/>
@@ -15330,7 +15715,7 @@
               <a:buNone/>
             </a:pPr>
             <a:r>
-              <a:rPr lang="en-US" sz="850" b="1" spc="70" kern="0" dirty="0">
+              <a:rPr lang="en-US" sz="820" b="1" spc="35" kern="0" dirty="0">
                 <a:solidFill>
                   <a:srgbClr val="8FD3FF"/>
                 </a:solidFill>
@@ -15340,20 +15725,20 @@
               </a:rPr>
               <a:t>python</a:t>
             </a:r>
-            <a:endParaRPr lang="en-US" sz="850" dirty="0"/>
-          </a:p>
-        </p:txBody>
-      </p:sp>
-      <p:sp>
-        <p:nvSpPr>
-          <p:cNvPr id="11" name="Text 9"/>
-          <p:cNvSpPr/>
-          <p:nvPr/>
-        </p:nvSpPr>
-        <p:spPr>
-          <a:xfrm>
-            <a:off x="896112" y="2395728"/>
-            <a:ext cx="9893808" cy="3063240"/>
+            <a:endParaRPr lang="en-US" sz="820" dirty="0"/>
+          </a:p>
+        </p:txBody>
+      </p:sp>
+      <p:sp>
+        <p:nvSpPr>
+          <p:cNvPr id="12" name="Text 10"/>
+          <p:cNvSpPr/>
+          <p:nvPr/>
+        </p:nvSpPr>
+        <p:spPr>
+          <a:xfrm>
+            <a:off x="896112" y="2304288"/>
+            <a:ext cx="9921240" cy="3127248"/>
           </a:xfrm>
           <a:prstGeom prst="rect">
             <a:avLst/>
@@ -15371,7 +15756,7 @@
               <a:buNone/>
             </a:pPr>
             <a:r>
-              <a:rPr lang="en-US" sz="1750" dirty="0">
+              <a:rPr lang="en-US" sz="1500" dirty="0">
                 <a:solidFill>
                   <a:srgbClr val="F4F7FA"/>
                 </a:solidFill>
@@ -15381,14 +15766,14 @@
               </a:rPr>
               <a:t>entry = ttk.Entry(root, width=48)</a:t>
             </a:r>
-            <a:endParaRPr lang="en-US" sz="1750" dirty="0"/>
-          </a:p>
-          <a:p>
-            <a:pPr algn="l" indent="0" marL="0">
-              <a:buNone/>
-            </a:pPr>
-            <a:r>
-              <a:rPr lang="en-US" sz="1750" dirty="0">
+            <a:endParaRPr lang="en-US" sz="1500" dirty="0"/>
+          </a:p>
+          <a:p>
+            <a:pPr algn="l" indent="0" marL="0">
+              <a:buNone/>
+            </a:pPr>
+            <a:r>
+              <a:rPr lang="en-US" sz="1500" dirty="0">
                 <a:solidFill>
                   <a:srgbClr val="F4F7FA"/>
                 </a:solidFill>
@@ -15398,20 +15783,20 @@
               </a:rPr>
               <a:t>result = ttk.Label(root)</a:t>
             </a:r>
-            <a:endParaRPr lang="en-US" sz="1750" dirty="0"/>
-          </a:p>
-          <a:p>
-            <a:pPr algn="l" indent="0" marL="0">
-              <a:buNone/>
-            </a:pPr>
-            <a:endParaRPr lang="en-US" sz="1750" dirty="0"/>
-          </a:p>
-          <a:p>
-            <a:pPr algn="l" indent="0" marL="0">
-              <a:buNone/>
-            </a:pPr>
-            <a:r>
-              <a:rPr lang="en-US" sz="1750" dirty="0">
+            <a:endParaRPr lang="en-US" sz="1500" dirty="0"/>
+          </a:p>
+          <a:p>
+            <a:pPr algn="l" indent="0" marL="0">
+              <a:buNone/>
+            </a:pPr>
+            <a:endParaRPr lang="en-US" sz="1500" dirty="0"/>
+          </a:p>
+          <a:p>
+            <a:pPr algn="l" indent="0" marL="0">
+              <a:buNone/>
+            </a:pPr>
+            <a:r>
+              <a:rPr lang="en-US" sz="1500" dirty="0">
                 <a:solidFill>
                   <a:srgbClr val="F4F7FA"/>
                 </a:solidFill>
@@ -15421,14 +15806,14 @@
               </a:rPr>
               <a:t>def analyze() -&gt; None:</a:t>
             </a:r>
-            <a:endParaRPr lang="en-US" sz="1750" dirty="0"/>
-          </a:p>
-          <a:p>
-            <a:pPr algn="l" indent="0" marL="0">
-              <a:buNone/>
-            </a:pPr>
-            <a:r>
-              <a:rPr lang="en-US" sz="1750" dirty="0">
+            <a:endParaRPr lang="en-US" sz="1500" dirty="0"/>
+          </a:p>
+          <a:p>
+            <a:pPr algn="l" indent="0" marL="0">
+              <a:buNone/>
+            </a:pPr>
+            <a:r>
+              <a:rPr lang="en-US" sz="1500" dirty="0">
                 <a:solidFill>
                   <a:srgbClr val="F4F7FA"/>
                 </a:solidFill>
@@ -15438,14 +15823,14 @@
               </a:rPr>
               <a:t>    text = entry.get()</a:t>
             </a:r>
-            <a:endParaRPr lang="en-US" sz="1750" dirty="0"/>
-          </a:p>
-          <a:p>
-            <a:pPr algn="l" indent="0" marL="0">
-              <a:buNone/>
-            </a:pPr>
-            <a:r>
-              <a:rPr lang="en-US" sz="1750" dirty="0">
+            <a:endParaRPr lang="en-US" sz="1500" dirty="0"/>
+          </a:p>
+          <a:p>
+            <a:pPr algn="l" indent="0" marL="0">
+              <a:buNone/>
+            </a:pPr>
+            <a:r>
+              <a:rPr lang="en-US" sz="1500" dirty="0">
                 <a:solidFill>
                   <a:srgbClr val="F4F7FA"/>
                 </a:solidFill>
@@ -15455,20 +15840,20 @@
               </a:rPr>
               <a:t>    result.config(text=f"Počet znakov: {len(text)}")</a:t>
             </a:r>
-            <a:endParaRPr lang="en-US" sz="1750" dirty="0"/>
-          </a:p>
-          <a:p>
-            <a:pPr algn="l" indent="0" marL="0">
-              <a:buNone/>
-            </a:pPr>
-            <a:endParaRPr lang="en-US" sz="1750" dirty="0"/>
-          </a:p>
-          <a:p>
-            <a:pPr algn="l" indent="0" marL="0">
-              <a:buNone/>
-            </a:pPr>
-            <a:r>
-              <a:rPr lang="en-US" sz="1750" dirty="0">
+            <a:endParaRPr lang="en-US" sz="1500" dirty="0"/>
+          </a:p>
+          <a:p>
+            <a:pPr algn="l" indent="0" marL="0">
+              <a:buNone/>
+            </a:pPr>
+            <a:endParaRPr lang="en-US" sz="1500" dirty="0"/>
+          </a:p>
+          <a:p>
+            <a:pPr algn="l" indent="0" marL="0">
+              <a:buNone/>
+            </a:pPr>
+            <a:r>
+              <a:rPr lang="en-US" sz="1500" dirty="0">
                 <a:solidFill>
                   <a:srgbClr val="F4F7FA"/>
                 </a:solidFill>
@@ -15478,14 +15863,14 @@
               </a:rPr>
               <a:t>entry.grid(row=1, column=0)</a:t>
             </a:r>
-            <a:endParaRPr lang="en-US" sz="1750" dirty="0"/>
-          </a:p>
-          <a:p>
-            <a:pPr algn="l" indent="0" marL="0">
-              <a:buNone/>
-            </a:pPr>
-            <a:r>
-              <a:rPr lang="en-US" sz="1750" dirty="0">
+            <a:endParaRPr lang="en-US" sz="1500" dirty="0"/>
+          </a:p>
+          <a:p>
+            <a:pPr algn="l" indent="0" marL="0">
+              <a:buNone/>
+            </a:pPr>
+            <a:r>
+              <a:rPr lang="en-US" sz="1500" dirty="0">
                 <a:solidFill>
                   <a:srgbClr val="F4F7FA"/>
                 </a:solidFill>
@@ -15495,20 +15880,20 @@
               </a:rPr>
               <a:t>result.grid(row=3, column=0, sticky="w")</a:t>
             </a:r>
-            <a:endParaRPr lang="en-US" sz="1750" dirty="0"/>
-          </a:p>
-        </p:txBody>
-      </p:sp>
-      <p:sp>
-        <p:nvSpPr>
-          <p:cNvPr id="12" name="Text 10"/>
+            <a:endParaRPr lang="en-US" sz="1500" dirty="0"/>
+          </a:p>
+        </p:txBody>
+      </p:sp>
+      <p:sp>
+        <p:nvSpPr>
+          <p:cNvPr id="13" name="Text 11"/>
           <p:cNvSpPr/>
           <p:nvPr/>
         </p:nvSpPr>
         <p:spPr>
           <a:xfrm>
             <a:off x="768096" y="6053328"/>
-            <a:ext cx="9921240" cy="237744"/>
+            <a:ext cx="9921240" cy="256032"/>
           </a:xfrm>
           <a:prstGeom prst="rect">
             <a:avLst/>
@@ -15526,7 +15911,7 @@
               <a:buNone/>
             </a:pPr>
             <a:r>
-              <a:rPr lang="en-US" sz="1550" dirty="0">
+              <a:rPr lang="en-US" sz="1520" dirty="0">
                 <a:solidFill>
                   <a:srgbClr val="5E6B78"/>
                 </a:solidFill>
@@ -15536,7 +15921,7 @@
               </a:rPr>
               <a:t>The callback reads current widget state and updates another widget. This is a simple form of state flow in GUI.</a:t>
             </a:r>
-            <a:endParaRPr lang="en-US" sz="1550" dirty="0"/>
+            <a:endParaRPr lang="en-US" sz="1520" dirty="0"/>
           </a:p>
         </p:txBody>
       </p:sp>
